--- a/policy/proposal_008.pptx
+++ b/policy/proposal_008.pptx
@@ -2192,7 +2192,7 @@
     <p:bg>
       <p:bgPr>
         <a:solidFill>
-          <a:srgbClr val="0A0A0A"/>
+          <a:srgbClr val="F5F6F8"/>
         </a:solidFill>
       </p:bgPr>
     </p:bg>
@@ -2225,11 +2225,11 @@
             <a:avLst/>
           </a:prstGeom>
           <a:solidFill>
-            <a:srgbClr val="D62828"/>
+            <a:srgbClr val="C8161D"/>
           </a:solidFill>
           <a:ln w="12700">
             <a:solidFill>
-              <a:srgbClr val="D62828"/>
+              <a:srgbClr val="C8161D"/>
             </a:solidFill>
             <a:prstDash val="solid"/>
           </a:ln>
@@ -2262,11 +2262,11 @@
             <a:r>
               <a:rPr lang="en-US" sz="1000" b="1" spc="300" kern="0" dirty="0">
                 <a:solidFill>
-                  <a:srgbClr val="D62828"/>
-                </a:solidFill>
-                <a:latin typeface="Arial" pitchFamily="34" charset="0"/>
-                <a:ea typeface="Arial" pitchFamily="34" charset="-122"/>
-                <a:cs typeface="Arial" pitchFamily="34" charset="-120"/>
+                  <a:srgbClr val="C8161D"/>
+                </a:solidFill>
+                <a:latin typeface="Arial" pitchFamily="34" charset="0"/>
+                <a:ea typeface="BIZ UDPGothic" pitchFamily="34" charset="-122"/>
+                <a:cs typeface="BIZ UDPGothic" pitchFamily="34" charset="-120"/>
               </a:rPr>
               <a:t>政策提言プラットフォーム ── 提言008</a:t>
             </a:r>
@@ -2301,11 +2301,11 @@
             <a:r>
               <a:rPr lang="en-US" sz="3200" b="1" dirty="0">
                 <a:solidFill>
-                  <a:srgbClr val="F5F5F0"/>
-                </a:solidFill>
-                <a:latin typeface="Cambria" pitchFamily="34" charset="0"/>
-                <a:ea typeface="Cambria" pitchFamily="34" charset="-122"/>
-                <a:cs typeface="Cambria" pitchFamily="34" charset="-120"/>
+                  <a:srgbClr val="16181D"/>
+                </a:solidFill>
+                <a:latin typeface="BIZ UDPGothic" pitchFamily="34" charset="0"/>
+                <a:ea typeface="BIZ UDPGothic" pitchFamily="34" charset="-122"/>
+                <a:cs typeface="BIZ UDPGothic" pitchFamily="34" charset="-120"/>
               </a:rPr>
               <a:t>公費執行の</a:t>
             </a:r>
@@ -2318,11 +2318,11 @@
             <a:r>
               <a:rPr lang="en-US" sz="3200" b="1" dirty="0">
                 <a:solidFill>
-                  <a:srgbClr val="F5F5F0"/>
-                </a:solidFill>
-                <a:latin typeface="Cambria" pitchFamily="34" charset="0"/>
-                <a:ea typeface="Cambria" pitchFamily="34" charset="-122"/>
-                <a:cs typeface="Cambria" pitchFamily="34" charset="-120"/>
+                  <a:srgbClr val="16181D"/>
+                </a:solidFill>
+                <a:latin typeface="BIZ UDPGothic" pitchFamily="34" charset="0"/>
+                <a:ea typeface="BIZ UDPGothic" pitchFamily="34" charset="-122"/>
+                <a:cs typeface="BIZ UDPGothic" pitchFamily="34" charset="-120"/>
               </a:rPr>
               <a:t>「完全デジタル透明化」と</a:t>
             </a:r>
@@ -2335,11 +2335,11 @@
             <a:r>
               <a:rPr lang="en-US" sz="3200" b="1" dirty="0">
                 <a:solidFill>
-                  <a:srgbClr val="F5F5F0"/>
-                </a:solidFill>
-                <a:latin typeface="Cambria" pitchFamily="34" charset="0"/>
-                <a:ea typeface="Cambria" pitchFamily="34" charset="-122"/>
-                <a:cs typeface="Cambria" pitchFamily="34" charset="-120"/>
+                  <a:srgbClr val="16181D"/>
+                </a:solidFill>
+                <a:latin typeface="BIZ UDPGothic" pitchFamily="34" charset="0"/>
+                <a:ea typeface="BIZ UDPGothic" pitchFamily="34" charset="-122"/>
+                <a:cs typeface="BIZ UDPGothic" pitchFamily="34" charset="-120"/>
               </a:rPr>
               <a:t>多重下請け・利権構造の根絶</a:t>
             </a:r>
@@ -2362,11 +2362,11 @@
             <a:avLst/>
           </a:prstGeom>
           <a:solidFill>
-            <a:srgbClr val="2E2E2E"/>
+            <a:srgbClr val="DDE0E6"/>
           </a:solidFill>
           <a:ln w="12700">
             <a:solidFill>
-              <a:srgbClr val="2E2E2E"/>
+              <a:srgbClr val="DDE0E6"/>
             </a:solidFill>
             <a:prstDash val="solid"/>
           </a:ln>
@@ -2399,11 +2399,11 @@
             <a:r>
               <a:rPr lang="en-US" sz="1100" dirty="0">
                 <a:solidFill>
-                  <a:srgbClr val="888888"/>
-                </a:solidFill>
-                <a:latin typeface="Arial" pitchFamily="34" charset="0"/>
-                <a:ea typeface="Arial" pitchFamily="34" charset="-122"/>
-                <a:cs typeface="Arial" pitchFamily="34" charset="-120"/>
+                  <a:srgbClr val="626875"/>
+                </a:solidFill>
+                <a:latin typeface="Arial" pitchFamily="34" charset="0"/>
+                <a:ea typeface="BIZ UDPGothic" pitchFamily="34" charset="-122"/>
+                <a:cs typeface="BIZ UDPGothic" pitchFamily="34" charset="-120"/>
               </a:rPr>
               <a:t>REBOOT JAPAN ── 市民による政策提言プラットフォーム</a:t>
             </a:r>
@@ -2425,7 +2425,7 @@
     <p:bg>
       <p:bgPr>
         <a:solidFill>
-          <a:srgbClr val="0A0A0A"/>
+          <a:srgbClr val="F5F6F8"/>
         </a:solidFill>
       </p:bgPr>
     </p:bg>
@@ -2470,11 +2470,11 @@
             <a:r>
               <a:rPr lang="en-US" sz="900" b="1" spc="400" kern="0" dirty="0">
                 <a:solidFill>
-                  <a:srgbClr val="D62828"/>
-                </a:solidFill>
-                <a:latin typeface="Arial" pitchFamily="34" charset="0"/>
-                <a:ea typeface="Arial" pitchFamily="34" charset="-122"/>
-                <a:cs typeface="Arial" pitchFamily="34" charset="-120"/>
+                  <a:srgbClr val="C8161D"/>
+                </a:solidFill>
+                <a:latin typeface="Arial" pitchFamily="34" charset="0"/>
+                <a:ea typeface="BIZ UDPGothic" pitchFamily="34" charset="-122"/>
+                <a:cs typeface="BIZ UDPGothic" pitchFamily="34" charset="-120"/>
               </a:rPr>
               <a:t>POLICY 05</a:t>
             </a:r>
@@ -2509,11 +2509,11 @@
             <a:r>
               <a:rPr lang="en-US" sz="2800" b="1" dirty="0">
                 <a:solidFill>
-                  <a:srgbClr val="F5F5F0"/>
-                </a:solidFill>
-                <a:latin typeface="Cambria" pitchFamily="34" charset="0"/>
-                <a:ea typeface="Cambria" pitchFamily="34" charset="-122"/>
-                <a:cs typeface="Cambria" pitchFamily="34" charset="-120"/>
+                  <a:srgbClr val="16181D"/>
+                </a:solidFill>
+                <a:latin typeface="BIZ UDPGothic" pitchFamily="34" charset="0"/>
+                <a:ea typeface="BIZ UDPGothic" pitchFamily="34" charset="-122"/>
+                <a:cs typeface="BIZ UDPGothic" pitchFamily="34" charset="-120"/>
               </a:rPr>
               <a:t>入札プロセスの透明化と多重下請け構造の法的解体</a:t>
             </a:r>
@@ -2536,11 +2536,11 @@
             <a:avLst/>
           </a:prstGeom>
           <a:solidFill>
-            <a:srgbClr val="2E2E2E"/>
+            <a:srgbClr val="DDE0E6"/>
           </a:solidFill>
           <a:ln w="12700">
             <a:solidFill>
-              <a:srgbClr val="2E2E2E"/>
+              <a:srgbClr val="DDE0E6"/>
             </a:solidFill>
             <a:prstDash val="solid"/>
           </a:ln>
@@ -2573,11 +2573,11 @@
             <a:r>
               <a:rPr lang="en-US" sz="1100" dirty="0">
                 <a:solidFill>
-                  <a:srgbClr val="CCCCCC"/>
-                </a:solidFill>
-                <a:latin typeface="Arial" pitchFamily="34" charset="0"/>
-                <a:ea typeface="Arial" pitchFamily="34" charset="-122"/>
-                <a:cs typeface="Arial" pitchFamily="34" charset="-120"/>
+                  <a:srgbClr val="2B2F36"/>
+                </a:solidFill>
+                <a:latin typeface="Arial" pitchFamily="34" charset="0"/>
+                <a:ea typeface="BIZ UDPGothic" pitchFamily="34" charset="-122"/>
+                <a:cs typeface="BIZ UDPGothic" pitchFamily="34" charset="-120"/>
               </a:rPr>
               <a:t>公共事業・政府案件の入札制度を根本から改革。以下の4ルールを法的に義務付ける。</a:t>
             </a:r>
@@ -2602,11 +2602,11 @@
             </a:avLst>
           </a:prstGeom>
           <a:solidFill>
-            <a:srgbClr val="1A1A1A"/>
+            <a:srgbClr val="FFFFFF"/>
           </a:solidFill>
           <a:ln w="12700">
             <a:solidFill>
-              <a:srgbClr val="2E2E2E"/>
+              <a:srgbClr val="DDE0E6"/>
             </a:solidFill>
             <a:prstDash val="solid"/>
           </a:ln>
@@ -2629,11 +2629,11 @@
             </a:avLst>
           </a:prstGeom>
           <a:solidFill>
-            <a:srgbClr val="D62828"/>
+            <a:srgbClr val="C8161D"/>
           </a:solidFill>
           <a:ln w="12700">
             <a:solidFill>
-              <a:srgbClr val="D62828"/>
+              <a:srgbClr val="C8161D"/>
             </a:solidFill>
             <a:prstDash val="solid"/>
           </a:ln>
@@ -2666,11 +2666,11 @@
             <a:r>
               <a:rPr lang="en-US" sz="1400" b="1" dirty="0">
                 <a:solidFill>
-                  <a:srgbClr val="F5F5F0"/>
-                </a:solidFill>
-                <a:latin typeface="Arial" pitchFamily="34" charset="0"/>
-                <a:ea typeface="Arial" pitchFamily="34" charset="-122"/>
-                <a:cs typeface="Arial" pitchFamily="34" charset="-120"/>
+                  <a:srgbClr val="FFFFFF"/>
+                </a:solidFill>
+                <a:latin typeface="Arial" pitchFamily="34" charset="0"/>
+                <a:ea typeface="BIZ UDPGothic" pitchFamily="34" charset="-122"/>
+                <a:cs typeface="BIZ UDPGothic" pitchFamily="34" charset="-120"/>
               </a:rPr>
               <a:t>01</a:t>
             </a:r>
@@ -2705,11 +2705,11 @@
             <a:r>
               <a:rPr lang="en-US" sz="1300" b="1" dirty="0">
                 <a:solidFill>
-                  <a:srgbClr val="F5F5F0"/>
-                </a:solidFill>
-                <a:latin typeface="Cambria" pitchFamily="34" charset="0"/>
-                <a:ea typeface="Cambria" pitchFamily="34" charset="-122"/>
-                <a:cs typeface="Cambria" pitchFamily="34" charset="-120"/>
+                  <a:srgbClr val="16181D"/>
+                </a:solidFill>
+                <a:latin typeface="BIZ UDPGothic" pitchFamily="34" charset="0"/>
+                <a:ea typeface="BIZ UDPGothic" pitchFamily="34" charset="-122"/>
+                <a:cs typeface="BIZ UDPGothic" pitchFamily="34" charset="-120"/>
               </a:rPr>
               <a:t>入札時点での下請け業者の確定・開示</a:t>
             </a:r>
@@ -2744,11 +2744,11 @@
             <a:r>
               <a:rPr lang="en-US" sz="1000" dirty="0">
                 <a:solidFill>
-                  <a:srgbClr val="CCCCCC"/>
-                </a:solidFill>
-                <a:latin typeface="Arial" pitchFamily="34" charset="0"/>
-                <a:ea typeface="Arial" pitchFamily="34" charset="-122"/>
-                <a:cs typeface="Arial" pitchFamily="34" charset="-120"/>
+                  <a:srgbClr val="2B2F36"/>
+                </a:solidFill>
+                <a:latin typeface="Arial" pitchFamily="34" charset="0"/>
+                <a:ea typeface="BIZ UDPGothic" pitchFamily="34" charset="-122"/>
+                <a:cs typeface="BIZ UDPGothic" pitchFamily="34" charset="-120"/>
               </a:rPr>
               <a:t>応札企業は入札時点で全ての下請け業者を開示・確定させる。事後の丸投げ・孫請けへの再委託は一切禁止。</a:t>
             </a:r>
@@ -2773,11 +2773,11 @@
             </a:avLst>
           </a:prstGeom>
           <a:solidFill>
-            <a:srgbClr val="1A1A1A"/>
+            <a:srgbClr val="FFFFFF"/>
           </a:solidFill>
           <a:ln w="12700">
             <a:solidFill>
-              <a:srgbClr val="2E2E2E"/>
+              <a:srgbClr val="DDE0E6"/>
             </a:solidFill>
             <a:prstDash val="solid"/>
           </a:ln>
@@ -2800,11 +2800,11 @@
             </a:avLst>
           </a:prstGeom>
           <a:solidFill>
-            <a:srgbClr val="D62828"/>
+            <a:srgbClr val="C8161D"/>
           </a:solidFill>
           <a:ln w="12700">
             <a:solidFill>
-              <a:srgbClr val="D62828"/>
+              <a:srgbClr val="C8161D"/>
             </a:solidFill>
             <a:prstDash val="solid"/>
           </a:ln>
@@ -2837,11 +2837,11 @@
             <a:r>
               <a:rPr lang="en-US" sz="1400" b="1" dirty="0">
                 <a:solidFill>
-                  <a:srgbClr val="F5F5F0"/>
-                </a:solidFill>
-                <a:latin typeface="Arial" pitchFamily="34" charset="0"/>
-                <a:ea typeface="Arial" pitchFamily="34" charset="-122"/>
-                <a:cs typeface="Arial" pitchFamily="34" charset="-120"/>
+                  <a:srgbClr val="FFFFFF"/>
+                </a:solidFill>
+                <a:latin typeface="Arial" pitchFamily="34" charset="0"/>
+                <a:ea typeface="BIZ UDPGothic" pitchFamily="34" charset="-122"/>
+                <a:cs typeface="BIZ UDPGothic" pitchFamily="34" charset="-120"/>
               </a:rPr>
               <a:t>02</a:t>
             </a:r>
@@ -2876,11 +2876,11 @@
             <a:r>
               <a:rPr lang="en-US" sz="1300" b="1" dirty="0">
                 <a:solidFill>
-                  <a:srgbClr val="F5F5F0"/>
-                </a:solidFill>
-                <a:latin typeface="Cambria" pitchFamily="34" charset="0"/>
-                <a:ea typeface="Cambria" pitchFamily="34" charset="-122"/>
-                <a:cs typeface="Cambria" pitchFamily="34" charset="-120"/>
+                  <a:srgbClr val="16181D"/>
+                </a:solidFill>
+                <a:latin typeface="BIZ UDPGothic" pitchFamily="34" charset="0"/>
+                <a:ea typeface="BIZ UDPGothic" pitchFamily="34" charset="-122"/>
+                <a:cs typeface="BIZ UDPGothic" pitchFamily="34" charset="-120"/>
               </a:rPr>
               <a:t>下請け自身による直接見積もり</a:t>
             </a:r>
@@ -2915,11 +2915,11 @@
             <a:r>
               <a:rPr lang="en-US" sz="1000" dirty="0">
                 <a:solidFill>
-                  <a:srgbClr val="CCCCCC"/>
-                </a:solidFill>
-                <a:latin typeface="Arial" pitchFamily="34" charset="0"/>
-                <a:ea typeface="Arial" pitchFamily="34" charset="-122"/>
-                <a:cs typeface="Arial" pitchFamily="34" charset="-120"/>
+                  <a:srgbClr val="2B2F36"/>
+                </a:solidFill>
+                <a:latin typeface="Arial" pitchFamily="34" charset="0"/>
+                <a:ea typeface="BIZ UDPGothic" pitchFamily="34" charset="-122"/>
+                <a:cs typeface="BIZ UDPGothic" pitchFamily="34" charset="-120"/>
               </a:rPr>
               <a:t>下請け担当部分の入札内訳は、下請け自身が作成した見積書をそのまま添付。元請けによる買い叩き・不当マージンをシステム的に排除。</a:t>
             </a:r>
@@ -2944,11 +2944,11 @@
             </a:avLst>
           </a:prstGeom>
           <a:solidFill>
-            <a:srgbClr val="1A1A1A"/>
+            <a:srgbClr val="FFFFFF"/>
           </a:solidFill>
           <a:ln w="12700">
             <a:solidFill>
-              <a:srgbClr val="2E2E2E"/>
+              <a:srgbClr val="DDE0E6"/>
             </a:solidFill>
             <a:prstDash val="solid"/>
           </a:ln>
@@ -2971,11 +2971,11 @@
             </a:avLst>
           </a:prstGeom>
           <a:solidFill>
-            <a:srgbClr val="D62828"/>
+            <a:srgbClr val="C8161D"/>
           </a:solidFill>
           <a:ln w="12700">
             <a:solidFill>
-              <a:srgbClr val="D62828"/>
+              <a:srgbClr val="C8161D"/>
             </a:solidFill>
             <a:prstDash val="solid"/>
           </a:ln>
@@ -3008,11 +3008,11 @@
             <a:r>
               <a:rPr lang="en-US" sz="1400" b="1" dirty="0">
                 <a:solidFill>
-                  <a:srgbClr val="F5F5F0"/>
-                </a:solidFill>
-                <a:latin typeface="Arial" pitchFamily="34" charset="0"/>
-                <a:ea typeface="Arial" pitchFamily="34" charset="-122"/>
-                <a:cs typeface="Arial" pitchFamily="34" charset="-120"/>
+                  <a:srgbClr val="FFFFFF"/>
+                </a:solidFill>
+                <a:latin typeface="Arial" pitchFamily="34" charset="0"/>
+                <a:ea typeface="BIZ UDPGothic" pitchFamily="34" charset="-122"/>
+                <a:cs typeface="BIZ UDPGothic" pitchFamily="34" charset="-120"/>
               </a:rPr>
               <a:t>03</a:t>
             </a:r>
@@ -3047,11 +3047,11 @@
             <a:r>
               <a:rPr lang="en-US" sz="1300" b="1" dirty="0">
                 <a:solidFill>
-                  <a:srgbClr val="F5F5F0"/>
-                </a:solidFill>
-                <a:latin typeface="Cambria" pitchFamily="34" charset="0"/>
-                <a:ea typeface="Cambria" pitchFamily="34" charset="-122"/>
-                <a:cs typeface="Cambria" pitchFamily="34" charset="-120"/>
+                  <a:srgbClr val="16181D"/>
+                </a:solidFill>
+                <a:latin typeface="BIZ UDPGothic" pitchFamily="34" charset="0"/>
+                <a:ea typeface="BIZ UDPGothic" pitchFamily="34" charset="-122"/>
+                <a:cs typeface="BIZ UDPGothic" pitchFamily="34" charset="-120"/>
               </a:rPr>
               <a:t>支払金額の透明化とE2E決済</a:t>
             </a:r>
@@ -3086,11 +3086,11 @@
             <a:r>
               <a:rPr lang="en-US" sz="1000" dirty="0">
                 <a:solidFill>
-                  <a:srgbClr val="CCCCCC"/>
-                </a:solidFill>
-                <a:latin typeface="Arial" pitchFamily="34" charset="0"/>
-                <a:ea typeface="Arial" pitchFamily="34" charset="-122"/>
-                <a:cs typeface="Arial" pitchFamily="34" charset="-120"/>
+                  <a:srgbClr val="2B2F36"/>
+                </a:solidFill>
+                <a:latin typeface="Arial" pitchFamily="34" charset="0"/>
+                <a:ea typeface="BIZ UDPGothic" pitchFamily="34" charset="-122"/>
+                <a:cs typeface="BIZ UDPGothic" pitchFamily="34" charset="-120"/>
               </a:rPr>
               <a:t>下請けへの支払金額を契約時に明示し、公費管理クラウドを通じて中抜きなしで直接支払うE2E決済を構築。</a:t>
             </a:r>
@@ -3115,11 +3115,11 @@
             </a:avLst>
           </a:prstGeom>
           <a:solidFill>
-            <a:srgbClr val="1A1A1A"/>
+            <a:srgbClr val="FFFFFF"/>
           </a:solidFill>
           <a:ln w="12700">
             <a:solidFill>
-              <a:srgbClr val="2E2E2E"/>
+              <a:srgbClr val="DDE0E6"/>
             </a:solidFill>
             <a:prstDash val="solid"/>
           </a:ln>
@@ -3142,11 +3142,11 @@
             </a:avLst>
           </a:prstGeom>
           <a:solidFill>
-            <a:srgbClr val="D62828"/>
+            <a:srgbClr val="C8161D"/>
           </a:solidFill>
           <a:ln w="12700">
             <a:solidFill>
-              <a:srgbClr val="D62828"/>
+              <a:srgbClr val="C8161D"/>
             </a:solidFill>
             <a:prstDash val="solid"/>
           </a:ln>
@@ -3179,11 +3179,11 @@
             <a:r>
               <a:rPr lang="en-US" sz="1400" b="1" dirty="0">
                 <a:solidFill>
-                  <a:srgbClr val="F5F5F0"/>
-                </a:solidFill>
-                <a:latin typeface="Arial" pitchFamily="34" charset="0"/>
-                <a:ea typeface="Arial" pitchFamily="34" charset="-122"/>
-                <a:cs typeface="Arial" pitchFamily="34" charset="-120"/>
+                  <a:srgbClr val="FFFFFF"/>
+                </a:solidFill>
+                <a:latin typeface="Arial" pitchFamily="34" charset="0"/>
+                <a:ea typeface="BIZ UDPGothic" pitchFamily="34" charset="-122"/>
+                <a:cs typeface="BIZ UDPGothic" pitchFamily="34" charset="-120"/>
               </a:rPr>
               <a:t>04</a:t>
             </a:r>
@@ -3218,11 +3218,11 @@
             <a:r>
               <a:rPr lang="en-US" sz="1300" b="1" dirty="0">
                 <a:solidFill>
-                  <a:srgbClr val="F5F5F0"/>
-                </a:solidFill>
-                <a:latin typeface="Cambria" pitchFamily="34" charset="0"/>
-                <a:ea typeface="Cambria" pitchFamily="34" charset="-122"/>
-                <a:cs typeface="Cambria" pitchFamily="34" charset="-120"/>
+                  <a:srgbClr val="16181D"/>
+                </a:solidFill>
+                <a:latin typeface="BIZ UDPGothic" pitchFamily="34" charset="0"/>
+                <a:ea typeface="BIZ UDPGothic" pitchFamily="34" charset="-122"/>
+                <a:cs typeface="BIZ UDPGothic" pitchFamily="34" charset="-120"/>
               </a:rPr>
               <a:t>架空下請け・名義貸しの禁止と入札資格即時停止</a:t>
             </a:r>
@@ -3257,11 +3257,11 @@
             <a:r>
               <a:rPr lang="en-US" sz="1000" dirty="0">
                 <a:solidFill>
-                  <a:srgbClr val="CCCCCC"/>
-                </a:solidFill>
-                <a:latin typeface="Arial" pitchFamily="34" charset="0"/>
-                <a:ea typeface="Arial" pitchFamily="34" charset="-122"/>
-                <a:cs typeface="Arial" pitchFamily="34" charset="-120"/>
+                  <a:srgbClr val="2B2F36"/>
+                </a:solidFill>
+                <a:latin typeface="Arial" pitchFamily="34" charset="0"/>
+                <a:ea typeface="BIZ UDPGothic" pitchFamily="34" charset="-122"/>
+                <a:cs typeface="BIZ UDPGothic" pitchFamily="34" charset="-120"/>
               </a:rPr>
               <a:t>実務を行わない架空下請け・名義貸しを法的に明文禁止。発覚した場合は元請け・当該業者ともに入札資格を即時停止する。</a:t>
             </a:r>
@@ -3283,7 +3283,7 @@
     <p:bg>
       <p:bgPr>
         <a:solidFill>
-          <a:srgbClr val="0A0A0A"/>
+          <a:srgbClr val="F5F6F8"/>
         </a:solidFill>
       </p:bgPr>
     </p:bg>
@@ -3328,11 +3328,11 @@
             <a:r>
               <a:rPr lang="en-US" sz="900" b="1" spc="400" kern="0" dirty="0">
                 <a:solidFill>
-                  <a:srgbClr val="D62828"/>
-                </a:solidFill>
-                <a:latin typeface="Arial" pitchFamily="34" charset="0"/>
-                <a:ea typeface="Arial" pitchFamily="34" charset="-122"/>
-                <a:cs typeface="Arial" pitchFamily="34" charset="-120"/>
+                  <a:srgbClr val="C8161D"/>
+                </a:solidFill>
+                <a:latin typeface="Arial" pitchFamily="34" charset="0"/>
+                <a:ea typeface="BIZ UDPGothic" pitchFamily="34" charset="-122"/>
+                <a:cs typeface="BIZ UDPGothic" pitchFamily="34" charset="-120"/>
               </a:rPr>
               <a:t>POLICY 05 — IMPACT</a:t>
             </a:r>
@@ -3367,11 +3367,11 @@
             <a:r>
               <a:rPr lang="en-US" sz="2800" b="1" dirty="0">
                 <a:solidFill>
-                  <a:srgbClr val="F5F5F0"/>
-                </a:solidFill>
-                <a:latin typeface="Cambria" pitchFamily="34" charset="0"/>
-                <a:ea typeface="Cambria" pitchFamily="34" charset="-122"/>
-                <a:cs typeface="Cambria" pitchFamily="34" charset="-120"/>
+                  <a:srgbClr val="16181D"/>
+                </a:solidFill>
+                <a:latin typeface="BIZ UDPGothic" pitchFamily="34" charset="0"/>
+                <a:ea typeface="BIZ UDPGothic" pitchFamily="34" charset="-122"/>
+                <a:cs typeface="BIZ UDPGothic" pitchFamily="34" charset="-120"/>
               </a:rPr>
               <a:t>多重下請け構造の解体：現行 vs 改革後</a:t>
             </a:r>
@@ -3394,11 +3394,11 @@
             <a:avLst/>
           </a:prstGeom>
           <a:solidFill>
-            <a:srgbClr val="2E2E2E"/>
+            <a:srgbClr val="DDE0E6"/>
           </a:solidFill>
           <a:ln w="12700">
             <a:solidFill>
-              <a:srgbClr val="2E2E2E"/>
+              <a:srgbClr val="DDE0E6"/>
             </a:solidFill>
             <a:prstDash val="solid"/>
           </a:ln>
@@ -3431,11 +3431,11 @@
             <a:r>
               <a:rPr lang="en-US" sz="1400" b="1" dirty="0">
                 <a:solidFill>
-                  <a:srgbClr val="D62828"/>
-                </a:solidFill>
-                <a:latin typeface="Cambria" pitchFamily="34" charset="0"/>
-                <a:ea typeface="Cambria" pitchFamily="34" charset="-122"/>
-                <a:cs typeface="Cambria" pitchFamily="34" charset="-120"/>
+                  <a:srgbClr val="C8161D"/>
+                </a:solidFill>
+                <a:latin typeface="BIZ UDPGothic" pitchFamily="34" charset="0"/>
+                <a:ea typeface="BIZ UDPGothic" pitchFamily="34" charset="-122"/>
+                <a:cs typeface="BIZ UDPGothic" pitchFamily="34" charset="-120"/>
               </a:rPr>
               <a:t>現行の構造</a:t>
             </a:r>
@@ -3470,11 +3470,11 @@
             <a:r>
               <a:rPr lang="en-US" sz="1400" b="1" dirty="0">
                 <a:solidFill>
-                  <a:srgbClr val="4CAF50"/>
-                </a:solidFill>
-                <a:latin typeface="Cambria" pitchFamily="34" charset="0"/>
-                <a:ea typeface="Cambria" pitchFamily="34" charset="-122"/>
-                <a:cs typeface="Cambria" pitchFamily="34" charset="-120"/>
+                  <a:srgbClr val="1D4F91"/>
+                </a:solidFill>
+                <a:latin typeface="BIZ UDPGothic" pitchFamily="34" charset="0"/>
+                <a:ea typeface="BIZ UDPGothic" pitchFamily="34" charset="-122"/>
+                <a:cs typeface="BIZ UDPGothic" pitchFamily="34" charset="-120"/>
               </a:rPr>
               <a:t>改革後の構造</a:t>
             </a:r>
@@ -3499,11 +3499,11 @@
             </a:avLst>
           </a:prstGeom>
           <a:solidFill>
-            <a:srgbClr val="1A0808"/>
+            <a:srgbClr val="FCEBEB"/>
           </a:solidFill>
           <a:ln w="12700">
             <a:solidFill>
-              <a:srgbClr val="2E2E2E"/>
+              <a:srgbClr val="DDE0E6"/>
             </a:solidFill>
             <a:prstDash val="solid"/>
           </a:ln>
@@ -3526,11 +3526,11 @@
             </a:avLst>
           </a:prstGeom>
           <a:solidFill>
-            <a:srgbClr val="081808"/>
+            <a:srgbClr val="E9EFF8"/>
           </a:solidFill>
           <a:ln w="12700">
             <a:solidFill>
-              <a:srgbClr val="2E2E2E"/>
+              <a:srgbClr val="DDE0E6"/>
             </a:solidFill>
             <a:prstDash val="solid"/>
           </a:ln>
@@ -3563,11 +3563,11 @@
             <a:r>
               <a:rPr lang="en-US" sz="1000" dirty="0">
                 <a:solidFill>
-                  <a:srgbClr val="CCCCCC"/>
-                </a:solidFill>
-                <a:latin typeface="Arial" pitchFamily="34" charset="0"/>
-                <a:ea typeface="Arial" pitchFamily="34" charset="-122"/>
-                <a:cs typeface="Arial" pitchFamily="34" charset="-120"/>
+                  <a:srgbClr val="2B2F36"/>
+                </a:solidFill>
+                <a:latin typeface="Arial" pitchFamily="34" charset="0"/>
+                <a:ea typeface="BIZ UDPGothic" pitchFamily="34" charset="-122"/>
+                <a:cs typeface="BIZ UDPGothic" pitchFamily="34" charset="-120"/>
               </a:rPr>
               <a:t>元請け → 中間業者 → 下請け（金額不透明）</a:t>
             </a:r>
@@ -3602,11 +3602,11 @@
             <a:r>
               <a:rPr lang="en-US" sz="1000" dirty="0">
                 <a:solidFill>
-                  <a:srgbClr val="CCCCCC"/>
-                </a:solidFill>
-                <a:latin typeface="Arial" pitchFamily="34" charset="0"/>
-                <a:ea typeface="Arial" pitchFamily="34" charset="-122"/>
-                <a:cs typeface="Arial" pitchFamily="34" charset="-120"/>
+                  <a:srgbClr val="2B2F36"/>
+                </a:solidFill>
+                <a:latin typeface="Arial" pitchFamily="34" charset="0"/>
+                <a:ea typeface="BIZ UDPGothic" pitchFamily="34" charset="-122"/>
+                <a:cs typeface="BIZ UDPGothic" pitchFamily="34" charset="-120"/>
               </a:rPr>
               <a:t>発注者 → 下請け（直接・金額固定）</a:t>
             </a:r>
@@ -3641,11 +3641,11 @@
             <a:r>
               <a:rPr lang="en-US" sz="1800" dirty="0">
                 <a:solidFill>
-                  <a:srgbClr val="D62828"/>
-                </a:solidFill>
-                <a:latin typeface="Arial" pitchFamily="34" charset="0"/>
-                <a:ea typeface="Arial" pitchFamily="34" charset="-122"/>
-                <a:cs typeface="Arial" pitchFamily="34" charset="-120"/>
+                  <a:srgbClr val="C8161D"/>
+                </a:solidFill>
+                <a:latin typeface="Arial" pitchFamily="34" charset="0"/>
+                <a:ea typeface="BIZ UDPGothic" pitchFamily="34" charset="-122"/>
+                <a:cs typeface="BIZ UDPGothic" pitchFamily="34" charset="-120"/>
               </a:rPr>
               <a:t>→</a:t>
             </a:r>
@@ -3670,11 +3670,11 @@
             </a:avLst>
           </a:prstGeom>
           <a:solidFill>
-            <a:srgbClr val="1A0808"/>
+            <a:srgbClr val="FCEBEB"/>
           </a:solidFill>
           <a:ln w="12700">
             <a:solidFill>
-              <a:srgbClr val="2E2E2E"/>
+              <a:srgbClr val="DDE0E6"/>
             </a:solidFill>
             <a:prstDash val="solid"/>
           </a:ln>
@@ -3697,11 +3697,11 @@
             </a:avLst>
           </a:prstGeom>
           <a:solidFill>
-            <a:srgbClr val="081808"/>
+            <a:srgbClr val="E9EFF8"/>
           </a:solidFill>
           <a:ln w="12700">
             <a:solidFill>
-              <a:srgbClr val="2E2E2E"/>
+              <a:srgbClr val="DDE0E6"/>
             </a:solidFill>
             <a:prstDash val="solid"/>
           </a:ln>
@@ -3734,11 +3734,11 @@
             <a:r>
               <a:rPr lang="en-US" sz="1000" dirty="0">
                 <a:solidFill>
-                  <a:srgbClr val="CCCCCC"/>
-                </a:solidFill>
-                <a:latin typeface="Arial" pitchFamily="34" charset="0"/>
-                <a:ea typeface="Arial" pitchFamily="34" charset="-122"/>
-                <a:cs typeface="Arial" pitchFamily="34" charset="-120"/>
+                  <a:srgbClr val="2B2F36"/>
+                </a:solidFill>
+                <a:latin typeface="Arial" pitchFamily="34" charset="0"/>
+                <a:ea typeface="BIZ UDPGothic" pitchFamily="34" charset="-122"/>
+                <a:cs typeface="BIZ UDPGothic" pitchFamily="34" charset="-120"/>
               </a:rPr>
               <a:t>事後の丸投げ・孫請けが横行</a:t>
             </a:r>
@@ -3773,11 +3773,11 @@
             <a:r>
               <a:rPr lang="en-US" sz="1000" dirty="0">
                 <a:solidFill>
-                  <a:srgbClr val="CCCCCC"/>
-                </a:solidFill>
-                <a:latin typeface="Arial" pitchFamily="34" charset="0"/>
-                <a:ea typeface="Arial" pitchFamily="34" charset="-122"/>
-                <a:cs typeface="Arial" pitchFamily="34" charset="-120"/>
+                  <a:srgbClr val="2B2F36"/>
+                </a:solidFill>
+                <a:latin typeface="Arial" pitchFamily="34" charset="0"/>
+                <a:ea typeface="BIZ UDPGothic" pitchFamily="34" charset="-122"/>
+                <a:cs typeface="BIZ UDPGothic" pitchFamily="34" charset="-120"/>
               </a:rPr>
               <a:t>入札時点で全業者・全金額を確定</a:t>
             </a:r>
@@ -3812,11 +3812,11 @@
             <a:r>
               <a:rPr lang="en-US" sz="1800" dirty="0">
                 <a:solidFill>
-                  <a:srgbClr val="D62828"/>
-                </a:solidFill>
-                <a:latin typeface="Arial" pitchFamily="34" charset="0"/>
-                <a:ea typeface="Arial" pitchFamily="34" charset="-122"/>
-                <a:cs typeface="Arial" pitchFamily="34" charset="-120"/>
+                  <a:srgbClr val="C8161D"/>
+                </a:solidFill>
+                <a:latin typeface="Arial" pitchFamily="34" charset="0"/>
+                <a:ea typeface="BIZ UDPGothic" pitchFamily="34" charset="-122"/>
+                <a:cs typeface="BIZ UDPGothic" pitchFamily="34" charset="-120"/>
               </a:rPr>
               <a:t>→</a:t>
             </a:r>
@@ -3841,11 +3841,11 @@
             </a:avLst>
           </a:prstGeom>
           <a:solidFill>
-            <a:srgbClr val="1A0808"/>
+            <a:srgbClr val="FCEBEB"/>
           </a:solidFill>
           <a:ln w="12700">
             <a:solidFill>
-              <a:srgbClr val="2E2E2E"/>
+              <a:srgbClr val="DDE0E6"/>
             </a:solidFill>
             <a:prstDash val="solid"/>
           </a:ln>
@@ -3868,11 +3868,11 @@
             </a:avLst>
           </a:prstGeom>
           <a:solidFill>
-            <a:srgbClr val="081808"/>
+            <a:srgbClr val="E9EFF8"/>
           </a:solidFill>
           <a:ln w="12700">
             <a:solidFill>
-              <a:srgbClr val="2E2E2E"/>
+              <a:srgbClr val="DDE0E6"/>
             </a:solidFill>
             <a:prstDash val="solid"/>
           </a:ln>
@@ -3905,11 +3905,11 @@
             <a:r>
               <a:rPr lang="en-US" sz="1000" dirty="0">
                 <a:solidFill>
-                  <a:srgbClr val="CCCCCC"/>
-                </a:solidFill>
-                <a:latin typeface="Arial" pitchFamily="34" charset="0"/>
-                <a:ea typeface="Arial" pitchFamily="34" charset="-122"/>
-                <a:cs typeface="Arial" pitchFamily="34" charset="-120"/>
+                  <a:srgbClr val="2B2F36"/>
+                </a:solidFill>
+                <a:latin typeface="Arial" pitchFamily="34" charset="0"/>
+                <a:ea typeface="BIZ UDPGothic" pitchFamily="34" charset="-122"/>
+                <a:cs typeface="BIZ UDPGothic" pitchFamily="34" charset="-120"/>
               </a:rPr>
               <a:t>元請けが下請けを自由に買い叩く</a:t>
             </a:r>
@@ -3944,11 +3944,11 @@
             <a:r>
               <a:rPr lang="en-US" sz="1000" dirty="0">
                 <a:solidFill>
-                  <a:srgbClr val="CCCCCC"/>
-                </a:solidFill>
-                <a:latin typeface="Arial" pitchFamily="34" charset="0"/>
-                <a:ea typeface="Arial" pitchFamily="34" charset="-122"/>
-                <a:cs typeface="Arial" pitchFamily="34" charset="-120"/>
+                  <a:srgbClr val="2B2F36"/>
+                </a:solidFill>
+                <a:latin typeface="Arial" pitchFamily="34" charset="0"/>
+                <a:ea typeface="BIZ UDPGothic" pitchFamily="34" charset="-122"/>
+                <a:cs typeface="BIZ UDPGothic" pitchFamily="34" charset="-120"/>
               </a:rPr>
               <a:t>下請け自身の見積書が契約に直結</a:t>
             </a:r>
@@ -3983,11 +3983,11 @@
             <a:r>
               <a:rPr lang="en-US" sz="1800" dirty="0">
                 <a:solidFill>
-                  <a:srgbClr val="D62828"/>
-                </a:solidFill>
-                <a:latin typeface="Arial" pitchFamily="34" charset="0"/>
-                <a:ea typeface="Arial" pitchFamily="34" charset="-122"/>
-                <a:cs typeface="Arial" pitchFamily="34" charset="-120"/>
+                  <a:srgbClr val="C8161D"/>
+                </a:solidFill>
+                <a:latin typeface="Arial" pitchFamily="34" charset="0"/>
+                <a:ea typeface="BIZ UDPGothic" pitchFamily="34" charset="-122"/>
+                <a:cs typeface="BIZ UDPGothic" pitchFamily="34" charset="-120"/>
               </a:rPr>
               <a:t>→</a:t>
             </a:r>
@@ -4012,11 +4012,11 @@
             </a:avLst>
           </a:prstGeom>
           <a:solidFill>
-            <a:srgbClr val="1A0808"/>
+            <a:srgbClr val="FCEBEB"/>
           </a:solidFill>
           <a:ln w="12700">
             <a:solidFill>
-              <a:srgbClr val="2E2E2E"/>
+              <a:srgbClr val="DDE0E6"/>
             </a:solidFill>
             <a:prstDash val="solid"/>
           </a:ln>
@@ -4039,11 +4039,11 @@
             </a:avLst>
           </a:prstGeom>
           <a:solidFill>
-            <a:srgbClr val="081808"/>
+            <a:srgbClr val="E9EFF8"/>
           </a:solidFill>
           <a:ln w="12700">
             <a:solidFill>
-              <a:srgbClr val="2E2E2E"/>
+              <a:srgbClr val="DDE0E6"/>
             </a:solidFill>
             <a:prstDash val="solid"/>
           </a:ln>
@@ -4076,11 +4076,11 @@
             <a:r>
               <a:rPr lang="en-US" sz="1000" dirty="0">
                 <a:solidFill>
-                  <a:srgbClr val="CCCCCC"/>
-                </a:solidFill>
-                <a:latin typeface="Arial" pitchFamily="34" charset="0"/>
-                <a:ea typeface="Arial" pitchFamily="34" charset="-122"/>
-                <a:cs typeface="Arial" pitchFamily="34" charset="-120"/>
+                  <a:srgbClr val="2B2F36"/>
+                </a:solidFill>
+                <a:latin typeface="Arial" pitchFamily="34" charset="0"/>
+                <a:ea typeface="BIZ UDPGothic" pitchFamily="34" charset="-122"/>
+                <a:cs typeface="BIZ UDPGothic" pitchFamily="34" charset="-120"/>
               </a:rPr>
               <a:t>架空下請け・名義貸しが横行</a:t>
             </a:r>
@@ -4115,11 +4115,11 @@
             <a:r>
               <a:rPr lang="en-US" sz="1000" dirty="0">
                 <a:solidFill>
-                  <a:srgbClr val="CCCCCC"/>
-                </a:solidFill>
-                <a:latin typeface="Arial" pitchFamily="34" charset="0"/>
-                <a:ea typeface="Arial" pitchFamily="34" charset="-122"/>
-                <a:cs typeface="Arial" pitchFamily="34" charset="-120"/>
+                  <a:srgbClr val="2B2F36"/>
+                </a:solidFill>
+                <a:latin typeface="Arial" pitchFamily="34" charset="0"/>
+                <a:ea typeface="BIZ UDPGothic" pitchFamily="34" charset="-122"/>
+                <a:cs typeface="BIZ UDPGothic" pitchFamily="34" charset="-120"/>
               </a:rPr>
               <a:t>発覚次第、入札資格を即時停止</a:t>
             </a:r>
@@ -4154,11 +4154,11 @@
             <a:r>
               <a:rPr lang="en-US" sz="1800" dirty="0">
                 <a:solidFill>
-                  <a:srgbClr val="D62828"/>
-                </a:solidFill>
-                <a:latin typeface="Arial" pitchFamily="34" charset="0"/>
-                <a:ea typeface="Arial" pitchFamily="34" charset="-122"/>
-                <a:cs typeface="Arial" pitchFamily="34" charset="-120"/>
+                  <a:srgbClr val="C8161D"/>
+                </a:solidFill>
+                <a:latin typeface="Arial" pitchFamily="34" charset="0"/>
+                <a:ea typeface="BIZ UDPGothic" pitchFamily="34" charset="-122"/>
+                <a:cs typeface="BIZ UDPGothic" pitchFamily="34" charset="-120"/>
               </a:rPr>
               <a:t>→</a:t>
             </a:r>
@@ -4183,11 +4183,11 @@
             </a:avLst>
           </a:prstGeom>
           <a:solidFill>
-            <a:srgbClr val="1A0808"/>
+            <a:srgbClr val="FCEBEB"/>
           </a:solidFill>
           <a:ln w="12700">
             <a:solidFill>
-              <a:srgbClr val="2E2E2E"/>
+              <a:srgbClr val="DDE0E6"/>
             </a:solidFill>
             <a:prstDash val="solid"/>
           </a:ln>
@@ -4210,11 +4210,11 @@
             </a:avLst>
           </a:prstGeom>
           <a:solidFill>
-            <a:srgbClr val="081808"/>
+            <a:srgbClr val="E9EFF8"/>
           </a:solidFill>
           <a:ln w="12700">
             <a:solidFill>
-              <a:srgbClr val="2E2E2E"/>
+              <a:srgbClr val="DDE0E6"/>
             </a:solidFill>
             <a:prstDash val="solid"/>
           </a:ln>
@@ -4247,11 +4247,11 @@
             <a:r>
               <a:rPr lang="en-US" sz="1000" dirty="0">
                 <a:solidFill>
-                  <a:srgbClr val="CCCCCC"/>
-                </a:solidFill>
-                <a:latin typeface="Arial" pitchFamily="34" charset="0"/>
-                <a:ea typeface="Arial" pitchFamily="34" charset="-122"/>
-                <a:cs typeface="Arial" pitchFamily="34" charset="-120"/>
+                  <a:srgbClr val="2B2F36"/>
+                </a:solidFill>
+                <a:latin typeface="Arial" pitchFamily="34" charset="0"/>
+                <a:ea typeface="BIZ UDPGothic" pitchFamily="34" charset="-122"/>
+                <a:cs typeface="BIZ UDPGothic" pitchFamily="34" charset="-120"/>
               </a:rPr>
               <a:t>談合・天下りの温床</a:t>
             </a:r>
@@ -4286,11 +4286,11 @@
             <a:r>
               <a:rPr lang="en-US" sz="1000" dirty="0">
                 <a:solidFill>
-                  <a:srgbClr val="CCCCCC"/>
-                </a:solidFill>
-                <a:latin typeface="Arial" pitchFamily="34" charset="0"/>
-                <a:ea typeface="Arial" pitchFamily="34" charset="-122"/>
-                <a:cs typeface="Arial" pitchFamily="34" charset="-120"/>
+                  <a:srgbClr val="2B2F36"/>
+                </a:solidFill>
+                <a:latin typeface="Arial" pitchFamily="34" charset="0"/>
+                <a:ea typeface="BIZ UDPGothic" pitchFamily="34" charset="-122"/>
+                <a:cs typeface="BIZ UDPGothic" pitchFamily="34" charset="-120"/>
               </a:rPr>
               <a:t>技術力のある末端業者に適正対価</a:t>
             </a:r>
@@ -4325,11 +4325,11 @@
             <a:r>
               <a:rPr lang="en-US" sz="1800" dirty="0">
                 <a:solidFill>
-                  <a:srgbClr val="D62828"/>
-                </a:solidFill>
-                <a:latin typeface="Arial" pitchFamily="34" charset="0"/>
-                <a:ea typeface="Arial" pitchFamily="34" charset="-122"/>
-                <a:cs typeface="Arial" pitchFamily="34" charset="-120"/>
+                  <a:srgbClr val="C8161D"/>
+                </a:solidFill>
+                <a:latin typeface="Arial" pitchFamily="34" charset="0"/>
+                <a:ea typeface="BIZ UDPGothic" pitchFamily="34" charset="-122"/>
+                <a:cs typeface="BIZ UDPGothic" pitchFamily="34" charset="-120"/>
               </a:rPr>
               <a:t>→</a:t>
             </a:r>
@@ -4351,7 +4351,7 @@
     <p:bg>
       <p:bgPr>
         <a:solidFill>
-          <a:srgbClr val="0A0A0A"/>
+          <a:srgbClr val="F5F6F8"/>
         </a:solidFill>
       </p:bgPr>
     </p:bg>
@@ -4396,11 +4396,11 @@
             <a:r>
               <a:rPr lang="en-US" sz="900" b="1" spc="400" kern="0" dirty="0">
                 <a:solidFill>
-                  <a:srgbClr val="D62828"/>
-                </a:solidFill>
-                <a:latin typeface="Arial" pitchFamily="34" charset="0"/>
-                <a:ea typeface="Arial" pitchFamily="34" charset="-122"/>
-                <a:cs typeface="Arial" pitchFamily="34" charset="-120"/>
+                  <a:srgbClr val="C8161D"/>
+                </a:solidFill>
+                <a:latin typeface="Arial" pitchFamily="34" charset="0"/>
+                <a:ea typeface="BIZ UDPGothic" pitchFamily="34" charset="-122"/>
+                <a:cs typeface="BIZ UDPGothic" pitchFamily="34" charset="-120"/>
               </a:rPr>
               <a:t>FISCAL IMPACT</a:t>
             </a:r>
@@ -4435,11 +4435,11 @@
             <a:r>
               <a:rPr lang="en-US" sz="2200" b="1" dirty="0">
                 <a:solidFill>
-                  <a:srgbClr val="F5F5F0"/>
-                </a:solidFill>
-                <a:latin typeface="Cambria" pitchFamily="34" charset="0"/>
-                <a:ea typeface="Cambria" pitchFamily="34" charset="-122"/>
-                <a:cs typeface="Cambria" pitchFamily="34" charset="-120"/>
+                  <a:srgbClr val="16181D"/>
+                </a:solidFill>
+                <a:latin typeface="BIZ UDPGothic" pitchFamily="34" charset="0"/>
+                <a:ea typeface="BIZ UDPGothic" pitchFamily="34" charset="-122"/>
+                <a:cs typeface="BIZ UDPGothic" pitchFamily="34" charset="-120"/>
               </a:rPr>
               <a:t>財政インパクト（推計）：多重下請け解体による中抜き排除</a:t>
             </a:r>
@@ -4462,11 +4462,11 @@
             <a:avLst/>
           </a:prstGeom>
           <a:solidFill>
-            <a:srgbClr val="2E2E2E"/>
+            <a:srgbClr val="DDE0E6"/>
           </a:solidFill>
           <a:ln w="12700">
             <a:solidFill>
-              <a:srgbClr val="2E2E2E"/>
+              <a:srgbClr val="DDE0E6"/>
             </a:solidFill>
             <a:prstDash val="solid"/>
           </a:ln>
@@ -4499,11 +4499,11 @@
             <a:r>
               <a:rPr lang="en-US" sz="1100" dirty="0">
                 <a:solidFill>
-                  <a:srgbClr val="CCCCCC"/>
-                </a:solidFill>
-                <a:latin typeface="Arial" pitchFamily="34" charset="0"/>
-                <a:ea typeface="Arial" pitchFamily="34" charset="-122"/>
-                <a:cs typeface="Arial" pitchFamily="34" charset="-120"/>
+                  <a:srgbClr val="2B2F36"/>
+                </a:solidFill>
+                <a:latin typeface="Arial" pitchFamily="34" charset="0"/>
+                <a:ea typeface="BIZ UDPGothic" pitchFamily="34" charset="-122"/>
+                <a:cs typeface="BIZ UDPGothic" pitchFamily="34" charset="-120"/>
               </a:rPr>
               <a:t>年間約25〜30兆円の公共調達市場を前提とした試算。「不当マージン率」の実態を裏付ける公的統計は現時点では存在しないため、3シナリオで示す。</a:t>
             </a:r>
@@ -4528,11 +4528,11 @@
             </a:avLst>
           </a:prstGeom>
           <a:solidFill>
-            <a:srgbClr val="141414"/>
+            <a:srgbClr val="FFFFFF"/>
           </a:solidFill>
           <a:ln w="12700">
             <a:solidFill>
-              <a:srgbClr val="2E2E2E"/>
+              <a:srgbClr val="DDE0E6"/>
             </a:solidFill>
             <a:prstDash val="solid"/>
           </a:ln>
@@ -4555,11 +4555,11 @@
             </a:avLst>
           </a:prstGeom>
           <a:solidFill>
-            <a:srgbClr val="D62828"/>
+            <a:srgbClr val="C8161D"/>
           </a:solidFill>
           <a:ln w="12700">
             <a:solidFill>
-              <a:srgbClr val="D62828"/>
+              <a:srgbClr val="C8161D"/>
             </a:solidFill>
             <a:prstDash val="solid"/>
           </a:ln>
@@ -4592,11 +4592,11 @@
             <a:r>
               <a:rPr lang="en-US" sz="1100" b="1" dirty="0">
                 <a:solidFill>
-                  <a:srgbClr val="F5F5F0"/>
-                </a:solidFill>
-                <a:latin typeface="Arial" pitchFamily="34" charset="0"/>
-                <a:ea typeface="Arial" pitchFamily="34" charset="-122"/>
-                <a:cs typeface="Arial" pitchFamily="34" charset="-120"/>
+                  <a:srgbClr val="FFFFFF"/>
+                </a:solidFill>
+                <a:latin typeface="Arial" pitchFamily="34" charset="0"/>
+                <a:ea typeface="BIZ UDPGothic" pitchFamily="34" charset="-122"/>
+                <a:cs typeface="BIZ UDPGothic" pitchFamily="34" charset="-120"/>
               </a:rPr>
               <a:t>保守的試算</a:t>
             </a:r>
@@ -4631,11 +4631,11 @@
             <a:r>
               <a:rPr lang="en-US" sz="1200" b="1" dirty="0">
                 <a:solidFill>
-                  <a:srgbClr val="F5F5F0"/>
-                </a:solidFill>
-                <a:latin typeface="Cambria" pitchFamily="34" charset="0"/>
-                <a:ea typeface="Cambria" pitchFamily="34" charset="-122"/>
-                <a:cs typeface="Cambria" pitchFamily="34" charset="-120"/>
+                  <a:srgbClr val="16181D"/>
+                </a:solidFill>
+                <a:latin typeface="BIZ UDPGothic" pitchFamily="34" charset="0"/>
+                <a:ea typeface="BIZ UDPGothic" pitchFamily="34" charset="-122"/>
+                <a:cs typeface="BIZ UDPGothic" pitchFamily="34" charset="-120"/>
               </a:rPr>
               <a:t>不当マージン率 3〜5%</a:t>
             </a:r>
@@ -4670,11 +4670,11 @@
             <a:r>
               <a:rPr lang="en-US" sz="1400" b="1" dirty="0">
                 <a:solidFill>
-                  <a:srgbClr val="F5F5F0"/>
-                </a:solidFill>
-                <a:latin typeface="Cambria" pitchFamily="34" charset="0"/>
-                <a:ea typeface="Cambria" pitchFamily="34" charset="-122"/>
-                <a:cs typeface="Cambria" pitchFamily="34" charset="-120"/>
+                  <a:srgbClr val="16181D"/>
+                </a:solidFill>
+                <a:latin typeface="BIZ UDPGothic" pitchFamily="34" charset="0"/>
+                <a:ea typeface="BIZ UDPGothic" pitchFamily="34" charset="-122"/>
+                <a:cs typeface="BIZ UDPGothic" pitchFamily="34" charset="-120"/>
               </a:rPr>
               <a:t>約0.75兆〜1.5兆円</a:t>
             </a:r>
@@ -4709,11 +4709,11 @@
             <a:r>
               <a:rPr lang="en-US" sz="1000" dirty="0">
                 <a:solidFill>
-                  <a:srgbClr val="888888"/>
-                </a:solidFill>
-                <a:latin typeface="Arial" pitchFamily="34" charset="0"/>
-                <a:ea typeface="Arial" pitchFamily="34" charset="-122"/>
-                <a:cs typeface="Arial" pitchFamily="34" charset="-120"/>
+                  <a:srgbClr val="626875"/>
+                </a:solidFill>
+                <a:latin typeface="Arial" pitchFamily="34" charset="0"/>
+                <a:ea typeface="BIZ UDPGothic" pitchFamily="34" charset="-122"/>
+                <a:cs typeface="BIZ UDPGothic" pitchFamily="34" charset="-120"/>
               </a:rPr>
               <a:t>会計検査院指摘事例等から保守的に推計</a:t>
             </a:r>
@@ -4738,11 +4738,11 @@
             </a:avLst>
           </a:prstGeom>
           <a:solidFill>
-            <a:srgbClr val="141420"/>
+            <a:srgbClr val="E9EFF8"/>
           </a:solidFill>
           <a:ln w="12700">
             <a:solidFill>
-              <a:srgbClr val="2E2E2E"/>
+              <a:srgbClr val="DDE0E6"/>
             </a:solidFill>
             <a:prstDash val="solid"/>
           </a:ln>
@@ -4765,11 +4765,11 @@
             </a:avLst>
           </a:prstGeom>
           <a:solidFill>
-            <a:srgbClr val="D62828"/>
+            <a:srgbClr val="C8161D"/>
           </a:solidFill>
           <a:ln w="12700">
             <a:solidFill>
-              <a:srgbClr val="D62828"/>
+              <a:srgbClr val="C8161D"/>
             </a:solidFill>
             <a:prstDash val="solid"/>
           </a:ln>
@@ -4802,11 +4802,11 @@
             <a:r>
               <a:rPr lang="en-US" sz="1100" b="1" dirty="0">
                 <a:solidFill>
-                  <a:srgbClr val="F5F5F0"/>
-                </a:solidFill>
-                <a:latin typeface="Arial" pitchFamily="34" charset="0"/>
-                <a:ea typeface="Arial" pitchFamily="34" charset="-122"/>
-                <a:cs typeface="Arial" pitchFamily="34" charset="-120"/>
+                  <a:srgbClr val="FFFFFF"/>
+                </a:solidFill>
+                <a:latin typeface="Arial" pitchFamily="34" charset="0"/>
+                <a:ea typeface="BIZ UDPGothic" pitchFamily="34" charset="-122"/>
+                <a:cs typeface="BIZ UDPGothic" pitchFamily="34" charset="-120"/>
               </a:rPr>
               <a:t>中央値試算</a:t>
             </a:r>
@@ -4841,11 +4841,11 @@
             <a:r>
               <a:rPr lang="en-US" sz="1200" b="1" dirty="0">
                 <a:solidFill>
-                  <a:srgbClr val="4090D0"/>
-                </a:solidFill>
-                <a:latin typeface="Cambria" pitchFamily="34" charset="0"/>
-                <a:ea typeface="Cambria" pitchFamily="34" charset="-122"/>
-                <a:cs typeface="Cambria" pitchFamily="34" charset="-120"/>
+                  <a:srgbClr val="1D4F91"/>
+                </a:solidFill>
+                <a:latin typeface="BIZ UDPGothic" pitchFamily="34" charset="0"/>
+                <a:ea typeface="BIZ UDPGothic" pitchFamily="34" charset="-122"/>
+                <a:cs typeface="BIZ UDPGothic" pitchFamily="34" charset="-120"/>
               </a:rPr>
               <a:t>不当マージン率 5〜7%</a:t>
             </a:r>
@@ -4880,11 +4880,11 @@
             <a:r>
               <a:rPr lang="en-US" sz="1400" b="1" dirty="0">
                 <a:solidFill>
-                  <a:srgbClr val="4090D0"/>
-                </a:solidFill>
-                <a:latin typeface="Cambria" pitchFamily="34" charset="0"/>
-                <a:ea typeface="Cambria" pitchFamily="34" charset="-122"/>
-                <a:cs typeface="Cambria" pitchFamily="34" charset="-120"/>
+                  <a:srgbClr val="1D4F91"/>
+                </a:solidFill>
+                <a:latin typeface="BIZ UDPGothic" pitchFamily="34" charset="0"/>
+                <a:ea typeface="BIZ UDPGothic" pitchFamily="34" charset="-122"/>
+                <a:cs typeface="BIZ UDPGothic" pitchFamily="34" charset="-120"/>
               </a:rPr>
               <a:t>約1.25兆〜2.1兆円</a:t>
             </a:r>
@@ -4919,11 +4919,11 @@
             <a:r>
               <a:rPr lang="en-US" sz="1000" dirty="0">
                 <a:solidFill>
-                  <a:srgbClr val="888888"/>
-                </a:solidFill>
-                <a:latin typeface="Arial" pitchFamily="34" charset="0"/>
-                <a:ea typeface="Arial" pitchFamily="34" charset="-122"/>
-                <a:cs typeface="Arial" pitchFamily="34" charset="-120"/>
+                  <a:srgbClr val="626875"/>
+                </a:solidFill>
+                <a:latin typeface="Arial" pitchFamily="34" charset="0"/>
+                <a:ea typeface="BIZ UDPGothic" pitchFamily="34" charset="-122"/>
+                <a:cs typeface="BIZ UDPGothic" pitchFamily="34" charset="-120"/>
               </a:rPr>
               <a:t>保守的・楽観的の中間値</a:t>
             </a:r>
@@ -4948,11 +4948,11 @@
             </a:avLst>
           </a:prstGeom>
           <a:solidFill>
-            <a:srgbClr val="081808"/>
+            <a:srgbClr val="E9EFF8"/>
           </a:solidFill>
           <a:ln w="12700">
             <a:solidFill>
-              <a:srgbClr val="2E2E2E"/>
+              <a:srgbClr val="DDE0E6"/>
             </a:solidFill>
             <a:prstDash val="solid"/>
           </a:ln>
@@ -4975,11 +4975,11 @@
             </a:avLst>
           </a:prstGeom>
           <a:solidFill>
-            <a:srgbClr val="D62828"/>
+            <a:srgbClr val="C8161D"/>
           </a:solidFill>
           <a:ln w="12700">
             <a:solidFill>
-              <a:srgbClr val="D62828"/>
+              <a:srgbClr val="C8161D"/>
             </a:solidFill>
             <a:prstDash val="solid"/>
           </a:ln>
@@ -5012,11 +5012,11 @@
             <a:r>
               <a:rPr lang="en-US" sz="1100" b="1" dirty="0">
                 <a:solidFill>
-                  <a:srgbClr val="F5F5F0"/>
-                </a:solidFill>
-                <a:latin typeface="Arial" pitchFamily="34" charset="0"/>
-                <a:ea typeface="Arial" pitchFamily="34" charset="-122"/>
-                <a:cs typeface="Arial" pitchFamily="34" charset="-120"/>
+                  <a:srgbClr val="FFFFFF"/>
+                </a:solidFill>
+                <a:latin typeface="Arial" pitchFamily="34" charset="0"/>
+                <a:ea typeface="BIZ UDPGothic" pitchFamily="34" charset="-122"/>
+                <a:cs typeface="BIZ UDPGothic" pitchFamily="34" charset="-120"/>
               </a:rPr>
               <a:t>楽観的試算</a:t>
             </a:r>
@@ -5051,11 +5051,11 @@
             <a:r>
               <a:rPr lang="en-US" sz="1200" b="1" dirty="0">
                 <a:solidFill>
-                  <a:srgbClr val="4CAF50"/>
-                </a:solidFill>
-                <a:latin typeface="Cambria" pitchFamily="34" charset="0"/>
-                <a:ea typeface="Cambria" pitchFamily="34" charset="-122"/>
-                <a:cs typeface="Cambria" pitchFamily="34" charset="-120"/>
+                  <a:srgbClr val="1D4F91"/>
+                </a:solidFill>
+                <a:latin typeface="BIZ UDPGothic" pitchFamily="34" charset="0"/>
+                <a:ea typeface="BIZ UDPGothic" pitchFamily="34" charset="-122"/>
+                <a:cs typeface="BIZ UDPGothic" pitchFamily="34" charset="-120"/>
               </a:rPr>
               <a:t>不当マージン率 8〜10%</a:t>
             </a:r>
@@ -5090,11 +5090,11 @@
             <a:r>
               <a:rPr lang="en-US" sz="1400" b="1" dirty="0">
                 <a:solidFill>
-                  <a:srgbClr val="4CAF50"/>
-                </a:solidFill>
-                <a:latin typeface="Cambria" pitchFamily="34" charset="0"/>
-                <a:ea typeface="Cambria" pitchFamily="34" charset="-122"/>
-                <a:cs typeface="Cambria" pitchFamily="34" charset="-120"/>
+                  <a:srgbClr val="1D4F91"/>
+                </a:solidFill>
+                <a:latin typeface="BIZ UDPGothic" pitchFamily="34" charset="0"/>
+                <a:ea typeface="BIZ UDPGothic" pitchFamily="34" charset="-122"/>
+                <a:cs typeface="BIZ UDPGothic" pitchFamily="34" charset="-120"/>
               </a:rPr>
               <a:t>約2.0兆〜3.0兆円</a:t>
             </a:r>
@@ -5129,11 +5129,11 @@
             <a:r>
               <a:rPr lang="en-US" sz="1000" dirty="0">
                 <a:solidFill>
-                  <a:srgbClr val="888888"/>
-                </a:solidFill>
-                <a:latin typeface="Arial" pitchFamily="34" charset="0"/>
-                <a:ea typeface="Arial" pitchFamily="34" charset="-122"/>
-                <a:cs typeface="Arial" pitchFamily="34" charset="-120"/>
+                  <a:srgbClr val="626875"/>
+                </a:solidFill>
+                <a:latin typeface="Arial" pitchFamily="34" charset="0"/>
+                <a:ea typeface="BIZ UDPGothic" pitchFamily="34" charset="-122"/>
+                <a:cs typeface="BIZ UDPGothic" pitchFamily="34" charset="-120"/>
               </a:rPr>
               <a:t>重層下請き実態調査等の上限値</a:t>
             </a:r>
@@ -5158,11 +5158,11 @@
             </a:avLst>
           </a:prstGeom>
           <a:solidFill>
-            <a:srgbClr val="1A1A1A"/>
+            <a:srgbClr val="FFFFFF"/>
           </a:solidFill>
           <a:ln w="12700">
             <a:solidFill>
-              <a:srgbClr val="2E2E2E"/>
+              <a:srgbClr val="DDE0E6"/>
             </a:solidFill>
             <a:prstDash val="solid"/>
           </a:ln>
@@ -5195,11 +5195,11 @@
             <a:r>
               <a:rPr lang="en-US" sz="1000" dirty="0">
                 <a:solidFill>
-                  <a:srgbClr val="888888"/>
-                </a:solidFill>
-                <a:latin typeface="Arial" pitchFamily="34" charset="0"/>
-                <a:ea typeface="Arial" pitchFamily="34" charset="-122"/>
-                <a:cs typeface="Arial" pitchFamily="34" charset="-120"/>
+                  <a:srgbClr val="626875"/>
+                </a:solidFill>
+                <a:latin typeface="Arial" pitchFamily="34" charset="0"/>
+                <a:ea typeface="BIZ UDPGothic" pitchFamily="34" charset="-122"/>
+                <a:cs typeface="BIZ UDPGothic" pitchFamily="34" charset="-120"/>
               </a:rPr>
               <a:t>本試算は推計であり、制度導入後の実績データによる精緻化が必要。「不当マージン率」の実態把握に向けた統計整備を今後の課題とする。</a:t>
             </a:r>
@@ -5221,7 +5221,7 @@
     <p:bg>
       <p:bgPr>
         <a:solidFill>
-          <a:srgbClr val="0A0A0A"/>
+          <a:srgbClr val="F5F6F8"/>
         </a:solidFill>
       </p:bgPr>
     </p:bg>
@@ -5266,11 +5266,11 @@
             <a:r>
               <a:rPr lang="en-US" sz="900" b="1" spc="400" kern="0" dirty="0">
                 <a:solidFill>
-                  <a:srgbClr val="D62828"/>
-                </a:solidFill>
-                <a:latin typeface="Arial" pitchFamily="34" charset="0"/>
-                <a:ea typeface="Arial" pitchFamily="34" charset="-122"/>
-                <a:cs typeface="Arial" pitchFamily="34" charset="-120"/>
+                  <a:srgbClr val="C8161D"/>
+                </a:solidFill>
+                <a:latin typeface="Arial" pitchFamily="34" charset="0"/>
+                <a:ea typeface="BIZ UDPGothic" pitchFamily="34" charset="-122"/>
+                <a:cs typeface="BIZ UDPGothic" pitchFamily="34" charset="-120"/>
               </a:rPr>
               <a:t>FISCAL IMPACT — TOTAL</a:t>
             </a:r>
@@ -5305,11 +5305,11 @@
             <a:r>
               <a:rPr lang="en-US" sz="2800" b="1" dirty="0">
                 <a:solidFill>
-                  <a:srgbClr val="F5F5F0"/>
-                </a:solidFill>
-                <a:latin typeface="Cambria" pitchFamily="34" charset="0"/>
-                <a:ea typeface="Cambria" pitchFamily="34" charset="-122"/>
-                <a:cs typeface="Cambria" pitchFamily="34" charset="-120"/>
+                  <a:srgbClr val="16181D"/>
+                </a:solidFill>
+                <a:latin typeface="BIZ UDPGothic" pitchFamily="34" charset="0"/>
+                <a:ea typeface="BIZ UDPGothic" pitchFamily="34" charset="-122"/>
+                <a:cs typeface="BIZ UDPGothic" pitchFamily="34" charset="-120"/>
               </a:rPr>
               <a:t>財政インパクト：その他削減効果と合計</a:t>
             </a:r>
@@ -5332,11 +5332,11 @@
             <a:avLst/>
           </a:prstGeom>
           <a:solidFill>
-            <a:srgbClr val="2E2E2E"/>
+            <a:srgbClr val="DDE0E6"/>
           </a:solidFill>
           <a:ln w="12700">
             <a:solidFill>
-              <a:srgbClr val="2E2E2E"/>
+              <a:srgbClr val="DDE0E6"/>
             </a:solidFill>
             <a:prstDash val="solid"/>
           </a:ln>
@@ -5359,11 +5359,11 @@
             </a:avLst>
           </a:prstGeom>
           <a:solidFill>
-            <a:srgbClr val="1A1A1A"/>
+            <a:srgbClr val="FFFFFF"/>
           </a:solidFill>
           <a:ln w="12700">
             <a:solidFill>
-              <a:srgbClr val="2E2E2E"/>
+              <a:srgbClr val="DDE0E6"/>
             </a:solidFill>
             <a:prstDash val="solid"/>
           </a:ln>
@@ -5396,11 +5396,11 @@
             <a:r>
               <a:rPr lang="en-US" sz="1300" b="1" dirty="0">
                 <a:solidFill>
-                  <a:srgbClr val="F5F5F0"/>
-                </a:solidFill>
-                <a:latin typeface="Cambria" pitchFamily="34" charset="0"/>
-                <a:ea typeface="Cambria" pitchFamily="34" charset="-122"/>
-                <a:cs typeface="Cambria" pitchFamily="34" charset="-120"/>
+                  <a:srgbClr val="16181D"/>
+                </a:solidFill>
+                <a:latin typeface="BIZ UDPGothic" pitchFamily="34" charset="0"/>
+                <a:ea typeface="BIZ UDPGothic" pitchFamily="34" charset="-122"/>
+                <a:cs typeface="BIZ UDPGothic" pitchFamily="34" charset="-120"/>
               </a:rPr>
               <a:t>公費執行DXによる無駄の防止</a:t>
             </a:r>
@@ -5435,11 +5435,11 @@
             <a:r>
               <a:rPr lang="en-US" sz="1300" b="1" dirty="0">
                 <a:solidFill>
-                  <a:srgbClr val="D62828"/>
-                </a:solidFill>
-                <a:latin typeface="Cambria" pitchFamily="34" charset="0"/>
-                <a:ea typeface="Cambria" pitchFamily="34" charset="-122"/>
-                <a:cs typeface="Cambria" pitchFamily="34" charset="-120"/>
+                  <a:srgbClr val="C8161D"/>
+                </a:solidFill>
+                <a:latin typeface="BIZ UDPGothic" pitchFamily="34" charset="0"/>
+                <a:ea typeface="BIZ UDPGothic" pitchFamily="34" charset="-122"/>
+                <a:cs typeface="BIZ UDPGothic" pitchFamily="34" charset="-120"/>
               </a:rPr>
               <a:t>約2,000億〜3,000億円</a:t>
             </a:r>
@@ -5474,11 +5474,11 @@
             <a:r>
               <a:rPr lang="en-US" sz="1000" dirty="0">
                 <a:solidFill>
-                  <a:srgbClr val="888888"/>
-                </a:solidFill>
-                <a:latin typeface="Arial" pitchFamily="34" charset="0"/>
-                <a:ea typeface="Arial" pitchFamily="34" charset="-122"/>
-                <a:cs typeface="Arial" pitchFamily="34" charset="-120"/>
+                  <a:srgbClr val="626875"/>
+                </a:solidFill>
+                <a:latin typeface="Arial" pitchFamily="34" charset="0"/>
+                <a:ea typeface="BIZ UDPGothic" pitchFamily="34" charset="-122"/>
+                <a:cs typeface="BIZ UDPGothic" pitchFamily="34" charset="-120"/>
               </a:rPr>
               <a:t>グリーン車一律支給・不透明経費の自動ロック</a:t>
             </a:r>
@@ -5503,11 +5503,11 @@
             </a:avLst>
           </a:prstGeom>
           <a:solidFill>
-            <a:srgbClr val="1A1A1A"/>
+            <a:srgbClr val="FFFFFF"/>
           </a:solidFill>
           <a:ln w="12700">
             <a:solidFill>
-              <a:srgbClr val="2E2E2E"/>
+              <a:srgbClr val="DDE0E6"/>
             </a:solidFill>
             <a:prstDash val="solid"/>
           </a:ln>
@@ -5540,11 +5540,11 @@
             <a:r>
               <a:rPr lang="en-US" sz="1300" b="1" dirty="0">
                 <a:solidFill>
-                  <a:srgbClr val="F5F5F0"/>
-                </a:solidFill>
-                <a:latin typeface="Cambria" pitchFamily="34" charset="0"/>
-                <a:ea typeface="Cambria" pitchFamily="34" charset="-122"/>
-                <a:cs typeface="Cambria" pitchFamily="34" charset="-120"/>
+                  <a:srgbClr val="16181D"/>
+                </a:solidFill>
+                <a:latin typeface="BIZ UDPGothic" pitchFamily="34" charset="0"/>
+                <a:ea typeface="BIZ UDPGothic" pitchFamily="34" charset="-122"/>
+                <a:cs typeface="BIZ UDPGothic" pitchFamily="34" charset="-120"/>
               </a:rPr>
               <a:t>事務コスト（人件費）の削減</a:t>
             </a:r>
@@ -5579,11 +5579,11 @@
             <a:r>
               <a:rPr lang="en-US" sz="1300" b="1" dirty="0">
                 <a:solidFill>
-                  <a:srgbClr val="D62828"/>
-                </a:solidFill>
-                <a:latin typeface="Cambria" pitchFamily="34" charset="0"/>
-                <a:ea typeface="Cambria" pitchFamily="34" charset="-122"/>
-                <a:cs typeface="Cambria" pitchFamily="34" charset="-120"/>
+                  <a:srgbClr val="C8161D"/>
+                </a:solidFill>
+                <a:latin typeface="BIZ UDPGothic" pitchFamily="34" charset="0"/>
+                <a:ea typeface="BIZ UDPGothic" pitchFamily="34" charset="-122"/>
+                <a:cs typeface="BIZ UDPGothic" pitchFamily="34" charset="-120"/>
               </a:rPr>
               <a:t>約1,000億〜1,500億円</a:t>
             </a:r>
@@ -5618,11 +5618,11 @@
             <a:r>
               <a:rPr lang="en-US" sz="1000" dirty="0">
                 <a:solidFill>
-                  <a:srgbClr val="888888"/>
-                </a:solidFill>
-                <a:latin typeface="Arial" pitchFamily="34" charset="0"/>
-                <a:ea typeface="Arial" pitchFamily="34" charset="-122"/>
-                <a:cs typeface="Arial" pitchFamily="34" charset="-120"/>
+                  <a:srgbClr val="626875"/>
+                </a:solidFill>
+                <a:latin typeface="Arial" pitchFamily="34" charset="0"/>
+                <a:ea typeface="BIZ UDPGothic" pitchFamily="34" charset="-122"/>
+                <a:cs typeface="BIZ UDPGothic" pitchFamily="34" charset="-120"/>
               </a:rPr>
               <a:t>公務員のアナログ精算事務を9割削減</a:t>
             </a:r>
@@ -5657,11 +5657,11 @@
             <a:r>
               <a:rPr lang="en-US" sz="1300" b="1" dirty="0">
                 <a:solidFill>
-                  <a:srgbClr val="D62828"/>
-                </a:solidFill>
-                <a:latin typeface="Cambria" pitchFamily="34" charset="0"/>
-                <a:ea typeface="Cambria" pitchFamily="34" charset="-122"/>
-                <a:cs typeface="Cambria" pitchFamily="34" charset="-120"/>
+                  <a:srgbClr val="C8161D"/>
+                </a:solidFill>
+                <a:latin typeface="BIZ UDPGothic" pitchFamily="34" charset="0"/>
+                <a:ea typeface="BIZ UDPGothic" pitchFamily="34" charset="-122"/>
+                <a:cs typeface="BIZ UDPGothic" pitchFamily="34" charset="-120"/>
               </a:rPr>
               <a:t>シナリオ別合計</a:t>
             </a:r>
@@ -5686,11 +5686,11 @@
             </a:avLst>
           </a:prstGeom>
           <a:solidFill>
-            <a:srgbClr val="141414"/>
+            <a:srgbClr val="FFFFFF"/>
           </a:solidFill>
           <a:ln w="12700">
             <a:solidFill>
-              <a:srgbClr val="2E2E2E"/>
+              <a:srgbClr val="DDE0E6"/>
             </a:solidFill>
             <a:prstDash val="solid"/>
           </a:ln>
@@ -5723,11 +5723,11 @@
             <a:r>
               <a:rPr lang="en-US" sz="1200" dirty="0">
                 <a:solidFill>
-                  <a:srgbClr val="CCCCCC"/>
-                </a:solidFill>
-                <a:latin typeface="Arial" pitchFamily="34" charset="0"/>
-                <a:ea typeface="Arial" pitchFamily="34" charset="-122"/>
-                <a:cs typeface="Arial" pitchFamily="34" charset="-120"/>
+                  <a:srgbClr val="2B2F36"/>
+                </a:solidFill>
+                <a:latin typeface="Arial" pitchFamily="34" charset="0"/>
+                <a:ea typeface="BIZ UDPGothic" pitchFamily="34" charset="-122"/>
+                <a:cs typeface="BIZ UDPGothic" pitchFamily="34" charset="-120"/>
               </a:rPr>
               <a:t>保守的シナリオ</a:t>
             </a:r>
@@ -5762,11 +5762,11 @@
             <a:r>
               <a:rPr lang="en-US" sz="1800" b="1" dirty="0">
                 <a:solidFill>
-                  <a:srgbClr val="4CAF50"/>
-                </a:solidFill>
-                <a:latin typeface="Cambria" pitchFamily="34" charset="0"/>
-                <a:ea typeface="Cambria" pitchFamily="34" charset="-122"/>
-                <a:cs typeface="Cambria" pitchFamily="34" charset="-120"/>
+                  <a:srgbClr val="1D4F91"/>
+                </a:solidFill>
+                <a:latin typeface="BIZ UDPGothic" pitchFamily="34" charset="0"/>
+                <a:ea typeface="BIZ UDPGothic" pitchFamily="34" charset="-122"/>
+                <a:cs typeface="BIZ UDPGothic" pitchFamily="34" charset="-120"/>
               </a:rPr>
               <a:t>約1.05兆〜2.1兆円</a:t>
             </a:r>
@@ -5791,11 +5791,11 @@
             </a:avLst>
           </a:prstGeom>
           <a:solidFill>
-            <a:srgbClr val="081808"/>
+            <a:srgbClr val="E9EFF8"/>
           </a:solidFill>
           <a:ln w="12700">
             <a:solidFill>
-              <a:srgbClr val="2E2E2E"/>
+              <a:srgbClr val="DDE0E6"/>
             </a:solidFill>
             <a:prstDash val="solid"/>
           </a:ln>
@@ -5828,11 +5828,11 @@
             <a:r>
               <a:rPr lang="en-US" sz="1200" dirty="0">
                 <a:solidFill>
-                  <a:srgbClr val="CCCCCC"/>
-                </a:solidFill>
-                <a:latin typeface="Arial" pitchFamily="34" charset="0"/>
-                <a:ea typeface="Arial" pitchFamily="34" charset="-122"/>
-                <a:cs typeface="Arial" pitchFamily="34" charset="-120"/>
+                  <a:srgbClr val="2B2F36"/>
+                </a:solidFill>
+                <a:latin typeface="Arial" pitchFamily="34" charset="0"/>
+                <a:ea typeface="BIZ UDPGothic" pitchFamily="34" charset="-122"/>
+                <a:cs typeface="BIZ UDPGothic" pitchFamily="34" charset="-120"/>
               </a:rPr>
               <a:t>楽観的シナリオ</a:t>
             </a:r>
@@ -5867,11 +5867,11 @@
             <a:r>
               <a:rPr lang="en-US" sz="1800" b="1" dirty="0">
                 <a:solidFill>
-                  <a:srgbClr val="4CAF50"/>
-                </a:solidFill>
-                <a:latin typeface="Cambria" pitchFamily="34" charset="0"/>
-                <a:ea typeface="Cambria" pitchFamily="34" charset="-122"/>
-                <a:cs typeface="Cambria" pitchFamily="34" charset="-120"/>
+                  <a:srgbClr val="1D4F91"/>
+                </a:solidFill>
+                <a:latin typeface="BIZ UDPGothic" pitchFamily="34" charset="0"/>
+                <a:ea typeface="BIZ UDPGothic" pitchFamily="34" charset="-122"/>
+                <a:cs typeface="BIZ UDPGothic" pitchFamily="34" charset="-120"/>
               </a:rPr>
               <a:t>約2.3兆〜3.45兆円</a:t>
             </a:r>
@@ -5893,7 +5893,7 @@
     <p:bg>
       <p:bgPr>
         <a:solidFill>
-          <a:srgbClr val="0A0A0A"/>
+          <a:srgbClr val="F5F6F8"/>
         </a:solidFill>
       </p:bgPr>
     </p:bg>
@@ -5938,11 +5938,11 @@
             <a:r>
               <a:rPr lang="en-US" sz="900" b="1" spc="400" kern="0" dirty="0">
                 <a:solidFill>
-                  <a:srgbClr val="D62828"/>
-                </a:solidFill>
-                <a:latin typeface="Arial" pitchFamily="34" charset="0"/>
-                <a:ea typeface="Arial" pitchFamily="34" charset="-122"/>
-                <a:cs typeface="Arial" pitchFamily="34" charset="-120"/>
+                  <a:srgbClr val="C8161D"/>
+                </a:solidFill>
+                <a:latin typeface="Arial" pitchFamily="34" charset="0"/>
+                <a:ea typeface="BIZ UDPGothic" pitchFamily="34" charset="-122"/>
+                <a:cs typeface="BIZ UDPGothic" pitchFamily="34" charset="-120"/>
               </a:rPr>
               <a:t>SCOPE</a:t>
             </a:r>
@@ -5975,17 +5975,17 @@
               <a:buNone/>
             </a:pPr>
             <a:r>
-              <a:rPr lang="en-US" sz="2800" b="1" dirty="0">
-                <a:solidFill>
-                  <a:srgbClr val="F5F5F0"/>
-                </a:solidFill>
-                <a:latin typeface="Cambria" pitchFamily="34" charset="0"/>
-                <a:ea typeface="Cambria" pitchFamily="34" charset="-122"/>
-                <a:cs typeface="Cambria" pitchFamily="34" charset="-120"/>
+              <a:rPr lang="en-US" sz="2200" b="1" dirty="0">
+                <a:solidFill>
+                  <a:srgbClr val="16181D"/>
+                </a:solidFill>
+                <a:latin typeface="BIZ UDPGothic" pitchFamily="34" charset="0"/>
+                <a:ea typeface="BIZ UDPGothic" pitchFamily="34" charset="-122"/>
+                <a:cs typeface="BIZ UDPGothic" pitchFamily="34" charset="-120"/>
               </a:rPr>
               <a:t>適用範囲：「税金が1円でも動く組織・プロセス」はすべて対象</a:t>
             </a:r>
-            <a:endParaRPr lang="en-US" sz="2800" dirty="0"/>
+            <a:endParaRPr lang="en-US" sz="2200" dirty="0"/>
           </a:p>
         </p:txBody>
       </p:sp>
@@ -6004,11 +6004,11 @@
             <a:avLst/>
           </a:prstGeom>
           <a:solidFill>
-            <a:srgbClr val="2E2E2E"/>
+            <a:srgbClr val="DDE0E6"/>
           </a:solidFill>
           <a:ln w="12700">
             <a:solidFill>
-              <a:srgbClr val="2E2E2E"/>
+              <a:srgbClr val="DDE0E6"/>
             </a:solidFill>
             <a:prstDash val="solid"/>
           </a:ln>
@@ -6041,11 +6041,11 @@
             <a:r>
               <a:rPr lang="en-US" sz="1100" dirty="0">
                 <a:solidFill>
-                  <a:srgbClr val="CCCCCC"/>
-                </a:solidFill>
-                <a:latin typeface="Arial" pitchFamily="34" charset="0"/>
-                <a:ea typeface="Arial" pitchFamily="34" charset="-122"/>
-                <a:cs typeface="Arial" pitchFamily="34" charset="-120"/>
+                  <a:srgbClr val="2B2F36"/>
+                </a:solidFill>
+                <a:latin typeface="Arial" pitchFamily="34" charset="0"/>
+                <a:ea typeface="BIZ UDPGothic" pitchFamily="34" charset="-122"/>
+                <a:cs typeface="BIZ UDPGothic" pitchFamily="34" charset="-120"/>
               </a:rPr>
               <a:t>例外の拡大解釈を許さないよう、例外規定の定義自体も法律で厳格に列挙する。</a:t>
             </a:r>
@@ -6070,11 +6070,11 @@
             </a:avLst>
           </a:prstGeom>
           <a:solidFill>
-            <a:srgbClr val="1A1A1A"/>
+            <a:srgbClr val="FFFFFF"/>
           </a:solidFill>
           <a:ln w="12700">
             <a:solidFill>
-              <a:srgbClr val="2E2E2E"/>
+              <a:srgbClr val="DDE0E6"/>
             </a:solidFill>
             <a:prstDash val="solid"/>
           </a:ln>
@@ -6107,11 +6107,11 @@
             <a:r>
               <a:rPr lang="en-US" sz="1300" b="1" dirty="0">
                 <a:solidFill>
-                  <a:srgbClr val="F5F5F0"/>
-                </a:solidFill>
-                <a:latin typeface="Cambria" pitchFamily="34" charset="0"/>
-                <a:ea typeface="Cambria" pitchFamily="34" charset="-122"/>
-                <a:cs typeface="Cambria" pitchFamily="34" charset="-120"/>
+                  <a:srgbClr val="16181D"/>
+                </a:solidFill>
+                <a:latin typeface="BIZ UDPGothic" pitchFamily="34" charset="0"/>
+                <a:ea typeface="BIZ UDPGothic" pitchFamily="34" charset="-122"/>
+                <a:cs typeface="BIZ UDPGothic" pitchFamily="34" charset="-120"/>
               </a:rPr>
               <a:t>国の省庁・機関</a:t>
             </a:r>
@@ -6146,11 +6146,11 @@
             <a:r>
               <a:rPr lang="en-US" sz="1200" b="1" dirty="0">
                 <a:solidFill>
-                  <a:srgbClr val="4CAF50"/>
-                </a:solidFill>
-                <a:latin typeface="Arial" pitchFamily="34" charset="0"/>
-                <a:ea typeface="Arial" pitchFamily="34" charset="-122"/>
-                <a:cs typeface="Arial" pitchFamily="34" charset="-120"/>
+                  <a:srgbClr val="1D4F91"/>
+                </a:solidFill>
+                <a:latin typeface="Arial" pitchFamily="34" charset="0"/>
+                <a:ea typeface="BIZ UDPGothic" pitchFamily="34" charset="-122"/>
+                <a:cs typeface="BIZ UDPGothic" pitchFamily="34" charset="-120"/>
               </a:rPr>
               <a:t>✅ 全面適用</a:t>
             </a:r>
@@ -6175,11 +6175,11 @@
             </a:avLst>
           </a:prstGeom>
           <a:solidFill>
-            <a:srgbClr val="1A1A1A"/>
+            <a:srgbClr val="FFFFFF"/>
           </a:solidFill>
           <a:ln w="12700">
             <a:solidFill>
-              <a:srgbClr val="2E2E2E"/>
+              <a:srgbClr val="DDE0E6"/>
             </a:solidFill>
             <a:prstDash val="solid"/>
           </a:ln>
@@ -6212,11 +6212,11 @@
             <a:r>
               <a:rPr lang="en-US" sz="1300" b="1" dirty="0">
                 <a:solidFill>
-                  <a:srgbClr val="F5F5F0"/>
-                </a:solidFill>
-                <a:latin typeface="Cambria" pitchFamily="34" charset="0"/>
-                <a:ea typeface="Cambria" pitchFamily="34" charset="-122"/>
-                <a:cs typeface="Cambria" pitchFamily="34" charset="-120"/>
+                  <a:srgbClr val="16181D"/>
+                </a:solidFill>
+                <a:latin typeface="BIZ UDPGothic" pitchFamily="34" charset="0"/>
+                <a:ea typeface="BIZ UDPGothic" pitchFamily="34" charset="-122"/>
+                <a:cs typeface="BIZ UDPGothic" pitchFamily="34" charset="-120"/>
               </a:rPr>
               <a:t>都道府県・市区町村</a:t>
             </a:r>
@@ -6251,11 +6251,11 @@
             <a:r>
               <a:rPr lang="en-US" sz="1200" b="1" dirty="0">
                 <a:solidFill>
-                  <a:srgbClr val="4CAF50"/>
-                </a:solidFill>
-                <a:latin typeface="Arial" pitchFamily="34" charset="0"/>
-                <a:ea typeface="Arial" pitchFamily="34" charset="-122"/>
-                <a:cs typeface="Arial" pitchFamily="34" charset="-120"/>
+                  <a:srgbClr val="1D4F91"/>
+                </a:solidFill>
+                <a:latin typeface="Arial" pitchFamily="34" charset="0"/>
+                <a:ea typeface="BIZ UDPGothic" pitchFamily="34" charset="-122"/>
+                <a:cs typeface="BIZ UDPGothic" pitchFamily="34" charset="-120"/>
               </a:rPr>
               <a:t>✅ 全面適用</a:t>
             </a:r>
@@ -6280,11 +6280,11 @@
             </a:avLst>
           </a:prstGeom>
           <a:solidFill>
-            <a:srgbClr val="1A1A1A"/>
+            <a:srgbClr val="FFFFFF"/>
           </a:solidFill>
           <a:ln w="12700">
             <a:solidFill>
-              <a:srgbClr val="2E2E2E"/>
+              <a:srgbClr val="DDE0E6"/>
             </a:solidFill>
             <a:prstDash val="solid"/>
           </a:ln>
@@ -6317,11 +6317,11 @@
             <a:r>
               <a:rPr lang="en-US" sz="1300" b="1" dirty="0">
                 <a:solidFill>
-                  <a:srgbClr val="F5F5F0"/>
-                </a:solidFill>
-                <a:latin typeface="Cambria" pitchFamily="34" charset="0"/>
-                <a:ea typeface="Cambria" pitchFamily="34" charset="-122"/>
-                <a:cs typeface="Cambria" pitchFamily="34" charset="-120"/>
+                  <a:srgbClr val="16181D"/>
+                </a:solidFill>
+                <a:latin typeface="BIZ UDPGothic" pitchFamily="34" charset="0"/>
+                <a:ea typeface="BIZ UDPGothic" pitchFamily="34" charset="-122"/>
+                <a:cs typeface="BIZ UDPGothic" pitchFamily="34" charset="-120"/>
               </a:rPr>
               <a:t>外郭団体・第三セクター</a:t>
             </a:r>
@@ -6356,11 +6356,11 @@
             <a:r>
               <a:rPr lang="en-US" sz="1200" b="1" dirty="0">
                 <a:solidFill>
-                  <a:srgbClr val="4CAF50"/>
-                </a:solidFill>
-                <a:latin typeface="Arial" pitchFamily="34" charset="0"/>
-                <a:ea typeface="Arial" pitchFamily="34" charset="-122"/>
-                <a:cs typeface="Arial" pitchFamily="34" charset="-120"/>
+                  <a:srgbClr val="1D4F91"/>
+                </a:solidFill>
+                <a:latin typeface="Arial" pitchFamily="34" charset="0"/>
+                <a:ea typeface="BIZ UDPGothic" pitchFamily="34" charset="-122"/>
+                <a:cs typeface="BIZ UDPGothic" pitchFamily="34" charset="-120"/>
               </a:rPr>
               <a:t>✅ 全面適用</a:t>
             </a:r>
@@ -6385,11 +6385,11 @@
             </a:avLst>
           </a:prstGeom>
           <a:solidFill>
-            <a:srgbClr val="1A1A1A"/>
+            <a:srgbClr val="FFFFFF"/>
           </a:solidFill>
           <a:ln w="12700">
             <a:solidFill>
-              <a:srgbClr val="2E2E2E"/>
+              <a:srgbClr val="DDE0E6"/>
             </a:solidFill>
             <a:prstDash val="solid"/>
           </a:ln>
@@ -6422,11 +6422,11 @@
             <a:r>
               <a:rPr lang="en-US" sz="1300" b="1" dirty="0">
                 <a:solidFill>
-                  <a:srgbClr val="F5F5F0"/>
-                </a:solidFill>
-                <a:latin typeface="Cambria" pitchFamily="34" charset="0"/>
-                <a:ea typeface="Cambria" pitchFamily="34" charset="-122"/>
-                <a:cs typeface="Cambria" pitchFamily="34" charset="-120"/>
+                  <a:srgbClr val="16181D"/>
+                </a:solidFill>
+                <a:latin typeface="BIZ UDPGothic" pitchFamily="34" charset="0"/>
+                <a:ea typeface="BIZ UDPGothic" pitchFamily="34" charset="-122"/>
+                <a:cs typeface="BIZ UDPGothic" pitchFamily="34" charset="-120"/>
               </a:rPr>
               <a:t>補助金・委託費を受ける民間企業</a:t>
             </a:r>
@@ -6461,11 +6461,11 @@
             <a:r>
               <a:rPr lang="en-US" sz="1200" b="1" dirty="0">
                 <a:solidFill>
-                  <a:srgbClr val="4CAF50"/>
-                </a:solidFill>
-                <a:latin typeface="Arial" pitchFamily="34" charset="0"/>
-                <a:ea typeface="Arial" pitchFamily="34" charset="-122"/>
-                <a:cs typeface="Arial" pitchFamily="34" charset="-120"/>
+                  <a:srgbClr val="1D4F91"/>
+                </a:solidFill>
+                <a:latin typeface="Arial" pitchFamily="34" charset="0"/>
+                <a:ea typeface="BIZ UDPGothic" pitchFamily="34" charset="-122"/>
+                <a:cs typeface="BIZ UDPGothic" pitchFamily="34" charset="-120"/>
               </a:rPr>
               <a:t>✅ 公費受領分に適用</a:t>
             </a:r>
@@ -6490,11 +6490,11 @@
             </a:avLst>
           </a:prstGeom>
           <a:solidFill>
-            <a:srgbClr val="1A1A1A"/>
+            <a:srgbClr val="FFFFFF"/>
           </a:solidFill>
           <a:ln w="12700">
             <a:solidFill>
-              <a:srgbClr val="2E2E2E"/>
+              <a:srgbClr val="DDE0E6"/>
             </a:solidFill>
             <a:prstDash val="solid"/>
           </a:ln>
@@ -6527,11 +6527,11 @@
             <a:r>
               <a:rPr lang="en-US" sz="1300" b="1" dirty="0">
                 <a:solidFill>
-                  <a:srgbClr val="F5F5F0"/>
-                </a:solidFill>
-                <a:latin typeface="Cambria" pitchFamily="34" charset="0"/>
-                <a:ea typeface="Cambria" pitchFamily="34" charset="-122"/>
-                <a:cs typeface="Cambria" pitchFamily="34" charset="-120"/>
+                  <a:srgbClr val="16181D"/>
+                </a:solidFill>
+                <a:latin typeface="BIZ UDPGothic" pitchFamily="34" charset="0"/>
+                <a:ea typeface="BIZ UDPGothic" pitchFamily="34" charset="-122"/>
+                <a:cs typeface="BIZ UDPGothic" pitchFamily="34" charset="-120"/>
               </a:rPr>
               <a:t>NPO・公益法人（公費受領）</a:t>
             </a:r>
@@ -6566,11 +6566,11 @@
             <a:r>
               <a:rPr lang="en-US" sz="1200" b="1" dirty="0">
                 <a:solidFill>
-                  <a:srgbClr val="4CAF50"/>
-                </a:solidFill>
-                <a:latin typeface="Arial" pitchFamily="34" charset="0"/>
-                <a:ea typeface="Arial" pitchFamily="34" charset="-122"/>
-                <a:cs typeface="Arial" pitchFamily="34" charset="-120"/>
+                  <a:srgbClr val="1D4F91"/>
+                </a:solidFill>
+                <a:latin typeface="Arial" pitchFamily="34" charset="0"/>
+                <a:ea typeface="BIZ UDPGothic" pitchFamily="34" charset="-122"/>
+                <a:cs typeface="BIZ UDPGothic" pitchFamily="34" charset="-120"/>
               </a:rPr>
               <a:t>✅ 公費受領分に適用</a:t>
             </a:r>
@@ -6592,7 +6592,7 @@
     <p:bg>
       <p:bgPr>
         <a:solidFill>
-          <a:srgbClr val="0A0A0A"/>
+          <a:srgbClr val="F5F6F8"/>
         </a:solidFill>
       </p:bgPr>
     </p:bg>
@@ -6637,11 +6637,11 @@
             <a:r>
               <a:rPr lang="en-US" sz="900" b="1" spc="400" kern="0" dirty="0">
                 <a:solidFill>
-                  <a:srgbClr val="D62828"/>
-                </a:solidFill>
-                <a:latin typeface="Arial" pitchFamily="34" charset="0"/>
-                <a:ea typeface="Arial" pitchFamily="34" charset="-122"/>
-                <a:cs typeface="Arial" pitchFamily="34" charset="-120"/>
+                  <a:srgbClr val="C8161D"/>
+                </a:solidFill>
+                <a:latin typeface="Arial" pitchFamily="34" charset="0"/>
+                <a:ea typeface="BIZ UDPGothic" pitchFamily="34" charset="-122"/>
+                <a:cs typeface="BIZ UDPGothic" pitchFamily="34" charset="-120"/>
               </a:rPr>
               <a:t>REMAINING ISSUES</a:t>
             </a:r>
@@ -6676,11 +6676,11 @@
             <a:r>
               <a:rPr lang="en-US" sz="2800" b="1" dirty="0">
                 <a:solidFill>
-                  <a:srgbClr val="F5F5F0"/>
-                </a:solidFill>
-                <a:latin typeface="Cambria" pitchFamily="34" charset="0"/>
-                <a:ea typeface="Cambria" pitchFamily="34" charset="-122"/>
-                <a:cs typeface="Cambria" pitchFamily="34" charset="-120"/>
+                  <a:srgbClr val="16181D"/>
+                </a:solidFill>
+                <a:latin typeface="BIZ UDPGothic" pitchFamily="34" charset="0"/>
+                <a:ea typeface="BIZ UDPGothic" pitchFamily="34" charset="-122"/>
+                <a:cs typeface="BIZ UDPGothic" pitchFamily="34" charset="-120"/>
               </a:rPr>
               <a:t>前提条件・今後の検討課題</a:t>
             </a:r>
@@ -6703,11 +6703,11 @@
             <a:avLst/>
           </a:prstGeom>
           <a:solidFill>
-            <a:srgbClr val="2E2E2E"/>
+            <a:srgbClr val="DDE0E6"/>
           </a:solidFill>
           <a:ln w="12700">
             <a:solidFill>
-              <a:srgbClr val="2E2E2E"/>
+              <a:srgbClr val="DDE0E6"/>
             </a:solidFill>
             <a:prstDash val="solid"/>
           </a:ln>
@@ -6730,11 +6730,11 @@
             </a:avLst>
           </a:prstGeom>
           <a:solidFill>
-            <a:srgbClr val="1A1A1A"/>
+            <a:srgbClr val="FFFFFF"/>
           </a:solidFill>
           <a:ln w="12700">
             <a:solidFill>
-              <a:srgbClr val="2E2E2E"/>
+              <a:srgbClr val="DDE0E6"/>
             </a:solidFill>
             <a:prstDash val="solid"/>
           </a:ln>
@@ -6767,11 +6767,11 @@
             <a:r>
               <a:rPr lang="en-US" sz="1000" dirty="0">
                 <a:solidFill>
-                  <a:srgbClr val="CCCCCC"/>
-                </a:solidFill>
-                <a:latin typeface="Arial" pitchFamily="34" charset="0"/>
-                <a:ea typeface="Arial" pitchFamily="34" charset="-122"/>
-                <a:cs typeface="Arial" pitchFamily="34" charset="-120"/>
+                  <a:srgbClr val="2B2F36"/>
+                </a:solidFill>
+                <a:latin typeface="Arial" pitchFamily="34" charset="0"/>
+                <a:ea typeface="BIZ UDPGothic" pitchFamily="34" charset="-122"/>
+                <a:cs typeface="BIZ UDPGothic" pitchFamily="34" charset="-120"/>
               </a:rPr>
               <a:t>共通クラウドの仕様策定・セキュリティ設計（OSS化の範囲と脆弱性管理）</a:t>
             </a:r>
@@ -6796,11 +6796,11 @@
             </a:avLst>
           </a:prstGeom>
           <a:solidFill>
-            <a:srgbClr val="1A1A1A"/>
+            <a:srgbClr val="FFFFFF"/>
           </a:solidFill>
           <a:ln w="12700">
             <a:solidFill>
-              <a:srgbClr val="2E2E2E"/>
+              <a:srgbClr val="DDE0E6"/>
             </a:solidFill>
             <a:prstDash val="solid"/>
           </a:ln>
@@ -6833,11 +6833,11 @@
             <a:r>
               <a:rPr lang="en-US" sz="1000" dirty="0">
                 <a:solidFill>
-                  <a:srgbClr val="CCCCCC"/>
-                </a:solidFill>
-                <a:latin typeface="Arial" pitchFamily="34" charset="0"/>
-                <a:ea typeface="Arial" pitchFamily="34" charset="-122"/>
-                <a:cs typeface="Arial" pitchFamily="34" charset="-120"/>
+                  <a:srgbClr val="2B2F36"/>
+                </a:solidFill>
+                <a:latin typeface="Arial" pitchFamily="34" charset="0"/>
+                <a:ea typeface="BIZ UDPGothic" pitchFamily="34" charset="-122"/>
+                <a:cs typeface="BIZ UDPGothic" pitchFamily="34" charset="-120"/>
               </a:rPr>
               <a:t>既存民間サービスとの連携仕様と調達プロセスの設計</a:t>
             </a:r>
@@ -6862,11 +6862,11 @@
             </a:avLst>
           </a:prstGeom>
           <a:solidFill>
-            <a:srgbClr val="1A1A1A"/>
+            <a:srgbClr val="FFFFFF"/>
           </a:solidFill>
           <a:ln w="12700">
             <a:solidFill>
-              <a:srgbClr val="2E2E2E"/>
+              <a:srgbClr val="DDE0E6"/>
             </a:solidFill>
             <a:prstDash val="solid"/>
           </a:ln>
@@ -6899,11 +6899,11 @@
             <a:r>
               <a:rPr lang="en-US" sz="1000" dirty="0">
                 <a:solidFill>
-                  <a:srgbClr val="CCCCCC"/>
-                </a:solidFill>
-                <a:latin typeface="Arial" pitchFamily="34" charset="0"/>
-                <a:ea typeface="Arial" pitchFamily="34" charset="-122"/>
-                <a:cs typeface="Arial" pitchFamily="34" charset="-120"/>
+                  <a:srgbClr val="2B2F36"/>
+                </a:solidFill>
+                <a:latin typeface="Arial" pitchFamily="34" charset="0"/>
+                <a:ea typeface="BIZ UDPGothic" pitchFamily="34" charset="-122"/>
+                <a:cs typeface="BIZ UDPGothic" pitchFamily="34" charset="-120"/>
               </a:rPr>
               <a:t>公費デジタル監視委員会の組織設計・独立性の担保・権限範囲</a:t>
             </a:r>
@@ -6928,11 +6928,11 @@
             </a:avLst>
           </a:prstGeom>
           <a:solidFill>
-            <a:srgbClr val="1A1A1A"/>
+            <a:srgbClr val="FFFFFF"/>
           </a:solidFill>
           <a:ln w="12700">
             <a:solidFill>
-              <a:srgbClr val="2E2E2E"/>
+              <a:srgbClr val="DDE0E6"/>
             </a:solidFill>
             <a:prstDash val="solid"/>
           </a:ln>
@@ -6965,11 +6965,11 @@
             <a:r>
               <a:rPr lang="en-US" sz="1000" dirty="0">
                 <a:solidFill>
-                  <a:srgbClr val="CCCCCC"/>
-                </a:solidFill>
-                <a:latin typeface="Arial" pitchFamily="34" charset="0"/>
-                <a:ea typeface="Arial" pitchFamily="34" charset="-122"/>
-                <a:cs typeface="Arial" pitchFamily="34" charset="-120"/>
+                  <a:srgbClr val="2B2F36"/>
+                </a:solidFill>
+                <a:latin typeface="Arial" pitchFamily="34" charset="0"/>
+                <a:ea typeface="BIZ UDPGothic" pitchFamily="34" charset="-122"/>
+                <a:cs typeface="BIZ UDPGothic" pitchFamily="34" charset="-120"/>
               </a:rPr>
               <a:t>内部統制・公開システムの分離設計の詳細（マスキング基準・匿名化手法）</a:t>
             </a:r>
@@ -6994,11 +6994,11 @@
             </a:avLst>
           </a:prstGeom>
           <a:solidFill>
-            <a:srgbClr val="1A1A1A"/>
+            <a:srgbClr val="FFFFFF"/>
           </a:solidFill>
           <a:ln w="12700">
             <a:solidFill>
-              <a:srgbClr val="2E2E2E"/>
+              <a:srgbClr val="DDE0E6"/>
             </a:solidFill>
             <a:prstDash val="solid"/>
           </a:ln>
@@ -7031,11 +7031,11 @@
             <a:r>
               <a:rPr lang="en-US" sz="1000" dirty="0">
                 <a:solidFill>
-                  <a:srgbClr val="CCCCCC"/>
-                </a:solidFill>
-                <a:latin typeface="Arial" pitchFamily="34" charset="0"/>
-                <a:ea typeface="Arial" pitchFamily="34" charset="-122"/>
-                <a:cs typeface="Arial" pitchFamily="34" charset="-120"/>
+                  <a:srgbClr val="2B2F36"/>
+                </a:solidFill>
+                <a:latin typeface="Arial" pitchFamily="34" charset="0"/>
+                <a:ea typeface="BIZ UDPGothic" pitchFamily="34" charset="-122"/>
+                <a:cs typeface="BIZ UDPGothic" pitchFamily="34" charset="-120"/>
               </a:rPr>
               <a:t>多重下請け解体に伴う既存元請け・中間業者の激変緩和措置</a:t>
             </a:r>
@@ -7060,11 +7060,11 @@
             </a:avLst>
           </a:prstGeom>
           <a:solidFill>
-            <a:srgbClr val="1A1A1A"/>
+            <a:srgbClr val="FFFFFF"/>
           </a:solidFill>
           <a:ln w="12700">
             <a:solidFill>
-              <a:srgbClr val="2E2E2E"/>
+              <a:srgbClr val="DDE0E6"/>
             </a:solidFill>
             <a:prstDash val="solid"/>
           </a:ln>
@@ -7097,11 +7097,11 @@
             <a:r>
               <a:rPr lang="en-US" sz="1000" dirty="0">
                 <a:solidFill>
-                  <a:srgbClr val="CCCCCC"/>
-                </a:solidFill>
-                <a:latin typeface="Arial" pitchFamily="34" charset="0"/>
-                <a:ea typeface="Arial" pitchFamily="34" charset="-122"/>
-                <a:cs typeface="Arial" pitchFamily="34" charset="-120"/>
+                  <a:srgbClr val="2B2F36"/>
+                </a:solidFill>
+                <a:latin typeface="Arial" pitchFamily="34" charset="0"/>
+                <a:ea typeface="BIZ UDPGothic" pitchFamily="34" charset="-122"/>
+                <a:cs typeface="BIZ UDPGothic" pitchFamily="34" charset="-120"/>
               </a:rPr>
               <a:t>入札時点での下請け確定ルールと緊急工事・災害対応との整合性</a:t>
             </a:r>
@@ -7126,11 +7126,11 @@
             </a:avLst>
           </a:prstGeom>
           <a:solidFill>
-            <a:srgbClr val="1A1A1A"/>
+            <a:srgbClr val="FFFFFF"/>
           </a:solidFill>
           <a:ln w="12700">
             <a:solidFill>
-              <a:srgbClr val="2E2E2E"/>
+              <a:srgbClr val="DDE0E6"/>
             </a:solidFill>
             <a:prstDash val="solid"/>
           </a:ln>
@@ -7163,11 +7163,11 @@
             <a:r>
               <a:rPr lang="en-US" sz="1000" dirty="0">
                 <a:solidFill>
-                  <a:srgbClr val="CCCCCC"/>
-                </a:solidFill>
-                <a:latin typeface="Arial" pitchFamily="34" charset="0"/>
-                <a:ea typeface="Arial" pitchFamily="34" charset="-122"/>
-                <a:cs typeface="Arial" pitchFamily="34" charset="-120"/>
+                  <a:srgbClr val="2B2F36"/>
+                </a:solidFill>
+                <a:latin typeface="Arial" pitchFamily="34" charset="0"/>
+                <a:ea typeface="BIZ UDPGothic" pitchFamily="34" charset="-122"/>
+                <a:cs typeface="BIZ UDPGothic" pitchFamily="34" charset="-120"/>
               </a:rPr>
               <a:t>E2E決済における下請け業者の資金繰り（支払いサイト・前払い制度）</a:t>
             </a:r>
@@ -7192,11 +7192,11 @@
             </a:avLst>
           </a:prstGeom>
           <a:solidFill>
-            <a:srgbClr val="1A1A1A"/>
+            <a:srgbClr val="FFFFFF"/>
           </a:solidFill>
           <a:ln w="12700">
             <a:solidFill>
-              <a:srgbClr val="2E2E2E"/>
+              <a:srgbClr val="DDE0E6"/>
             </a:solidFill>
             <a:prstDash val="solid"/>
           </a:ln>
@@ -7229,11 +7229,11 @@
             <a:r>
               <a:rPr lang="en-US" sz="1000" dirty="0">
                 <a:solidFill>
-                  <a:srgbClr val="CCCCCC"/>
-                </a:solidFill>
-                <a:latin typeface="Arial" pitchFamily="34" charset="0"/>
-                <a:ea typeface="Arial" pitchFamily="34" charset="-122"/>
-                <a:cs typeface="Arial" pitchFamily="34" charset="-120"/>
+                  <a:srgbClr val="2B2F36"/>
+                </a:solidFill>
+                <a:latin typeface="Arial" pitchFamily="34" charset="0"/>
+                <a:ea typeface="BIZ UDPGothic" pitchFamily="34" charset="-122"/>
+                <a:cs typeface="BIZ UDPGothic" pitchFamily="34" charset="-120"/>
               </a:rPr>
               <a:t>AIによる異常値検知の誤検知リスクと異議申し立て手続きの設計</a:t>
             </a:r>
@@ -7258,11 +7258,11 @@
             </a:avLst>
           </a:prstGeom>
           <a:solidFill>
-            <a:srgbClr val="1A1A1A"/>
+            <a:srgbClr val="FFFFFF"/>
           </a:solidFill>
           <a:ln w="12700">
             <a:solidFill>
-              <a:srgbClr val="2E2E2E"/>
+              <a:srgbClr val="DDE0E6"/>
             </a:solidFill>
             <a:prstDash val="solid"/>
           </a:ln>
@@ -7295,11 +7295,11 @@
             <a:r>
               <a:rPr lang="en-US" sz="1000" dirty="0">
                 <a:solidFill>
-                  <a:srgbClr val="CCCCCC"/>
-                </a:solidFill>
-                <a:latin typeface="Arial" pitchFamily="34" charset="0"/>
-                <a:ea typeface="Arial" pitchFamily="34" charset="-122"/>
-                <a:cs typeface="Arial" pitchFamily="34" charset="-120"/>
+                  <a:srgbClr val="2B2F36"/>
+                </a:solidFill>
+                <a:latin typeface="Arial" pitchFamily="34" charset="0"/>
+                <a:ea typeface="BIZ UDPGothic" pitchFamily="34" charset="-122"/>
+                <a:cs typeface="BIZ UDPGothic" pitchFamily="34" charset="-120"/>
               </a:rPr>
               <a:t>「不当マージン率」の実態把握に向けた統計整備</a:t>
             </a:r>
@@ -7321,7 +7321,7 @@
     <p:bg>
       <p:bgPr>
         <a:solidFill>
-          <a:srgbClr val="0A0A0A"/>
+          <a:srgbClr val="F5F6F8"/>
         </a:solidFill>
       </p:bgPr>
     </p:bg>
@@ -7354,11 +7354,11 @@
             <a:avLst/>
           </a:prstGeom>
           <a:solidFill>
-            <a:srgbClr val="D62828"/>
+            <a:srgbClr val="C8161D"/>
           </a:solidFill>
           <a:ln w="12700">
             <a:solidFill>
-              <a:srgbClr val="D62828"/>
+              <a:srgbClr val="C8161D"/>
             </a:solidFill>
             <a:prstDash val="solid"/>
           </a:ln>
@@ -7391,11 +7391,11 @@
             <a:r>
               <a:rPr lang="en-US" sz="1000" b="1" spc="300" kern="0" dirty="0">
                 <a:solidFill>
-                  <a:srgbClr val="D62828"/>
-                </a:solidFill>
-                <a:latin typeface="Arial" pitchFamily="34" charset="0"/>
-                <a:ea typeface="Arial" pitchFamily="34" charset="-122"/>
-                <a:cs typeface="Arial" pitchFamily="34" charset="-120"/>
+                  <a:srgbClr val="C8161D"/>
+                </a:solidFill>
+                <a:latin typeface="Arial" pitchFamily="34" charset="0"/>
+                <a:ea typeface="BIZ UDPGothic" pitchFamily="34" charset="-122"/>
+                <a:cs typeface="BIZ UDPGothic" pitchFamily="34" charset="-120"/>
               </a:rPr>
               <a:t>REBOOT JAPAN ── 提言008　まとめ</a:t>
             </a:r>
@@ -7430,11 +7430,11 @@
             <a:r>
               <a:rPr lang="en-US" sz="3000" b="1" dirty="0">
                 <a:solidFill>
-                  <a:srgbClr val="F5F5F0"/>
-                </a:solidFill>
-                <a:latin typeface="Cambria" pitchFamily="34" charset="0"/>
-                <a:ea typeface="Cambria" pitchFamily="34" charset="-122"/>
-                <a:cs typeface="Cambria" pitchFamily="34" charset="-120"/>
+                  <a:srgbClr val="16181D"/>
+                </a:solidFill>
+                <a:latin typeface="BIZ UDPGothic" pitchFamily="34" charset="0"/>
+                <a:ea typeface="BIZ UDPGothic" pitchFamily="34" charset="-122"/>
+                <a:cs typeface="BIZ UDPGothic" pitchFamily="34" charset="-120"/>
               </a:rPr>
               <a:t>税金を使う者に、</a:t>
             </a:r>
@@ -7447,11 +7447,11 @@
             <a:r>
               <a:rPr lang="en-US" sz="3000" b="1" dirty="0">
                 <a:solidFill>
-                  <a:srgbClr val="F5F5F0"/>
-                </a:solidFill>
-                <a:latin typeface="Cambria" pitchFamily="34" charset="0"/>
-                <a:ea typeface="Cambria" pitchFamily="34" charset="-122"/>
-                <a:cs typeface="Cambria" pitchFamily="34" charset="-120"/>
+                  <a:srgbClr val="16181D"/>
+                </a:solidFill>
+                <a:latin typeface="BIZ UDPGothic" pitchFamily="34" charset="0"/>
+                <a:ea typeface="BIZ UDPGothic" pitchFamily="34" charset="-122"/>
+                <a:cs typeface="BIZ UDPGothic" pitchFamily="34" charset="-120"/>
               </a:rPr>
               <a:t>1円のブラックボックスも、</a:t>
             </a:r>
@@ -7464,11 +7464,11 @@
             <a:r>
               <a:rPr lang="en-US" sz="3000" b="1" dirty="0">
                 <a:solidFill>
-                  <a:srgbClr val="F5F5F0"/>
-                </a:solidFill>
-                <a:latin typeface="Cambria" pitchFamily="34" charset="0"/>
-                <a:ea typeface="Cambria" pitchFamily="34" charset="-122"/>
-                <a:cs typeface="Cambria" pitchFamily="34" charset="-120"/>
+                  <a:srgbClr val="16181D"/>
+                </a:solidFill>
+                <a:latin typeface="BIZ UDPGothic" pitchFamily="34" charset="0"/>
+                <a:ea typeface="BIZ UDPGothic" pitchFamily="34" charset="-122"/>
+                <a:cs typeface="BIZ UDPGothic" pitchFamily="34" charset="-120"/>
               </a:rPr>
               <a:t>不当な中抜きも許さない。</a:t>
             </a:r>
@@ -7491,11 +7491,11 @@
             <a:avLst/>
           </a:prstGeom>
           <a:solidFill>
-            <a:srgbClr val="2E2E2E"/>
+            <a:srgbClr val="DDE0E6"/>
           </a:solidFill>
           <a:ln w="12700">
             <a:solidFill>
-              <a:srgbClr val="2E2E2E"/>
+              <a:srgbClr val="DDE0E6"/>
             </a:solidFill>
             <a:prstDash val="solid"/>
           </a:ln>
@@ -7531,11 +7531,11 @@
             <a:r>
               <a:rPr lang="en-US" sz="1100" dirty="0">
                 <a:solidFill>
-                  <a:srgbClr val="CCCCCC"/>
-                </a:solidFill>
-                <a:latin typeface="Arial" pitchFamily="34" charset="0"/>
-                <a:ea typeface="Arial" pitchFamily="34" charset="-122"/>
-                <a:cs typeface="Arial" pitchFamily="34" charset="-120"/>
+                  <a:srgbClr val="2B2F36"/>
+                </a:solidFill>
+                <a:latin typeface="Arial" pitchFamily="34" charset="0"/>
+                <a:ea typeface="BIZ UDPGothic" pitchFamily="34" charset="-122"/>
+                <a:cs typeface="BIZ UDPGothic" pitchFamily="34" charset="-120"/>
               </a:rPr>
               <a:t>① 公費執行DXの義務化：共通クラウド＋コーポレートカードで精算をデジタル化</a:t>
             </a:r>
@@ -7551,11 +7551,11 @@
             <a:r>
               <a:rPr lang="en-US" sz="1100" dirty="0">
                 <a:solidFill>
-                  <a:srgbClr val="CCCCCC"/>
-                </a:solidFill>
-                <a:latin typeface="Arial" pitchFamily="34" charset="0"/>
-                <a:ea typeface="Arial" pitchFamily="34" charset="-122"/>
-                <a:cs typeface="Arial" pitchFamily="34" charset="-120"/>
+                  <a:srgbClr val="2B2F36"/>
+                </a:solidFill>
+                <a:latin typeface="Arial" pitchFamily="34" charset="0"/>
+                <a:ea typeface="BIZ UDPGothic" pitchFamily="34" charset="-122"/>
+                <a:cs typeface="BIZ UDPGothic" pitchFamily="34" charset="-120"/>
               </a:rPr>
               <a:t>② 自動ガバナンス：不正支出を「物理的に実行できない」仕組みへ</a:t>
             </a:r>
@@ -7571,11 +7571,11 @@
             <a:r>
               <a:rPr lang="en-US" sz="1100" dirty="0">
                 <a:solidFill>
-                  <a:srgbClr val="CCCCCC"/>
-                </a:solidFill>
-                <a:latin typeface="Arial" pitchFamily="34" charset="0"/>
-                <a:ea typeface="Arial" pitchFamily="34" charset="-122"/>
-                <a:cs typeface="Arial" pitchFamily="34" charset="-120"/>
+                  <a:srgbClr val="2B2F36"/>
+                </a:solidFill>
+                <a:latin typeface="Arial" pitchFamily="34" charset="0"/>
+                <a:ea typeface="BIZ UDPGothic" pitchFamily="34" charset="-122"/>
+                <a:cs typeface="BIZ UDPGothic" pitchFamily="34" charset="-120"/>
               </a:rPr>
               <a:t>③ リアルタイム公開：全公費データをオープンデータ化（内外システムは分離設計）</a:t>
             </a:r>
@@ -7591,11 +7591,11 @@
             <a:r>
               <a:rPr lang="en-US" sz="1100" dirty="0">
                 <a:solidFill>
-                  <a:srgbClr val="CCCCCC"/>
-                </a:solidFill>
-                <a:latin typeface="Arial" pitchFamily="34" charset="0"/>
-                <a:ea typeface="Arial" pitchFamily="34" charset="-122"/>
-                <a:cs typeface="Arial" pitchFamily="34" charset="-120"/>
+                  <a:srgbClr val="2B2F36"/>
+                </a:solidFill>
+                <a:latin typeface="Arial" pitchFamily="34" charset="0"/>
+                <a:ea typeface="BIZ UDPGothic" pitchFamily="34" charset="-122"/>
+                <a:cs typeface="BIZ UDPGothic" pitchFamily="34" charset="-120"/>
               </a:rPr>
               <a:t>④ E2E追跡：補助金・委託費の使途を完全追跡し中抜きを根絶</a:t>
             </a:r>
@@ -7611,11 +7611,11 @@
             <a:r>
               <a:rPr lang="en-US" sz="1100" dirty="0">
                 <a:solidFill>
-                  <a:srgbClr val="CCCCCC"/>
-                </a:solidFill>
-                <a:latin typeface="Arial" pitchFamily="34" charset="0"/>
-                <a:ea typeface="Arial" pitchFamily="34" charset="-122"/>
-                <a:cs typeface="Arial" pitchFamily="34" charset="-120"/>
+                  <a:srgbClr val="2B2F36"/>
+                </a:solidFill>
+                <a:latin typeface="Arial" pitchFamily="34" charset="0"/>
+                <a:ea typeface="BIZ UDPGothic" pitchFamily="34" charset="-122"/>
+                <a:cs typeface="BIZ UDPGothic" pitchFamily="34" charset="-120"/>
               </a:rPr>
               <a:t>⑤ 入札改革：入札時に下請け確定・直接見積もり・E2E決済を義務化</a:t>
             </a:r>
@@ -7637,7 +7637,7 @@
     <p:bg>
       <p:bgPr>
         <a:solidFill>
-          <a:srgbClr val="0A0A0A"/>
+          <a:srgbClr val="F5F6F8"/>
         </a:solidFill>
       </p:bgPr>
     </p:bg>
@@ -7682,11 +7682,11 @@
             <a:r>
               <a:rPr lang="en-US" sz="900" b="1" spc="400" kern="0" dirty="0">
                 <a:solidFill>
-                  <a:srgbClr val="D62828"/>
-                </a:solidFill>
-                <a:latin typeface="Arial" pitchFamily="34" charset="0"/>
-                <a:ea typeface="Arial" pitchFamily="34" charset="-122"/>
-                <a:cs typeface="Arial" pitchFamily="34" charset="-120"/>
+                  <a:srgbClr val="C8161D"/>
+                </a:solidFill>
+                <a:latin typeface="Arial" pitchFamily="34" charset="0"/>
+                <a:ea typeface="BIZ UDPGothic" pitchFamily="34" charset="-122"/>
+                <a:cs typeface="BIZ UDPGothic" pitchFamily="34" charset="-120"/>
               </a:rPr>
               <a:t>PROBLEM</a:t>
             </a:r>
@@ -7721,11 +7721,11 @@
             <a:r>
               <a:rPr lang="en-US" sz="2800" b="1" dirty="0">
                 <a:solidFill>
-                  <a:srgbClr val="F5F5F0"/>
-                </a:solidFill>
-                <a:latin typeface="Cambria" pitchFamily="34" charset="0"/>
-                <a:ea typeface="Cambria" pitchFamily="34" charset="-122"/>
-                <a:cs typeface="Cambria" pitchFamily="34" charset="-120"/>
+                  <a:srgbClr val="16181D"/>
+                </a:solidFill>
+                <a:latin typeface="BIZ UDPGothic" pitchFamily="34" charset="0"/>
+                <a:ea typeface="BIZ UDPGothic" pitchFamily="34" charset="-122"/>
+                <a:cs typeface="BIZ UDPGothic" pitchFamily="34" charset="-120"/>
               </a:rPr>
               <a:t>「設計ミス」が利権を生み続けている</a:t>
             </a:r>
@@ -7748,11 +7748,11 @@
             <a:avLst/>
           </a:prstGeom>
           <a:solidFill>
-            <a:srgbClr val="2E2E2E"/>
+            <a:srgbClr val="DDE0E6"/>
           </a:solidFill>
           <a:ln w="12700">
             <a:solidFill>
-              <a:srgbClr val="2E2E2E"/>
+              <a:srgbClr val="DDE0E6"/>
             </a:solidFill>
             <a:prstDash val="solid"/>
           </a:ln>
@@ -7775,11 +7775,11 @@
             </a:avLst>
           </a:prstGeom>
           <a:solidFill>
-            <a:srgbClr val="1A1A1A"/>
+            <a:srgbClr val="FFFFFF"/>
           </a:solidFill>
           <a:ln w="12700">
             <a:solidFill>
-              <a:srgbClr val="2E2E2E"/>
+              <a:srgbClr val="DDE0E6"/>
             </a:solidFill>
             <a:prstDash val="solid"/>
           </a:ln>
@@ -7812,11 +7812,11 @@
             <a:r>
               <a:rPr lang="en-US" sz="2600" b="1" dirty="0">
                 <a:solidFill>
-                  <a:srgbClr val="D62828"/>
-                </a:solidFill>
-                <a:latin typeface="Cambria" pitchFamily="34" charset="0"/>
-                <a:ea typeface="Cambria" pitchFamily="34" charset="-122"/>
-                <a:cs typeface="Cambria" pitchFamily="34" charset="-120"/>
+                  <a:srgbClr val="C8161D"/>
+                </a:solidFill>
+                <a:latin typeface="BIZ UDPGothic" pitchFamily="34" charset="0"/>
+                <a:ea typeface="BIZ UDPGothic" pitchFamily="34" charset="-122"/>
+                <a:cs typeface="BIZ UDPGothic" pitchFamily="34" charset="-120"/>
               </a:rPr>
               <a:t>01</a:t>
             </a:r>
@@ -7839,11 +7839,11 @@
             <a:avLst/>
           </a:prstGeom>
           <a:solidFill>
-            <a:srgbClr val="2E2E2E"/>
+            <a:srgbClr val="DDE0E6"/>
           </a:solidFill>
           <a:ln w="12700">
             <a:solidFill>
-              <a:srgbClr val="2E2E2E"/>
+              <a:srgbClr val="DDE0E6"/>
             </a:solidFill>
             <a:prstDash val="solid"/>
           </a:ln>
@@ -7876,11 +7876,11 @@
             <a:r>
               <a:rPr lang="en-US" sz="1400" b="1" dirty="0">
                 <a:solidFill>
-                  <a:srgbClr val="F5F5F0"/>
-                </a:solidFill>
-                <a:latin typeface="Cambria" pitchFamily="34" charset="0"/>
-                <a:ea typeface="Cambria" pitchFamily="34" charset="-122"/>
-                <a:cs typeface="Cambria" pitchFamily="34" charset="-120"/>
+                  <a:srgbClr val="16181D"/>
+                </a:solidFill>
+                <a:latin typeface="BIZ UDPGothic" pitchFamily="34" charset="0"/>
+                <a:ea typeface="BIZ UDPGothic" pitchFamily="34" charset="-122"/>
+                <a:cs typeface="BIZ UDPGothic" pitchFamily="34" charset="-120"/>
               </a:rPr>
               <a:t>アナログ運用が不正の温床</a:t>
             </a:r>
@@ -7915,11 +7915,11 @@
             <a:r>
               <a:rPr lang="en-US" sz="1100" dirty="0">
                 <a:solidFill>
-                  <a:srgbClr val="CCCCCC"/>
-                </a:solidFill>
-                <a:latin typeface="Arial" pitchFamily="34" charset="0"/>
-                <a:ea typeface="Arial" pitchFamily="34" charset="-122"/>
-                <a:cs typeface="Arial" pitchFamily="34" charset="-120"/>
+                  <a:srgbClr val="2B2F36"/>
+                </a:solidFill>
+                <a:latin typeface="Arial" pitchFamily="34" charset="0"/>
+                <a:ea typeface="BIZ UDPGothic" pitchFamily="34" charset="-122"/>
+                <a:cs typeface="BIZ UDPGothic" pitchFamily="34" charset="-120"/>
               </a:rPr>
               <a:t>定額支給・領収書不要・事後報告。カラ出張や不透明な経費を生む昭和型の制度設計が今も現役で動いている</a:t>
             </a:r>
@@ -7944,11 +7944,11 @@
             </a:avLst>
           </a:prstGeom>
           <a:solidFill>
-            <a:srgbClr val="1A1A1A"/>
+            <a:srgbClr val="FFFFFF"/>
           </a:solidFill>
           <a:ln w="12700">
             <a:solidFill>
-              <a:srgbClr val="2E2E2E"/>
+              <a:srgbClr val="DDE0E6"/>
             </a:solidFill>
             <a:prstDash val="solid"/>
           </a:ln>
@@ -7981,11 +7981,11 @@
             <a:r>
               <a:rPr lang="en-US" sz="2600" b="1" dirty="0">
                 <a:solidFill>
-                  <a:srgbClr val="D62828"/>
-                </a:solidFill>
-                <a:latin typeface="Cambria" pitchFamily="34" charset="0"/>
-                <a:ea typeface="Cambria" pitchFamily="34" charset="-122"/>
-                <a:cs typeface="Cambria" pitchFamily="34" charset="-120"/>
+                  <a:srgbClr val="C8161D"/>
+                </a:solidFill>
+                <a:latin typeface="BIZ UDPGothic" pitchFamily="34" charset="0"/>
+                <a:ea typeface="BIZ UDPGothic" pitchFamily="34" charset="-122"/>
+                <a:cs typeface="BIZ UDPGothic" pitchFamily="34" charset="-120"/>
               </a:rPr>
               <a:t>02</a:t>
             </a:r>
@@ -8008,11 +8008,11 @@
             <a:avLst/>
           </a:prstGeom>
           <a:solidFill>
-            <a:srgbClr val="2E2E2E"/>
+            <a:srgbClr val="DDE0E6"/>
           </a:solidFill>
           <a:ln w="12700">
             <a:solidFill>
-              <a:srgbClr val="2E2E2E"/>
+              <a:srgbClr val="DDE0E6"/>
             </a:solidFill>
             <a:prstDash val="solid"/>
           </a:ln>
@@ -8045,11 +8045,11 @@
             <a:r>
               <a:rPr lang="en-US" sz="1400" b="1" dirty="0">
                 <a:solidFill>
-                  <a:srgbClr val="F5F5F0"/>
-                </a:solidFill>
-                <a:latin typeface="Cambria" pitchFamily="34" charset="0"/>
-                <a:ea typeface="Cambria" pitchFamily="34" charset="-122"/>
-                <a:cs typeface="Cambria" pitchFamily="34" charset="-120"/>
+                  <a:srgbClr val="16181D"/>
+                </a:solidFill>
+                <a:latin typeface="BIZ UDPGothic" pitchFamily="34" charset="0"/>
+                <a:ea typeface="BIZ UDPGothic" pitchFamily="34" charset="-122"/>
+                <a:cs typeface="BIZ UDPGothic" pitchFamily="34" charset="-120"/>
               </a:rPr>
               <a:t>多重下請けによる中抜き</a:t>
             </a:r>
@@ -8084,11 +8084,11 @@
             <a:r>
               <a:rPr lang="en-US" sz="1100" dirty="0">
                 <a:solidFill>
-                  <a:srgbClr val="CCCCCC"/>
-                </a:solidFill>
-                <a:latin typeface="Arial" pitchFamily="34" charset="0"/>
-                <a:ea typeface="Arial" pitchFamily="34" charset="-122"/>
-                <a:cs typeface="Arial" pitchFamily="34" charset="-120"/>
+                  <a:srgbClr val="2B2F36"/>
+                </a:solidFill>
+                <a:latin typeface="Arial" pitchFamily="34" charset="0"/>
+                <a:ea typeface="BIZ UDPGothic" pitchFamily="34" charset="-122"/>
+                <a:cs typeface="BIZ UDPGothic" pitchFamily="34" charset="-120"/>
               </a:rPr>
               <a:t>年間25〜30兆円の公共調達市場。元請け→中間業者→下請けの多重構造が、実力ある末端業者への適正対価を阻んでいる</a:t>
             </a:r>
@@ -8113,11 +8113,11 @@
             </a:avLst>
           </a:prstGeom>
           <a:solidFill>
-            <a:srgbClr val="1A1A1A"/>
+            <a:srgbClr val="FFFFFF"/>
           </a:solidFill>
           <a:ln w="12700">
             <a:solidFill>
-              <a:srgbClr val="2E2E2E"/>
+              <a:srgbClr val="DDE0E6"/>
             </a:solidFill>
             <a:prstDash val="solid"/>
           </a:ln>
@@ -8150,11 +8150,11 @@
             <a:r>
               <a:rPr lang="en-US" sz="2600" b="1" dirty="0">
                 <a:solidFill>
-                  <a:srgbClr val="D62828"/>
-                </a:solidFill>
-                <a:latin typeface="Cambria" pitchFamily="34" charset="0"/>
-                <a:ea typeface="Cambria" pitchFamily="34" charset="-122"/>
-                <a:cs typeface="Cambria" pitchFamily="34" charset="-120"/>
+                  <a:srgbClr val="C8161D"/>
+                </a:solidFill>
+                <a:latin typeface="BIZ UDPGothic" pitchFamily="34" charset="0"/>
+                <a:ea typeface="BIZ UDPGothic" pitchFamily="34" charset="-122"/>
+                <a:cs typeface="BIZ UDPGothic" pitchFamily="34" charset="-120"/>
               </a:rPr>
               <a:t>03</a:t>
             </a:r>
@@ -8177,11 +8177,11 @@
             <a:avLst/>
           </a:prstGeom>
           <a:solidFill>
-            <a:srgbClr val="2E2E2E"/>
+            <a:srgbClr val="DDE0E6"/>
           </a:solidFill>
           <a:ln w="12700">
             <a:solidFill>
-              <a:srgbClr val="2E2E2E"/>
+              <a:srgbClr val="DDE0E6"/>
             </a:solidFill>
             <a:prstDash val="solid"/>
           </a:ln>
@@ -8214,11 +8214,11 @@
             <a:r>
               <a:rPr lang="en-US" sz="1400" b="1" dirty="0">
                 <a:solidFill>
-                  <a:srgbClr val="F5F5F0"/>
-                </a:solidFill>
-                <a:latin typeface="Cambria" pitchFamily="34" charset="0"/>
-                <a:ea typeface="Cambria" pitchFamily="34" charset="-122"/>
-                <a:cs typeface="Cambria" pitchFamily="34" charset="-120"/>
+                  <a:srgbClr val="16181D"/>
+                </a:solidFill>
+                <a:latin typeface="BIZ UDPGothic" pitchFamily="34" charset="0"/>
+                <a:ea typeface="BIZ UDPGothic" pitchFamily="34" charset="-122"/>
+                <a:cs typeface="BIZ UDPGothic" pitchFamily="34" charset="-120"/>
               </a:rPr>
               <a:t>補助金・委託費の不透明な使途</a:t>
             </a:r>
@@ -8253,11 +8253,11 @@
             <a:r>
               <a:rPr lang="en-US" sz="1100" dirty="0">
                 <a:solidFill>
-                  <a:srgbClr val="CCCCCC"/>
-                </a:solidFill>
-                <a:latin typeface="Arial" pitchFamily="34" charset="0"/>
-                <a:ea typeface="Arial" pitchFamily="34" charset="-122"/>
-                <a:cs typeface="Arial" pitchFamily="34" charset="-120"/>
+                  <a:srgbClr val="2B2F36"/>
+                </a:solidFill>
+                <a:latin typeface="Arial" pitchFamily="34" charset="0"/>
+                <a:ea typeface="BIZ UDPGothic" pitchFamily="34" charset="-122"/>
+                <a:cs typeface="BIZ UDPGothic" pitchFamily="34" charset="-120"/>
               </a:rPr>
               <a:t>国・自治体から民間へ流れる公的資金の使途追跡が不可能。目的外支出・中間搾取が構造的に許容されている</a:t>
             </a:r>
@@ -8279,7 +8279,7 @@
     <p:bg>
       <p:bgPr>
         <a:solidFill>
-          <a:srgbClr val="0A0A0A"/>
+          <a:srgbClr val="F5F6F8"/>
         </a:solidFill>
       </p:bgPr>
     </p:bg>
@@ -8324,11 +8324,11 @@
             <a:r>
               <a:rPr lang="en-US" sz="900" b="1" spc="400" kern="0" dirty="0">
                 <a:solidFill>
-                  <a:srgbClr val="D62828"/>
-                </a:solidFill>
-                <a:latin typeface="Arial" pitchFamily="34" charset="0"/>
-                <a:ea typeface="Arial" pitchFamily="34" charset="-122"/>
-                <a:cs typeface="Arial" pitchFamily="34" charset="-120"/>
+                  <a:srgbClr val="C8161D"/>
+                </a:solidFill>
+                <a:latin typeface="Arial" pitchFamily="34" charset="0"/>
+                <a:ea typeface="BIZ UDPGothic" pitchFamily="34" charset="-122"/>
+                <a:cs typeface="BIZ UDPGothic" pitchFamily="34" charset="-120"/>
               </a:rPr>
               <a:t>OVERVIEW</a:t>
             </a:r>
@@ -8363,11 +8363,11 @@
             <a:r>
               <a:rPr lang="en-US" sz="2800" b="1" dirty="0">
                 <a:solidFill>
-                  <a:srgbClr val="F5F5F0"/>
-                </a:solidFill>
-                <a:latin typeface="Cambria" pitchFamily="34" charset="0"/>
-                <a:ea typeface="Cambria" pitchFamily="34" charset="-122"/>
-                <a:cs typeface="Cambria" pitchFamily="34" charset="-120"/>
+                  <a:srgbClr val="16181D"/>
+                </a:solidFill>
+                <a:latin typeface="BIZ UDPGothic" pitchFamily="34" charset="0"/>
+                <a:ea typeface="BIZ UDPGothic" pitchFamily="34" charset="-122"/>
+                <a:cs typeface="BIZ UDPGothic" pitchFamily="34" charset="-120"/>
               </a:rPr>
               <a:t>5つの基幹政策</a:t>
             </a:r>
@@ -8390,11 +8390,11 @@
             <a:avLst/>
           </a:prstGeom>
           <a:solidFill>
-            <a:srgbClr val="2E2E2E"/>
+            <a:srgbClr val="DDE0E6"/>
           </a:solidFill>
           <a:ln w="12700">
             <a:solidFill>
-              <a:srgbClr val="2E2E2E"/>
+              <a:srgbClr val="DDE0E6"/>
             </a:solidFill>
             <a:prstDash val="solid"/>
           </a:ln>
@@ -8427,11 +8427,11 @@
             <a:r>
               <a:rPr lang="en-US" sz="1100" dirty="0">
                 <a:solidFill>
-                  <a:srgbClr val="CCCCCC"/>
-                </a:solidFill>
-                <a:latin typeface="Arial" pitchFamily="34" charset="0"/>
-                <a:ea typeface="Arial" pitchFamily="34" charset="-122"/>
-                <a:cs typeface="Arial" pitchFamily="34" charset="-120"/>
+                  <a:srgbClr val="2B2F36"/>
+                </a:solidFill>
+                <a:latin typeface="Arial" pitchFamily="34" charset="0"/>
+                <a:ea typeface="BIZ UDPGothic" pitchFamily="34" charset="-122"/>
+                <a:cs typeface="BIZ UDPGothic" pitchFamily="34" charset="-120"/>
               </a:rPr>
               <a:t>「税金が1円でも動くプロセス」に例外を認めない。テクノロジーで不正を物理的に不可能にする。</a:t>
             </a:r>
@@ -8456,11 +8456,11 @@
             </a:avLst>
           </a:prstGeom>
           <a:solidFill>
-            <a:srgbClr val="1A1A1A"/>
+            <a:srgbClr val="FFFFFF"/>
           </a:solidFill>
           <a:ln w="12700">
             <a:solidFill>
-              <a:srgbClr val="2E2E2E"/>
+              <a:srgbClr val="DDE0E6"/>
             </a:solidFill>
             <a:prstDash val="solid"/>
           </a:ln>
@@ -8483,11 +8483,11 @@
             </a:avLst>
           </a:prstGeom>
           <a:solidFill>
-            <a:srgbClr val="D62828"/>
+            <a:srgbClr val="C8161D"/>
           </a:solidFill>
           <a:ln w="12700">
             <a:solidFill>
-              <a:srgbClr val="D62828"/>
+              <a:srgbClr val="C8161D"/>
             </a:solidFill>
             <a:prstDash val="solid"/>
           </a:ln>
@@ -8520,11 +8520,11 @@
             <a:r>
               <a:rPr lang="en-US" sz="1800" b="1" dirty="0">
                 <a:solidFill>
-                  <a:srgbClr val="F5F5F0"/>
-                </a:solidFill>
-                <a:latin typeface="Arial" pitchFamily="34" charset="0"/>
-                <a:ea typeface="Arial" pitchFamily="34" charset="-122"/>
-                <a:cs typeface="Arial" pitchFamily="34" charset="-120"/>
+                  <a:srgbClr val="FFFFFF"/>
+                </a:solidFill>
+                <a:latin typeface="Arial" pitchFamily="34" charset="0"/>
+                <a:ea typeface="BIZ UDPGothic" pitchFamily="34" charset="-122"/>
+                <a:cs typeface="BIZ UDPGothic" pitchFamily="34" charset="-120"/>
               </a:rPr>
               <a:t>①</a:t>
             </a:r>
@@ -8559,11 +8559,11 @@
             <a:r>
               <a:rPr lang="en-US" sz="1200" b="1" dirty="0">
                 <a:solidFill>
-                  <a:srgbClr val="F5F5F0"/>
-                </a:solidFill>
-                <a:latin typeface="Cambria" pitchFamily="34" charset="0"/>
-                <a:ea typeface="Cambria" pitchFamily="34" charset="-122"/>
-                <a:cs typeface="Cambria" pitchFamily="34" charset="-120"/>
+                  <a:srgbClr val="16181D"/>
+                </a:solidFill>
+                <a:latin typeface="BIZ UDPGothic" pitchFamily="34" charset="0"/>
+                <a:ea typeface="BIZ UDPGothic" pitchFamily="34" charset="-122"/>
+                <a:cs typeface="BIZ UDPGothic" pitchFamily="34" charset="-120"/>
               </a:rPr>
               <a:t>公費執行DX</a:t>
             </a:r>
@@ -8576,11 +8576,11 @@
             <a:r>
               <a:rPr lang="en-US" sz="1200" b="1" dirty="0">
                 <a:solidFill>
-                  <a:srgbClr val="F5F5F0"/>
-                </a:solidFill>
-                <a:latin typeface="Cambria" pitchFamily="34" charset="0"/>
-                <a:ea typeface="Cambria" pitchFamily="34" charset="-122"/>
-                <a:cs typeface="Cambria" pitchFamily="34" charset="-120"/>
+                  <a:srgbClr val="16181D"/>
+                </a:solidFill>
+                <a:latin typeface="BIZ UDPGothic" pitchFamily="34" charset="0"/>
+                <a:ea typeface="BIZ UDPGothic" pitchFamily="34" charset="-122"/>
+                <a:cs typeface="BIZ UDPGothic" pitchFamily="34" charset="-120"/>
               </a:rPr>
               <a:t>の義務化</a:t>
             </a:r>
@@ -8603,11 +8603,11 @@
             <a:avLst/>
           </a:prstGeom>
           <a:solidFill>
-            <a:srgbClr val="2E2E2E"/>
+            <a:srgbClr val="DDE0E6"/>
           </a:solidFill>
           <a:ln w="12700">
             <a:solidFill>
-              <a:srgbClr val="2E2E2E"/>
+              <a:srgbClr val="DDE0E6"/>
             </a:solidFill>
             <a:prstDash val="solid"/>
           </a:ln>
@@ -8640,11 +8640,11 @@
             <a:r>
               <a:rPr lang="en-US" sz="1000" dirty="0">
                 <a:solidFill>
-                  <a:srgbClr val="CCCCCC"/>
-                </a:solidFill>
-                <a:latin typeface="Arial" pitchFamily="34" charset="0"/>
-                <a:ea typeface="Arial" pitchFamily="34" charset="-122"/>
-                <a:cs typeface="Arial" pitchFamily="34" charset="-120"/>
+                  <a:srgbClr val="2B2F36"/>
+                </a:solidFill>
+                <a:latin typeface="Arial" pitchFamily="34" charset="0"/>
+                <a:ea typeface="BIZ UDPGothic" pitchFamily="34" charset="-122"/>
+                <a:cs typeface="BIZ UDPGothic" pitchFamily="34" charset="-120"/>
               </a:rPr>
               <a:t>共通クラウド＋</a:t>
             </a:r>
@@ -8657,11 +8657,11 @@
             <a:r>
               <a:rPr lang="en-US" sz="1000" dirty="0">
                 <a:solidFill>
-                  <a:srgbClr val="CCCCCC"/>
-                </a:solidFill>
-                <a:latin typeface="Arial" pitchFamily="34" charset="0"/>
-                <a:ea typeface="Arial" pitchFamily="34" charset="-122"/>
-                <a:cs typeface="Arial" pitchFamily="34" charset="-120"/>
+                  <a:srgbClr val="2B2F36"/>
+                </a:solidFill>
+                <a:latin typeface="Arial" pitchFamily="34" charset="0"/>
+                <a:ea typeface="BIZ UDPGothic" pitchFamily="34" charset="-122"/>
+                <a:cs typeface="BIZ UDPGothic" pitchFamily="34" charset="-120"/>
               </a:rPr>
               <a:t>コーポレートカード</a:t>
             </a:r>
@@ -8686,11 +8686,11 @@
             </a:avLst>
           </a:prstGeom>
           <a:solidFill>
-            <a:srgbClr val="1A1A1A"/>
+            <a:srgbClr val="FFFFFF"/>
           </a:solidFill>
           <a:ln w="12700">
             <a:solidFill>
-              <a:srgbClr val="2E2E2E"/>
+              <a:srgbClr val="DDE0E6"/>
             </a:solidFill>
             <a:prstDash val="solid"/>
           </a:ln>
@@ -8713,11 +8713,11 @@
             </a:avLst>
           </a:prstGeom>
           <a:solidFill>
-            <a:srgbClr val="D62828"/>
+            <a:srgbClr val="C8161D"/>
           </a:solidFill>
           <a:ln w="12700">
             <a:solidFill>
-              <a:srgbClr val="D62828"/>
+              <a:srgbClr val="C8161D"/>
             </a:solidFill>
             <a:prstDash val="solid"/>
           </a:ln>
@@ -8750,11 +8750,11 @@
             <a:r>
               <a:rPr lang="en-US" sz="1800" b="1" dirty="0">
                 <a:solidFill>
-                  <a:srgbClr val="F5F5F0"/>
-                </a:solidFill>
-                <a:latin typeface="Arial" pitchFamily="34" charset="0"/>
-                <a:ea typeface="Arial" pitchFamily="34" charset="-122"/>
-                <a:cs typeface="Arial" pitchFamily="34" charset="-120"/>
+                  <a:srgbClr val="FFFFFF"/>
+                </a:solidFill>
+                <a:latin typeface="Arial" pitchFamily="34" charset="0"/>
+                <a:ea typeface="BIZ UDPGothic" pitchFamily="34" charset="-122"/>
+                <a:cs typeface="BIZ UDPGothic" pitchFamily="34" charset="-120"/>
               </a:rPr>
               <a:t>②</a:t>
             </a:r>
@@ -8789,11 +8789,11 @@
             <a:r>
               <a:rPr lang="en-US" sz="1200" b="1" dirty="0">
                 <a:solidFill>
-                  <a:srgbClr val="F5F5F0"/>
-                </a:solidFill>
-                <a:latin typeface="Cambria" pitchFamily="34" charset="0"/>
-                <a:ea typeface="Cambria" pitchFamily="34" charset="-122"/>
-                <a:cs typeface="Cambria" pitchFamily="34" charset="-120"/>
+                  <a:srgbClr val="16181D"/>
+                </a:solidFill>
+                <a:latin typeface="BIZ UDPGothic" pitchFamily="34" charset="0"/>
+                <a:ea typeface="BIZ UDPGothic" pitchFamily="34" charset="-122"/>
+                <a:cs typeface="BIZ UDPGothic" pitchFamily="34" charset="-120"/>
               </a:rPr>
               <a:t>自動ガバナンス</a:t>
             </a:r>
@@ -8806,11 +8806,11 @@
             <a:r>
               <a:rPr lang="en-US" sz="1200" b="1" dirty="0">
                 <a:solidFill>
-                  <a:srgbClr val="F5F5F0"/>
-                </a:solidFill>
-                <a:latin typeface="Cambria" pitchFamily="34" charset="0"/>
-                <a:ea typeface="Cambria" pitchFamily="34" charset="-122"/>
-                <a:cs typeface="Cambria" pitchFamily="34" charset="-120"/>
+                  <a:srgbClr val="16181D"/>
+                </a:solidFill>
+                <a:latin typeface="BIZ UDPGothic" pitchFamily="34" charset="0"/>
+                <a:ea typeface="BIZ UDPGothic" pitchFamily="34" charset="-122"/>
+                <a:cs typeface="BIZ UDPGothic" pitchFamily="34" charset="-120"/>
               </a:rPr>
               <a:t>の導入</a:t>
             </a:r>
@@ -8833,11 +8833,11 @@
             <a:avLst/>
           </a:prstGeom>
           <a:solidFill>
-            <a:srgbClr val="2E2E2E"/>
+            <a:srgbClr val="DDE0E6"/>
           </a:solidFill>
           <a:ln w="12700">
             <a:solidFill>
-              <a:srgbClr val="2E2E2E"/>
+              <a:srgbClr val="DDE0E6"/>
             </a:solidFill>
             <a:prstDash val="solid"/>
           </a:ln>
@@ -8870,11 +8870,11 @@
             <a:r>
               <a:rPr lang="en-US" sz="1000" dirty="0">
                 <a:solidFill>
-                  <a:srgbClr val="CCCCCC"/>
-                </a:solidFill>
-                <a:latin typeface="Arial" pitchFamily="34" charset="0"/>
-                <a:ea typeface="Arial" pitchFamily="34" charset="-122"/>
-                <a:cs typeface="Arial" pitchFamily="34" charset="-120"/>
+                  <a:srgbClr val="2B2F36"/>
+                </a:solidFill>
+                <a:latin typeface="Arial" pitchFamily="34" charset="0"/>
+                <a:ea typeface="BIZ UDPGothic" pitchFamily="34" charset="-122"/>
+                <a:cs typeface="BIZ UDPGothic" pitchFamily="34" charset="-120"/>
               </a:rPr>
               <a:t>不正支出を</a:t>
             </a:r>
@@ -8887,11 +8887,11 @@
             <a:r>
               <a:rPr lang="en-US" sz="1000" dirty="0">
                 <a:solidFill>
-                  <a:srgbClr val="CCCCCC"/>
-                </a:solidFill>
-                <a:latin typeface="Arial" pitchFamily="34" charset="0"/>
-                <a:ea typeface="Arial" pitchFamily="34" charset="-122"/>
-                <a:cs typeface="Arial" pitchFamily="34" charset="-120"/>
+                  <a:srgbClr val="2B2F36"/>
+                </a:solidFill>
+                <a:latin typeface="Arial" pitchFamily="34" charset="0"/>
+                <a:ea typeface="BIZ UDPGothic" pitchFamily="34" charset="-122"/>
+                <a:cs typeface="BIZ UDPGothic" pitchFamily="34" charset="-120"/>
               </a:rPr>
               <a:t>物理的に不可能に</a:t>
             </a:r>
@@ -8916,11 +8916,11 @@
             </a:avLst>
           </a:prstGeom>
           <a:solidFill>
-            <a:srgbClr val="1A1A1A"/>
+            <a:srgbClr val="FFFFFF"/>
           </a:solidFill>
           <a:ln w="12700">
             <a:solidFill>
-              <a:srgbClr val="2E2E2E"/>
+              <a:srgbClr val="DDE0E6"/>
             </a:solidFill>
             <a:prstDash val="solid"/>
           </a:ln>
@@ -8943,11 +8943,11 @@
             </a:avLst>
           </a:prstGeom>
           <a:solidFill>
-            <a:srgbClr val="D62828"/>
+            <a:srgbClr val="C8161D"/>
           </a:solidFill>
           <a:ln w="12700">
             <a:solidFill>
-              <a:srgbClr val="D62828"/>
+              <a:srgbClr val="C8161D"/>
             </a:solidFill>
             <a:prstDash val="solid"/>
           </a:ln>
@@ -8980,11 +8980,11 @@
             <a:r>
               <a:rPr lang="en-US" sz="1800" b="1" dirty="0">
                 <a:solidFill>
-                  <a:srgbClr val="F5F5F0"/>
-                </a:solidFill>
-                <a:latin typeface="Arial" pitchFamily="34" charset="0"/>
-                <a:ea typeface="Arial" pitchFamily="34" charset="-122"/>
-                <a:cs typeface="Arial" pitchFamily="34" charset="-120"/>
+                  <a:srgbClr val="FFFFFF"/>
+                </a:solidFill>
+                <a:latin typeface="Arial" pitchFamily="34" charset="0"/>
+                <a:ea typeface="BIZ UDPGothic" pitchFamily="34" charset="-122"/>
+                <a:cs typeface="BIZ UDPGothic" pitchFamily="34" charset="-120"/>
               </a:rPr>
               <a:t>③</a:t>
             </a:r>
@@ -9019,11 +9019,11 @@
             <a:r>
               <a:rPr lang="en-US" sz="1200" b="1" dirty="0">
                 <a:solidFill>
-                  <a:srgbClr val="F5F5F0"/>
-                </a:solidFill>
-                <a:latin typeface="Cambria" pitchFamily="34" charset="0"/>
-                <a:ea typeface="Cambria" pitchFamily="34" charset="-122"/>
-                <a:cs typeface="Cambria" pitchFamily="34" charset="-120"/>
+                  <a:srgbClr val="16181D"/>
+                </a:solidFill>
+                <a:latin typeface="BIZ UDPGothic" pitchFamily="34" charset="0"/>
+                <a:ea typeface="BIZ UDPGothic" pitchFamily="34" charset="-122"/>
+                <a:cs typeface="BIZ UDPGothic" pitchFamily="34" charset="-120"/>
               </a:rPr>
               <a:t>リアルタイム</a:t>
             </a:r>
@@ -9036,11 +9036,11 @@
             <a:r>
               <a:rPr lang="en-US" sz="1200" b="1" dirty="0">
                 <a:solidFill>
-                  <a:srgbClr val="F5F5F0"/>
-                </a:solidFill>
-                <a:latin typeface="Cambria" pitchFamily="34" charset="0"/>
-                <a:ea typeface="Cambria" pitchFamily="34" charset="-122"/>
-                <a:cs typeface="Cambria" pitchFamily="34" charset="-120"/>
+                  <a:srgbClr val="16181D"/>
+                </a:solidFill>
+                <a:latin typeface="BIZ UDPGothic" pitchFamily="34" charset="0"/>
+                <a:ea typeface="BIZ UDPGothic" pitchFamily="34" charset="-122"/>
+                <a:cs typeface="BIZ UDPGothic" pitchFamily="34" charset="-120"/>
               </a:rPr>
               <a:t>公開</a:t>
             </a:r>
@@ -9063,11 +9063,11 @@
             <a:avLst/>
           </a:prstGeom>
           <a:solidFill>
-            <a:srgbClr val="2E2E2E"/>
+            <a:srgbClr val="DDE0E6"/>
           </a:solidFill>
           <a:ln w="12700">
             <a:solidFill>
-              <a:srgbClr val="2E2E2E"/>
+              <a:srgbClr val="DDE0E6"/>
             </a:solidFill>
             <a:prstDash val="solid"/>
           </a:ln>
@@ -9100,11 +9100,11 @@
             <a:r>
               <a:rPr lang="en-US" sz="1000" dirty="0">
                 <a:solidFill>
-                  <a:srgbClr val="CCCCCC"/>
-                </a:solidFill>
-                <a:latin typeface="Arial" pitchFamily="34" charset="0"/>
-                <a:ea typeface="Arial" pitchFamily="34" charset="-122"/>
-                <a:cs typeface="Arial" pitchFamily="34" charset="-120"/>
+                  <a:srgbClr val="2B2F36"/>
+                </a:solidFill>
+                <a:latin typeface="Arial" pitchFamily="34" charset="0"/>
+                <a:ea typeface="BIZ UDPGothic" pitchFamily="34" charset="-122"/>
+                <a:cs typeface="BIZ UDPGothic" pitchFamily="34" charset="-120"/>
               </a:rPr>
               <a:t>全公費データを</a:t>
             </a:r>
@@ -9117,11 +9117,11 @@
             <a:r>
               <a:rPr lang="en-US" sz="1000" dirty="0">
                 <a:solidFill>
-                  <a:srgbClr val="CCCCCC"/>
-                </a:solidFill>
-                <a:latin typeface="Arial" pitchFamily="34" charset="0"/>
-                <a:ea typeface="Arial" pitchFamily="34" charset="-122"/>
-                <a:cs typeface="Arial" pitchFamily="34" charset="-120"/>
+                  <a:srgbClr val="2B2F36"/>
+                </a:solidFill>
+                <a:latin typeface="Arial" pitchFamily="34" charset="0"/>
+                <a:ea typeface="BIZ UDPGothic" pitchFamily="34" charset="-122"/>
+                <a:cs typeface="BIZ UDPGothic" pitchFamily="34" charset="-120"/>
               </a:rPr>
               <a:t>オープンデータ化</a:t>
             </a:r>
@@ -9146,11 +9146,11 @@
             </a:avLst>
           </a:prstGeom>
           <a:solidFill>
-            <a:srgbClr val="1A1A1A"/>
+            <a:srgbClr val="FFFFFF"/>
           </a:solidFill>
           <a:ln w="12700">
             <a:solidFill>
-              <a:srgbClr val="2E2E2E"/>
+              <a:srgbClr val="DDE0E6"/>
             </a:solidFill>
             <a:prstDash val="solid"/>
           </a:ln>
@@ -9173,11 +9173,11 @@
             </a:avLst>
           </a:prstGeom>
           <a:solidFill>
-            <a:srgbClr val="D62828"/>
+            <a:srgbClr val="C8161D"/>
           </a:solidFill>
           <a:ln w="12700">
             <a:solidFill>
-              <a:srgbClr val="D62828"/>
+              <a:srgbClr val="C8161D"/>
             </a:solidFill>
             <a:prstDash val="solid"/>
           </a:ln>
@@ -9210,11 +9210,11 @@
             <a:r>
               <a:rPr lang="en-US" sz="1800" b="1" dirty="0">
                 <a:solidFill>
-                  <a:srgbClr val="F5F5F0"/>
-                </a:solidFill>
-                <a:latin typeface="Arial" pitchFamily="34" charset="0"/>
-                <a:ea typeface="Arial" pitchFamily="34" charset="-122"/>
-                <a:cs typeface="Arial" pitchFamily="34" charset="-120"/>
+                  <a:srgbClr val="FFFFFF"/>
+                </a:solidFill>
+                <a:latin typeface="Arial" pitchFamily="34" charset="0"/>
+                <a:ea typeface="BIZ UDPGothic" pitchFamily="34" charset="-122"/>
+                <a:cs typeface="BIZ UDPGothic" pitchFamily="34" charset="-120"/>
               </a:rPr>
               <a:t>④</a:t>
             </a:r>
@@ -9249,11 +9249,11 @@
             <a:r>
               <a:rPr lang="en-US" sz="1200" b="1" dirty="0">
                 <a:solidFill>
-                  <a:srgbClr val="F5F5F0"/>
-                </a:solidFill>
-                <a:latin typeface="Cambria" pitchFamily="34" charset="0"/>
-                <a:ea typeface="Cambria" pitchFamily="34" charset="-122"/>
-                <a:cs typeface="Cambria" pitchFamily="34" charset="-120"/>
+                  <a:srgbClr val="16181D"/>
+                </a:solidFill>
+                <a:latin typeface="BIZ UDPGothic" pitchFamily="34" charset="0"/>
+                <a:ea typeface="BIZ UDPGothic" pitchFamily="34" charset="-122"/>
+                <a:cs typeface="BIZ UDPGothic" pitchFamily="34" charset="-120"/>
               </a:rPr>
               <a:t>E2E</a:t>
             </a:r>
@@ -9266,11 +9266,11 @@
             <a:r>
               <a:rPr lang="en-US" sz="1200" b="1" dirty="0">
                 <a:solidFill>
-                  <a:srgbClr val="F5F5F0"/>
-                </a:solidFill>
-                <a:latin typeface="Cambria" pitchFamily="34" charset="0"/>
-                <a:ea typeface="Cambria" pitchFamily="34" charset="-122"/>
-                <a:cs typeface="Cambria" pitchFamily="34" charset="-120"/>
+                  <a:srgbClr val="16181D"/>
+                </a:solidFill>
+                <a:latin typeface="BIZ UDPGothic" pitchFamily="34" charset="0"/>
+                <a:ea typeface="BIZ UDPGothic" pitchFamily="34" charset="-122"/>
+                <a:cs typeface="BIZ UDPGothic" pitchFamily="34" charset="-120"/>
               </a:rPr>
               <a:t>追跡</a:t>
             </a:r>
@@ -9293,11 +9293,11 @@
             <a:avLst/>
           </a:prstGeom>
           <a:solidFill>
-            <a:srgbClr val="2E2E2E"/>
+            <a:srgbClr val="DDE0E6"/>
           </a:solidFill>
           <a:ln w="12700">
             <a:solidFill>
-              <a:srgbClr val="2E2E2E"/>
+              <a:srgbClr val="DDE0E6"/>
             </a:solidFill>
             <a:prstDash val="solid"/>
           </a:ln>
@@ -9330,11 +9330,11 @@
             <a:r>
               <a:rPr lang="en-US" sz="1000" dirty="0">
                 <a:solidFill>
-                  <a:srgbClr val="CCCCCC"/>
-                </a:solidFill>
-                <a:latin typeface="Arial" pitchFamily="34" charset="0"/>
-                <a:ea typeface="Arial" pitchFamily="34" charset="-122"/>
-                <a:cs typeface="Arial" pitchFamily="34" charset="-120"/>
+                  <a:srgbClr val="2B2F36"/>
+                </a:solidFill>
+                <a:latin typeface="Arial" pitchFamily="34" charset="0"/>
+                <a:ea typeface="BIZ UDPGothic" pitchFamily="34" charset="-122"/>
+                <a:cs typeface="BIZ UDPGothic" pitchFamily="34" charset="-120"/>
               </a:rPr>
               <a:t>補助金・委託費の</a:t>
             </a:r>
@@ -9347,11 +9347,11 @@
             <a:r>
               <a:rPr lang="en-US" sz="1000" dirty="0">
                 <a:solidFill>
-                  <a:srgbClr val="CCCCCC"/>
-                </a:solidFill>
-                <a:latin typeface="Arial" pitchFamily="34" charset="0"/>
-                <a:ea typeface="Arial" pitchFamily="34" charset="-122"/>
-                <a:cs typeface="Arial" pitchFamily="34" charset="-120"/>
+                  <a:srgbClr val="2B2F36"/>
+                </a:solidFill>
+                <a:latin typeface="Arial" pitchFamily="34" charset="0"/>
+                <a:ea typeface="BIZ UDPGothic" pitchFamily="34" charset="-122"/>
+                <a:cs typeface="BIZ UDPGothic" pitchFamily="34" charset="-120"/>
               </a:rPr>
               <a:t>使途を完全追跡</a:t>
             </a:r>
@@ -9376,11 +9376,11 @@
             </a:avLst>
           </a:prstGeom>
           <a:solidFill>
-            <a:srgbClr val="1A1A1A"/>
+            <a:srgbClr val="FFFFFF"/>
           </a:solidFill>
           <a:ln w="12700">
             <a:solidFill>
-              <a:srgbClr val="2E2E2E"/>
+              <a:srgbClr val="DDE0E6"/>
             </a:solidFill>
             <a:prstDash val="solid"/>
           </a:ln>
@@ -9403,11 +9403,11 @@
             </a:avLst>
           </a:prstGeom>
           <a:solidFill>
-            <a:srgbClr val="D62828"/>
+            <a:srgbClr val="C8161D"/>
           </a:solidFill>
           <a:ln w="12700">
             <a:solidFill>
-              <a:srgbClr val="D62828"/>
+              <a:srgbClr val="C8161D"/>
             </a:solidFill>
             <a:prstDash val="solid"/>
           </a:ln>
@@ -9440,11 +9440,11 @@
             <a:r>
               <a:rPr lang="en-US" sz="1800" b="1" dirty="0">
                 <a:solidFill>
-                  <a:srgbClr val="F5F5F0"/>
-                </a:solidFill>
-                <a:latin typeface="Arial" pitchFamily="34" charset="0"/>
-                <a:ea typeface="Arial" pitchFamily="34" charset="-122"/>
-                <a:cs typeface="Arial" pitchFamily="34" charset="-120"/>
+                  <a:srgbClr val="FFFFFF"/>
+                </a:solidFill>
+                <a:latin typeface="Arial" pitchFamily="34" charset="0"/>
+                <a:ea typeface="BIZ UDPGothic" pitchFamily="34" charset="-122"/>
+                <a:cs typeface="BIZ UDPGothic" pitchFamily="34" charset="-120"/>
               </a:rPr>
               <a:t>⑤</a:t>
             </a:r>
@@ -9479,11 +9479,11 @@
             <a:r>
               <a:rPr lang="en-US" sz="1200" b="1" dirty="0">
                 <a:solidFill>
-                  <a:srgbClr val="F5F5F0"/>
-                </a:solidFill>
-                <a:latin typeface="Cambria" pitchFamily="34" charset="0"/>
-                <a:ea typeface="Cambria" pitchFamily="34" charset="-122"/>
-                <a:cs typeface="Cambria" pitchFamily="34" charset="-120"/>
+                  <a:srgbClr val="16181D"/>
+                </a:solidFill>
+                <a:latin typeface="BIZ UDPGothic" pitchFamily="34" charset="0"/>
+                <a:ea typeface="BIZ UDPGothic" pitchFamily="34" charset="-122"/>
+                <a:cs typeface="BIZ UDPGothic" pitchFamily="34" charset="-120"/>
               </a:rPr>
               <a:t>入札制度の</a:t>
             </a:r>
@@ -9496,11 +9496,11 @@
             <a:r>
               <a:rPr lang="en-US" sz="1200" b="1" dirty="0">
                 <a:solidFill>
-                  <a:srgbClr val="F5F5F0"/>
-                </a:solidFill>
-                <a:latin typeface="Cambria" pitchFamily="34" charset="0"/>
-                <a:ea typeface="Cambria" pitchFamily="34" charset="-122"/>
-                <a:cs typeface="Cambria" pitchFamily="34" charset="-120"/>
+                  <a:srgbClr val="16181D"/>
+                </a:solidFill>
+                <a:latin typeface="BIZ UDPGothic" pitchFamily="34" charset="0"/>
+                <a:ea typeface="BIZ UDPGothic" pitchFamily="34" charset="-122"/>
+                <a:cs typeface="BIZ UDPGothic" pitchFamily="34" charset="-120"/>
               </a:rPr>
               <a:t>根本改革</a:t>
             </a:r>
@@ -9523,11 +9523,11 @@
             <a:avLst/>
           </a:prstGeom>
           <a:solidFill>
-            <a:srgbClr val="2E2E2E"/>
+            <a:srgbClr val="DDE0E6"/>
           </a:solidFill>
           <a:ln w="12700">
             <a:solidFill>
-              <a:srgbClr val="2E2E2E"/>
+              <a:srgbClr val="DDE0E6"/>
             </a:solidFill>
             <a:prstDash val="solid"/>
           </a:ln>
@@ -9560,11 +9560,11 @@
             <a:r>
               <a:rPr lang="en-US" sz="1000" dirty="0">
                 <a:solidFill>
-                  <a:srgbClr val="CCCCCC"/>
-                </a:solidFill>
-                <a:latin typeface="Arial" pitchFamily="34" charset="0"/>
-                <a:ea typeface="Arial" pitchFamily="34" charset="-122"/>
-                <a:cs typeface="Arial" pitchFamily="34" charset="-120"/>
+                  <a:srgbClr val="2B2F36"/>
+                </a:solidFill>
+                <a:latin typeface="Arial" pitchFamily="34" charset="0"/>
+                <a:ea typeface="BIZ UDPGothic" pitchFamily="34" charset="-122"/>
+                <a:cs typeface="BIZ UDPGothic" pitchFamily="34" charset="-120"/>
               </a:rPr>
               <a:t>多重下請けを</a:t>
             </a:r>
@@ -9577,11 +9577,11 @@
             <a:r>
               <a:rPr lang="en-US" sz="1000" dirty="0">
                 <a:solidFill>
-                  <a:srgbClr val="CCCCCC"/>
-                </a:solidFill>
-                <a:latin typeface="Arial" pitchFamily="34" charset="0"/>
-                <a:ea typeface="Arial" pitchFamily="34" charset="-122"/>
-                <a:cs typeface="Arial" pitchFamily="34" charset="-120"/>
+                  <a:srgbClr val="2B2F36"/>
+                </a:solidFill>
+                <a:latin typeface="Arial" pitchFamily="34" charset="0"/>
+                <a:ea typeface="BIZ UDPGothic" pitchFamily="34" charset="-122"/>
+                <a:cs typeface="BIZ UDPGothic" pitchFamily="34" charset="-120"/>
               </a:rPr>
               <a:t>法的に解体</a:t>
             </a:r>
@@ -9603,7 +9603,7 @@
     <p:bg>
       <p:bgPr>
         <a:solidFill>
-          <a:srgbClr val="0A0A0A"/>
+          <a:srgbClr val="F5F6F8"/>
         </a:solidFill>
       </p:bgPr>
     </p:bg>
@@ -9648,11 +9648,11 @@
             <a:r>
               <a:rPr lang="en-US" sz="900" b="1" spc="400" kern="0" dirty="0">
                 <a:solidFill>
-                  <a:srgbClr val="D62828"/>
-                </a:solidFill>
-                <a:latin typeface="Arial" pitchFamily="34" charset="0"/>
-                <a:ea typeface="Arial" pitchFamily="34" charset="-122"/>
-                <a:cs typeface="Arial" pitchFamily="34" charset="-120"/>
+                  <a:srgbClr val="C8161D"/>
+                </a:solidFill>
+                <a:latin typeface="Arial" pitchFamily="34" charset="0"/>
+                <a:ea typeface="BIZ UDPGothic" pitchFamily="34" charset="-122"/>
+                <a:cs typeface="BIZ UDPGothic" pitchFamily="34" charset="-120"/>
               </a:rPr>
               <a:t>POLICY 01</a:t>
             </a:r>
@@ -9687,11 +9687,11 @@
             <a:r>
               <a:rPr lang="en-US" sz="2800" b="1" dirty="0">
                 <a:solidFill>
-                  <a:srgbClr val="F5F5F0"/>
-                </a:solidFill>
-                <a:latin typeface="Cambria" pitchFamily="34" charset="0"/>
-                <a:ea typeface="Cambria" pitchFamily="34" charset="-122"/>
-                <a:cs typeface="Cambria" pitchFamily="34" charset="-120"/>
+                  <a:srgbClr val="16181D"/>
+                </a:solidFill>
+                <a:latin typeface="BIZ UDPGothic" pitchFamily="34" charset="0"/>
+                <a:ea typeface="BIZ UDPGothic" pitchFamily="34" charset="-122"/>
+                <a:cs typeface="BIZ UDPGothic" pitchFamily="34" charset="-120"/>
               </a:rPr>
               <a:t>公費執行DXの義務化とアナログ精算の法的禁止</a:t>
             </a:r>
@@ -9714,11 +9714,11 @@
             <a:avLst/>
           </a:prstGeom>
           <a:solidFill>
-            <a:srgbClr val="2E2E2E"/>
+            <a:srgbClr val="DDE0E6"/>
           </a:solidFill>
           <a:ln w="12700">
             <a:solidFill>
-              <a:srgbClr val="2E2E2E"/>
+              <a:srgbClr val="DDE0E6"/>
             </a:solidFill>
             <a:prstDash val="solid"/>
           </a:ln>
@@ -9741,11 +9741,11 @@
             </a:avLst>
           </a:prstGeom>
           <a:solidFill>
-            <a:srgbClr val="1A0808"/>
+            <a:srgbClr val="FCEBEB"/>
           </a:solidFill>
           <a:ln w="12700">
             <a:solidFill>
-              <a:srgbClr val="2E2E2E"/>
+              <a:srgbClr val="DDE0E6"/>
             </a:solidFill>
             <a:prstDash val="solid"/>
           </a:ln>
@@ -9778,11 +9778,11 @@
             <a:r>
               <a:rPr lang="en-US" sz="1400" b="1" dirty="0">
                 <a:solidFill>
-                  <a:srgbClr val="D62828"/>
-                </a:solidFill>
-                <a:latin typeface="Cambria" pitchFamily="34" charset="0"/>
-                <a:ea typeface="Cambria" pitchFamily="34" charset="-122"/>
-                <a:cs typeface="Cambria" pitchFamily="34" charset="-120"/>
+                  <a:srgbClr val="C8161D"/>
+                </a:solidFill>
+                <a:latin typeface="BIZ UDPGothic" pitchFamily="34" charset="0"/>
+                <a:ea typeface="BIZ UDPGothic" pitchFamily="34" charset="-122"/>
+                <a:cs typeface="BIZ UDPGothic" pitchFamily="34" charset="-120"/>
               </a:rPr>
               <a:t>廃止するもの</a:t>
             </a:r>
@@ -9821,11 +9821,11 @@
             <a:r>
               <a:rPr lang="en-US" sz="1100" dirty="0">
                 <a:solidFill>
-                  <a:srgbClr val="CCCCCC"/>
-                </a:solidFill>
-                <a:latin typeface="Arial" pitchFamily="34" charset="0"/>
-                <a:ea typeface="Arial" pitchFamily="34" charset="-122"/>
-                <a:cs typeface="Arial" pitchFamily="34" charset="-120"/>
+                  <a:srgbClr val="2B2F36"/>
+                </a:solidFill>
+                <a:latin typeface="Arial" pitchFamily="34" charset="0"/>
+                <a:ea typeface="BIZ UDPGothic" pitchFamily="34" charset="-122"/>
+                <a:cs typeface="BIZ UDPGothic" pitchFamily="34" charset="-120"/>
               </a:rPr>
               <a:t>現金取り扱い</a:t>
             </a:r>
@@ -9842,11 +9842,11 @@
             <a:r>
               <a:rPr lang="en-US" sz="1100" dirty="0">
                 <a:solidFill>
-                  <a:srgbClr val="CCCCCC"/>
-                </a:solidFill>
-                <a:latin typeface="Arial" pitchFamily="34" charset="0"/>
-                <a:ea typeface="Arial" pitchFamily="34" charset="-122"/>
-                <a:cs typeface="Arial" pitchFamily="34" charset="-120"/>
+                  <a:srgbClr val="2B2F36"/>
+                </a:solidFill>
+                <a:latin typeface="Arial" pitchFamily="34" charset="0"/>
+                <a:ea typeface="BIZ UDPGothic" pitchFamily="34" charset="-122"/>
+                <a:cs typeface="BIZ UDPGothic" pitchFamily="34" charset="-120"/>
               </a:rPr>
               <a:t>紙の領収書を貼るアナログ事務</a:t>
             </a:r>
@@ -9863,11 +9863,11 @@
             <a:r>
               <a:rPr lang="en-US" sz="1100" dirty="0">
                 <a:solidFill>
-                  <a:srgbClr val="CCCCCC"/>
-                </a:solidFill>
-                <a:latin typeface="Arial" pitchFamily="34" charset="0"/>
-                <a:ea typeface="Arial" pitchFamily="34" charset="-122"/>
-                <a:cs typeface="Arial" pitchFamily="34" charset="-120"/>
+                  <a:srgbClr val="2B2F36"/>
+                </a:solidFill>
+                <a:latin typeface="Arial" pitchFamily="34" charset="0"/>
+                <a:ea typeface="BIZ UDPGothic" pitchFamily="34" charset="-122"/>
+                <a:cs typeface="BIZ UDPGothic" pitchFamily="34" charset="-120"/>
               </a:rPr>
               <a:t>定額支給・事後報告による精算</a:t>
             </a:r>
@@ -9892,11 +9892,11 @@
             </a:avLst>
           </a:prstGeom>
           <a:solidFill>
-            <a:srgbClr val="081808"/>
+            <a:srgbClr val="E9EFF8"/>
           </a:solidFill>
           <a:ln w="12700">
             <a:solidFill>
-              <a:srgbClr val="2E2E2E"/>
+              <a:srgbClr val="DDE0E6"/>
             </a:solidFill>
             <a:prstDash val="solid"/>
           </a:ln>
@@ -9929,11 +9929,11 @@
             <a:r>
               <a:rPr lang="en-US" sz="1400" b="1" dirty="0">
                 <a:solidFill>
-                  <a:srgbClr val="4CAF50"/>
-                </a:solidFill>
-                <a:latin typeface="Cambria" pitchFamily="34" charset="0"/>
-                <a:ea typeface="Cambria" pitchFamily="34" charset="-122"/>
-                <a:cs typeface="Cambria" pitchFamily="34" charset="-120"/>
+                  <a:srgbClr val="1D4F91"/>
+                </a:solidFill>
+                <a:latin typeface="BIZ UDPGothic" pitchFamily="34" charset="0"/>
+                <a:ea typeface="BIZ UDPGothic" pitchFamily="34" charset="-122"/>
+                <a:cs typeface="BIZ UDPGothic" pitchFamily="34" charset="-120"/>
               </a:rPr>
               <a:t>実現すること</a:t>
             </a:r>
@@ -9972,11 +9972,11 @@
             <a:r>
               <a:rPr lang="en-US" sz="1100" dirty="0">
                 <a:solidFill>
-                  <a:srgbClr val="CCCCCC"/>
-                </a:solidFill>
-                <a:latin typeface="Arial" pitchFamily="34" charset="0"/>
-                <a:ea typeface="Arial" pitchFamily="34" charset="-122"/>
-                <a:cs typeface="Arial" pitchFamily="34" charset="-120"/>
+                  <a:srgbClr val="2B2F36"/>
+                </a:solidFill>
+                <a:latin typeface="Arial" pitchFamily="34" charset="0"/>
+                <a:ea typeface="BIZ UDPGothic" pitchFamily="34" charset="-122"/>
+                <a:cs typeface="BIZ UDPGothic" pitchFamily="34" charset="-120"/>
               </a:rPr>
               <a:t>決済データが改ざん不可能な形でシステムに直接連携</a:t>
             </a:r>
@@ -9993,11 +9993,11 @@
             <a:r>
               <a:rPr lang="en-US" sz="1100" dirty="0">
                 <a:solidFill>
-                  <a:srgbClr val="CCCCCC"/>
-                </a:solidFill>
-                <a:latin typeface="Arial" pitchFamily="34" charset="0"/>
-                <a:ea typeface="Arial" pitchFamily="34" charset="-122"/>
-                <a:cs typeface="Arial" pitchFamily="34" charset="-120"/>
+                  <a:srgbClr val="2B2F36"/>
+                </a:solidFill>
+                <a:latin typeface="Arial" pitchFamily="34" charset="0"/>
+                <a:ea typeface="BIZ UDPGothic" pitchFamily="34" charset="-122"/>
+                <a:cs typeface="BIZ UDPGothic" pitchFamily="34" charset="-120"/>
               </a:rPr>
               <a:t>カラ出張・不正利用の余地をゼロに</a:t>
             </a:r>
@@ -10014,11 +10014,11 @@
             <a:r>
               <a:rPr lang="en-US" sz="1100" dirty="0">
                 <a:solidFill>
-                  <a:srgbClr val="CCCCCC"/>
-                </a:solidFill>
-                <a:latin typeface="Arial" pitchFamily="34" charset="0"/>
-                <a:ea typeface="Arial" pitchFamily="34" charset="-122"/>
-                <a:cs typeface="Arial" pitchFamily="34" charset="-120"/>
+                  <a:srgbClr val="2B2F36"/>
+                </a:solidFill>
+                <a:latin typeface="Arial" pitchFamily="34" charset="0"/>
+                <a:ea typeface="BIZ UDPGothic" pitchFamily="34" charset="-122"/>
+                <a:cs typeface="BIZ UDPGothic" pitchFamily="34" charset="-120"/>
               </a:rPr>
               <a:t>公務員のアナログ精算事務を9割削減し住民サービスへリソースをシフト</a:t>
             </a:r>
@@ -10053,11 +10053,11 @@
             <a:r>
               <a:rPr lang="en-US" sz="3600" dirty="0">
                 <a:solidFill>
-                  <a:srgbClr val="D62828"/>
-                </a:solidFill>
-                <a:latin typeface="Arial" pitchFamily="34" charset="0"/>
-                <a:ea typeface="Arial" pitchFamily="34" charset="-122"/>
-                <a:cs typeface="Arial" pitchFamily="34" charset="-120"/>
+                  <a:srgbClr val="C8161D"/>
+                </a:solidFill>
+                <a:latin typeface="Arial" pitchFamily="34" charset="0"/>
+                <a:ea typeface="BIZ UDPGothic" pitchFamily="34" charset="-122"/>
+                <a:cs typeface="BIZ UDPGothic" pitchFamily="34" charset="-120"/>
               </a:rPr>
               <a:t>→</a:t>
             </a:r>
@@ -10079,7 +10079,7 @@
     <p:bg>
       <p:bgPr>
         <a:solidFill>
-          <a:srgbClr val="0A0A0A"/>
+          <a:srgbClr val="F5F6F8"/>
         </a:solidFill>
       </p:bgPr>
     </p:bg>
@@ -10124,11 +10124,11 @@
             <a:r>
               <a:rPr lang="en-US" sz="900" b="1" spc="400" kern="0" dirty="0">
                 <a:solidFill>
-                  <a:srgbClr val="D62828"/>
-                </a:solidFill>
-                <a:latin typeface="Arial" pitchFamily="34" charset="0"/>
-                <a:ea typeface="Arial" pitchFamily="34" charset="-122"/>
-                <a:cs typeface="Arial" pitchFamily="34" charset="-120"/>
+                  <a:srgbClr val="C8161D"/>
+                </a:solidFill>
+                <a:latin typeface="Arial" pitchFamily="34" charset="0"/>
+                <a:ea typeface="BIZ UDPGothic" pitchFamily="34" charset="-122"/>
+                <a:cs typeface="BIZ UDPGothic" pitchFamily="34" charset="-120"/>
               </a:rPr>
               <a:t>POLICY 01 — KEY RISK</a:t>
             </a:r>
@@ -10163,11 +10163,11 @@
             <a:r>
               <a:rPr lang="en-US" sz="1800" b="1" dirty="0">
                 <a:solidFill>
-                  <a:srgbClr val="F5F5F0"/>
-                </a:solidFill>
-                <a:latin typeface="Cambria" pitchFamily="34" charset="0"/>
-                <a:ea typeface="Cambria" pitchFamily="34" charset="-122"/>
-                <a:cs typeface="Cambria" pitchFamily="34" charset="-120"/>
+                  <a:srgbClr val="16181D"/>
+                </a:solidFill>
+                <a:latin typeface="BIZ UDPGothic" pitchFamily="34" charset="0"/>
+                <a:ea typeface="BIZ UDPGothic" pitchFamily="34" charset="-122"/>
+                <a:cs typeface="BIZ UDPGothic" pitchFamily="34" charset="-120"/>
               </a:rPr>
               <a:t>「透明化システムの調達」が最大の不透明案件になるリスクをどう封じるか</a:t>
             </a:r>
@@ -10190,11 +10190,11 @@
             <a:avLst/>
           </a:prstGeom>
           <a:solidFill>
-            <a:srgbClr val="2E2E2E"/>
+            <a:srgbClr val="DDE0E6"/>
           </a:solidFill>
           <a:ln w="12700">
             <a:solidFill>
-              <a:srgbClr val="2E2E2E"/>
+              <a:srgbClr val="DDE0E6"/>
             </a:solidFill>
             <a:prstDash val="solid"/>
           </a:ln>
@@ -10217,11 +10217,11 @@
             </a:avLst>
           </a:prstGeom>
           <a:solidFill>
-            <a:srgbClr val="1A0808"/>
+            <a:srgbClr val="FCEBEB"/>
           </a:solidFill>
           <a:ln w="12700">
             <a:solidFill>
-              <a:srgbClr val="2E2E2E"/>
+              <a:srgbClr val="DDE0E6"/>
             </a:solidFill>
             <a:prstDash val="solid"/>
           </a:ln>
@@ -10254,11 +10254,11 @@
             <a:r>
               <a:rPr lang="en-US" sz="1100" dirty="0">
                 <a:solidFill>
-                  <a:srgbClr val="CCCCCC"/>
-                </a:solidFill>
-                <a:latin typeface="Arial" pitchFamily="34" charset="0"/>
-                <a:ea typeface="Arial" pitchFamily="34" charset="-122"/>
-                <a:cs typeface="Arial" pitchFamily="34" charset="-120"/>
+                  <a:srgbClr val="2B2F36"/>
+                </a:solidFill>
+                <a:latin typeface="Arial" pitchFamily="34" charset="0"/>
+                <a:ea typeface="BIZ UDPGothic" pitchFamily="34" charset="-122"/>
+                <a:cs typeface="BIZ UDPGothic" pitchFamily="34" charset="-120"/>
               </a:rPr>
               <a:t>逆説：年間25〜30兆円の公共調達を監視するシステムの開発は、それ自体が巨大な利権案件になりうる。「透明化のためのシステム」が最大の不透明案件になる。</a:t>
             </a:r>
@@ -10283,11 +10283,11 @@
             </a:avLst>
           </a:prstGeom>
           <a:solidFill>
-            <a:srgbClr val="1A1A1A"/>
+            <a:srgbClr val="FFFFFF"/>
           </a:solidFill>
           <a:ln w="12700">
             <a:solidFill>
-              <a:srgbClr val="2E2E2E"/>
+              <a:srgbClr val="DDE0E6"/>
             </a:solidFill>
             <a:prstDash val="solid"/>
           </a:ln>
@@ -10310,11 +10310,11 @@
             </a:avLst>
           </a:prstGeom>
           <a:solidFill>
-            <a:srgbClr val="D62828"/>
+            <a:srgbClr val="C8161D"/>
           </a:solidFill>
           <a:ln w="12700">
             <a:solidFill>
-              <a:srgbClr val="D62828"/>
+              <a:srgbClr val="C8161D"/>
             </a:solidFill>
             <a:prstDash val="solid"/>
           </a:ln>
@@ -10347,11 +10347,11 @@
             <a:r>
               <a:rPr lang="en-US" sz="1100" b="1" dirty="0">
                 <a:solidFill>
-                  <a:srgbClr val="F5F5F0"/>
-                </a:solidFill>
-                <a:latin typeface="Arial" pitchFamily="34" charset="0"/>
-                <a:ea typeface="Arial" pitchFamily="34" charset="-122"/>
-                <a:cs typeface="Arial" pitchFamily="34" charset="-120"/>
+                  <a:srgbClr val="FFFFFF"/>
+                </a:solidFill>
+                <a:latin typeface="Arial" pitchFamily="34" charset="0"/>
+                <a:ea typeface="BIZ UDPGothic" pitchFamily="34" charset="-122"/>
+                <a:cs typeface="BIZ UDPGothic" pitchFamily="34" charset="-120"/>
               </a:rPr>
               <a:t>調達段階</a:t>
             </a:r>
@@ -10386,11 +10386,11 @@
             <a:r>
               <a:rPr lang="en-US" sz="1100" dirty="0">
                 <a:solidFill>
-                  <a:srgbClr val="CCCCCC"/>
-                </a:solidFill>
-                <a:latin typeface="Arial" pitchFamily="34" charset="0"/>
-                <a:ea typeface="Arial" pitchFamily="34" charset="-122"/>
-                <a:cs typeface="Arial" pitchFamily="34" charset="-120"/>
+                  <a:srgbClr val="2B2F36"/>
+                </a:solidFill>
+                <a:latin typeface="Arial" pitchFamily="34" charset="0"/>
+                <a:ea typeface="BIZ UDPGothic" pitchFamily="34" charset="-122"/>
+                <a:cs typeface="BIZ UDPGothic" pitchFamily="34" charset="-120"/>
               </a:rPr>
               <a:t>政策⑤のルールを自己適用。このシステム開発案件に下請け確定・直接見積もり・E2E決済を最初から適用する</a:t>
             </a:r>
@@ -10415,11 +10415,11 @@
             </a:avLst>
           </a:prstGeom>
           <a:solidFill>
-            <a:srgbClr val="1A1A1A"/>
+            <a:srgbClr val="FFFFFF"/>
           </a:solidFill>
           <a:ln w="12700">
             <a:solidFill>
-              <a:srgbClr val="2E2E2E"/>
+              <a:srgbClr val="DDE0E6"/>
             </a:solidFill>
             <a:prstDash val="solid"/>
           </a:ln>
@@ -10442,11 +10442,11 @@
             </a:avLst>
           </a:prstGeom>
           <a:solidFill>
-            <a:srgbClr val="D62828"/>
+            <a:srgbClr val="C8161D"/>
           </a:solidFill>
           <a:ln w="12700">
             <a:solidFill>
-              <a:srgbClr val="D62828"/>
+              <a:srgbClr val="C8161D"/>
             </a:solidFill>
             <a:prstDash val="solid"/>
           </a:ln>
@@ -10479,11 +10479,11 @@
             <a:r>
               <a:rPr lang="en-US" sz="1100" b="1" dirty="0">
                 <a:solidFill>
-                  <a:srgbClr val="F5F5F0"/>
-                </a:solidFill>
-                <a:latin typeface="Arial" pitchFamily="34" charset="0"/>
-                <a:ea typeface="Arial" pitchFamily="34" charset="-122"/>
-                <a:cs typeface="Arial" pitchFamily="34" charset="-120"/>
+                  <a:srgbClr val="FFFFFF"/>
+                </a:solidFill>
+                <a:latin typeface="Arial" pitchFamily="34" charset="0"/>
+                <a:ea typeface="BIZ UDPGothic" pitchFamily="34" charset="-122"/>
+                <a:cs typeface="BIZ UDPGothic" pitchFamily="34" charset="-120"/>
               </a:rPr>
               <a:t>技術設計</a:t>
             </a:r>
@@ -10518,11 +10518,11 @@
             <a:r>
               <a:rPr lang="en-US" sz="1100" dirty="0">
                 <a:solidFill>
-                  <a:srgbClr val="CCCCCC"/>
-                </a:solidFill>
-                <a:latin typeface="Arial" pitchFamily="34" charset="0"/>
-                <a:ea typeface="Arial" pitchFamily="34" charset="-122"/>
-                <a:cs typeface="Arial" pitchFamily="34" charset="-120"/>
+                  <a:srgbClr val="2B2F36"/>
+                </a:solidFill>
+                <a:latin typeface="Arial" pitchFamily="34" charset="0"/>
+                <a:ea typeface="BIZ UDPGothic" pitchFamily="34" charset="-122"/>
+                <a:cs typeface="BIZ UDPGothic" pitchFamily="34" charset="-120"/>
               </a:rPr>
               <a:t>仕様・コードを完全オープンソース化。特定ベンダーへの依存を構造的に排除する</a:t>
             </a:r>
@@ -10547,11 +10547,11 @@
             </a:avLst>
           </a:prstGeom>
           <a:solidFill>
-            <a:srgbClr val="1A1A1A"/>
+            <a:srgbClr val="FFFFFF"/>
           </a:solidFill>
           <a:ln w="12700">
             <a:solidFill>
-              <a:srgbClr val="2E2E2E"/>
+              <a:srgbClr val="DDE0E6"/>
             </a:solidFill>
             <a:prstDash val="solid"/>
           </a:ln>
@@ -10574,11 +10574,11 @@
             </a:avLst>
           </a:prstGeom>
           <a:solidFill>
-            <a:srgbClr val="D62828"/>
+            <a:srgbClr val="C8161D"/>
           </a:solidFill>
           <a:ln w="12700">
             <a:solidFill>
-              <a:srgbClr val="D62828"/>
+              <a:srgbClr val="C8161D"/>
             </a:solidFill>
             <a:prstDash val="solid"/>
           </a:ln>
@@ -10611,11 +10611,11 @@
             <a:r>
               <a:rPr lang="en-US" sz="1100" b="1" dirty="0">
                 <a:solidFill>
-                  <a:srgbClr val="F5F5F0"/>
-                </a:solidFill>
-                <a:latin typeface="Arial" pitchFamily="34" charset="0"/>
-                <a:ea typeface="Arial" pitchFamily="34" charset="-122"/>
-                <a:cs typeface="Arial" pitchFamily="34" charset="-120"/>
+                  <a:srgbClr val="FFFFFF"/>
+                </a:solidFill>
+                <a:latin typeface="Arial" pitchFamily="34" charset="0"/>
+                <a:ea typeface="BIZ UDPGothic" pitchFamily="34" charset="-122"/>
+                <a:cs typeface="BIZ UDPGothic" pitchFamily="34" charset="-120"/>
               </a:rPr>
               <a:t>導入方法</a:t>
             </a:r>
@@ -10650,11 +10650,11 @@
             <a:r>
               <a:rPr lang="en-US" sz="1100" dirty="0">
                 <a:solidFill>
-                  <a:srgbClr val="CCCCCC"/>
-                </a:solidFill>
-                <a:latin typeface="Arial" pitchFamily="34" charset="0"/>
-                <a:ea typeface="Arial" pitchFamily="34" charset="-122"/>
-                <a:cs typeface="Arial" pitchFamily="34" charset="-120"/>
+                  <a:srgbClr val="2B2F36"/>
+                </a:solidFill>
+                <a:latin typeface="Arial" pitchFamily="34" charset="0"/>
+                <a:ea typeface="BIZ UDPGothic" pitchFamily="34" charset="-122"/>
+                <a:cs typeface="BIZ UDPGothic" pitchFamily="34" charset="-120"/>
               </a:rPr>
               <a:t>一から作らない。マネーフォワード・Suica法人カード等の既存民間サービスを組み合わせ新規開発リスクを最小化</a:t>
             </a:r>
@@ -10679,11 +10679,11 @@
             </a:avLst>
           </a:prstGeom>
           <a:solidFill>
-            <a:srgbClr val="1A1A1A"/>
+            <a:srgbClr val="FFFFFF"/>
           </a:solidFill>
           <a:ln w="12700">
             <a:solidFill>
-              <a:srgbClr val="2E2E2E"/>
+              <a:srgbClr val="DDE0E6"/>
             </a:solidFill>
             <a:prstDash val="solid"/>
           </a:ln>
@@ -10706,11 +10706,11 @@
             </a:avLst>
           </a:prstGeom>
           <a:solidFill>
-            <a:srgbClr val="D62828"/>
+            <a:srgbClr val="C8161D"/>
           </a:solidFill>
           <a:ln w="12700">
             <a:solidFill>
-              <a:srgbClr val="D62828"/>
+              <a:srgbClr val="C8161D"/>
             </a:solidFill>
             <a:prstDash val="solid"/>
           </a:ln>
@@ -10743,11 +10743,11 @@
             <a:r>
               <a:rPr lang="en-US" sz="1100" b="1" dirty="0">
                 <a:solidFill>
-                  <a:srgbClr val="F5F5F0"/>
-                </a:solidFill>
-                <a:latin typeface="Arial" pitchFamily="34" charset="0"/>
-                <a:ea typeface="Arial" pitchFamily="34" charset="-122"/>
-                <a:cs typeface="Arial" pitchFamily="34" charset="-120"/>
+                  <a:srgbClr val="FFFFFF"/>
+                </a:solidFill>
+                <a:latin typeface="Arial" pitchFamily="34" charset="0"/>
+                <a:ea typeface="BIZ UDPGothic" pitchFamily="34" charset="-122"/>
+                <a:cs typeface="BIZ UDPGothic" pitchFamily="34" charset="-120"/>
               </a:rPr>
               <a:t>運用監視</a:t>
             </a:r>
@@ -10782,11 +10782,11 @@
             <a:r>
               <a:rPr lang="en-US" sz="1100" dirty="0">
                 <a:solidFill>
-                  <a:srgbClr val="CCCCCC"/>
-                </a:solidFill>
-                <a:latin typeface="Arial" pitchFamily="34" charset="0"/>
-                <a:ea typeface="Arial" pitchFamily="34" charset="-122"/>
-                <a:cs typeface="Arial" pitchFamily="34" charset="-120"/>
+                  <a:srgbClr val="2B2F36"/>
+                </a:solidFill>
+                <a:latin typeface="Arial" pitchFamily="34" charset="0"/>
+                <a:ea typeface="BIZ UDPGothic" pitchFamily="34" charset="-122"/>
+                <a:cs typeface="BIZ UDPGothic" pitchFamily="34" charset="-120"/>
               </a:rPr>
               <a:t>公費デジタル監視委員会（独立第三者機関）がシステムの調達・運用・改修を常時監視する</a:t>
             </a:r>
@@ -10811,11 +10811,11 @@
             </a:avLst>
           </a:prstGeom>
           <a:solidFill>
-            <a:srgbClr val="1A1A1A"/>
+            <a:srgbClr val="FFFFFF"/>
           </a:solidFill>
           <a:ln w="12700">
             <a:solidFill>
-              <a:srgbClr val="2E2E2E"/>
+              <a:srgbClr val="DDE0E6"/>
             </a:solidFill>
             <a:prstDash val="solid"/>
           </a:ln>
@@ -10835,7 +10835,7 @@
     <p:bg>
       <p:bgPr>
         <a:solidFill>
-          <a:srgbClr val="0A0A0A"/>
+          <a:srgbClr val="F5F6F8"/>
         </a:solidFill>
       </p:bgPr>
     </p:bg>
@@ -10880,11 +10880,11 @@
             <a:r>
               <a:rPr lang="en-US" sz="900" b="1" spc="400" kern="0" dirty="0">
                 <a:solidFill>
-                  <a:srgbClr val="D62828"/>
-                </a:solidFill>
-                <a:latin typeface="Arial" pitchFamily="34" charset="0"/>
-                <a:ea typeface="Arial" pitchFamily="34" charset="-122"/>
-                <a:cs typeface="Arial" pitchFamily="34" charset="-120"/>
+                  <a:srgbClr val="C8161D"/>
+                </a:solidFill>
+                <a:latin typeface="Arial" pitchFamily="34" charset="0"/>
+                <a:ea typeface="BIZ UDPGothic" pitchFamily="34" charset="-122"/>
+                <a:cs typeface="BIZ UDPGothic" pitchFamily="34" charset="-120"/>
               </a:rPr>
               <a:t>POLICY 02</a:t>
             </a:r>
@@ -10919,11 +10919,11 @@
             <a:r>
               <a:rPr lang="en-US" sz="2800" b="1" dirty="0">
                 <a:solidFill>
-                  <a:srgbClr val="F5F5F0"/>
-                </a:solidFill>
-                <a:latin typeface="Cambria" pitchFamily="34" charset="0"/>
-                <a:ea typeface="Cambria" pitchFamily="34" charset="-122"/>
-                <a:cs typeface="Cambria" pitchFamily="34" charset="-120"/>
+                  <a:srgbClr val="16181D"/>
+                </a:solidFill>
+                <a:latin typeface="BIZ UDPGothic" pitchFamily="34" charset="0"/>
+                <a:ea typeface="BIZ UDPGothic" pitchFamily="34" charset="-122"/>
+                <a:cs typeface="BIZ UDPGothic" pitchFamily="34" charset="-120"/>
               </a:rPr>
               <a:t>システムによる「自動ガバナンス（統制）」の導入</a:t>
             </a:r>
@@ -10946,11 +10946,11 @@
             <a:avLst/>
           </a:prstGeom>
           <a:solidFill>
-            <a:srgbClr val="2E2E2E"/>
+            <a:srgbClr val="DDE0E6"/>
           </a:solidFill>
           <a:ln w="12700">
             <a:solidFill>
-              <a:srgbClr val="2E2E2E"/>
+              <a:srgbClr val="DDE0E6"/>
             </a:solidFill>
             <a:prstDash val="solid"/>
           </a:ln>
@@ -10983,11 +10983,11 @@
             <a:r>
               <a:rPr lang="en-US" sz="1100" dirty="0">
                 <a:solidFill>
-                  <a:srgbClr val="CCCCCC"/>
-                </a:solidFill>
-                <a:latin typeface="Arial" pitchFamily="34" charset="0"/>
-                <a:ea typeface="Arial" pitchFamily="34" charset="-122"/>
-                <a:cs typeface="Arial" pitchFamily="34" charset="-120"/>
+                  <a:srgbClr val="2B2F36"/>
+                </a:solidFill>
+                <a:latin typeface="Arial" pitchFamily="34" charset="0"/>
+                <a:ea typeface="BIZ UDPGothic" pitchFamily="34" charset="-122"/>
+                <a:cs typeface="BIZ UDPGothic" pitchFamily="34" charset="-120"/>
               </a:rPr>
               <a:t>人手によるチェックや「事後の言い訳」に頼る性善説ガバナンスを廃止する。</a:t>
             </a:r>
@@ -11012,11 +11012,11 @@
             </a:avLst>
           </a:prstGeom>
           <a:solidFill>
-            <a:srgbClr val="1A0808"/>
+            <a:srgbClr val="FCEBEB"/>
           </a:solidFill>
           <a:ln w="12700">
             <a:solidFill>
-              <a:srgbClr val="2E2E2E"/>
+              <a:srgbClr val="DDE0E6"/>
             </a:solidFill>
             <a:prstDash val="solid"/>
           </a:ln>
@@ -11049,11 +11049,11 @@
             <a:r>
               <a:rPr lang="en-US" sz="1300" b="1" dirty="0">
                 <a:solidFill>
-                  <a:srgbClr val="D62828"/>
-                </a:solidFill>
-                <a:latin typeface="Cambria" pitchFamily="34" charset="0"/>
-                <a:ea typeface="Cambria" pitchFamily="34" charset="-122"/>
-                <a:cs typeface="Cambria" pitchFamily="34" charset="-120"/>
+                  <a:srgbClr val="C8161D"/>
+                </a:solidFill>
+                <a:latin typeface="BIZ UDPGothic" pitchFamily="34" charset="0"/>
+                <a:ea typeface="BIZ UDPGothic" pitchFamily="34" charset="-122"/>
+                <a:cs typeface="BIZ UDPGothic" pitchFamily="34" charset="-120"/>
               </a:rPr>
               <a:t>現行：事後チェック → 「知らなかった」「慣例だった」で逃げられる</a:t>
             </a:r>
@@ -11088,11 +11088,11 @@
             <a:r>
               <a:rPr lang="en-US" sz="1100" dirty="0">
                 <a:solidFill>
-                  <a:srgbClr val="CCCCCC"/>
-                </a:solidFill>
-                <a:latin typeface="Arial" pitchFamily="34" charset="0"/>
-                <a:ea typeface="Arial" pitchFamily="34" charset="-122"/>
-                <a:cs typeface="Arial" pitchFamily="34" charset="-120"/>
+                  <a:srgbClr val="2B2F36"/>
+                </a:solidFill>
+                <a:latin typeface="Arial" pitchFamily="34" charset="0"/>
+                <a:ea typeface="BIZ UDPGothic" pitchFamily="34" charset="-122"/>
+                <a:cs typeface="BIZ UDPGothic" pitchFamily="34" charset="-120"/>
               </a:rPr>
               <a:t>人間がチェックする前提は、人間が誤魔化せる前提でもある。</a:t>
             </a:r>
@@ -11117,11 +11117,11 @@
             </a:avLst>
           </a:prstGeom>
           <a:solidFill>
-            <a:srgbClr val="081808"/>
+            <a:srgbClr val="E9EFF8"/>
           </a:solidFill>
           <a:ln w="12700">
             <a:solidFill>
-              <a:srgbClr val="2E2E2E"/>
+              <a:srgbClr val="DDE0E6"/>
             </a:solidFill>
             <a:prstDash val="solid"/>
           </a:ln>
@@ -11154,11 +11154,11 @@
             <a:r>
               <a:rPr lang="en-US" sz="1300" b="1" dirty="0">
                 <a:solidFill>
-                  <a:srgbClr val="4CAF50"/>
-                </a:solidFill>
-                <a:latin typeface="Cambria" pitchFamily="34" charset="0"/>
-                <a:ea typeface="Cambria" pitchFamily="34" charset="-122"/>
-                <a:cs typeface="Cambria" pitchFamily="34" charset="-120"/>
+                  <a:srgbClr val="1D4F91"/>
+                </a:solidFill>
+                <a:latin typeface="BIZ UDPGothic" pitchFamily="34" charset="0"/>
+                <a:ea typeface="BIZ UDPGothic" pitchFamily="34" charset="-122"/>
+                <a:cs typeface="BIZ UDPGothic" pitchFamily="34" charset="-120"/>
               </a:rPr>
               <a:t>改革後：事前ロック → 「物理的に実行できない」仕組みを作る</a:t>
             </a:r>
@@ -11193,11 +11193,11 @@
             <a:r>
               <a:rPr lang="en-US" sz="1100" dirty="0">
                 <a:solidFill>
-                  <a:srgbClr val="CCCCCC"/>
-                </a:solidFill>
-                <a:latin typeface="Arial" pitchFamily="34" charset="0"/>
-                <a:ea typeface="Arial" pitchFamily="34" charset="-122"/>
-                <a:cs typeface="Arial" pitchFamily="34" charset="-120"/>
+                  <a:srgbClr val="2B2F36"/>
+                </a:solidFill>
+                <a:latin typeface="Arial" pitchFamily="34" charset="0"/>
+                <a:ea typeface="BIZ UDPGothic" pitchFamily="34" charset="-122"/>
+                <a:cs typeface="BIZ UDPGothic" pitchFamily="34" charset="-120"/>
               </a:rPr>
               <a:t>一般職のグリーン車・高級ホテルは自動ロック　特定業者バイネーム購入はアラート　予算上限超過は自動ブロック</a:t>
             </a:r>
@@ -11222,11 +11222,11 @@
             </a:avLst>
           </a:prstGeom>
           <a:solidFill>
-            <a:srgbClr val="1A1A1A"/>
+            <a:srgbClr val="FFFFFF"/>
           </a:solidFill>
           <a:ln w="12700">
             <a:solidFill>
-              <a:srgbClr val="2E2E2E"/>
+              <a:srgbClr val="DDE0E6"/>
             </a:solidFill>
             <a:prstDash val="solid"/>
           </a:ln>
@@ -11259,11 +11259,11 @@
             <a:r>
               <a:rPr lang="en-US" sz="1100" b="1" dirty="0">
                 <a:solidFill>
-                  <a:srgbClr val="F5F5F0"/>
-                </a:solidFill>
-                <a:latin typeface="Cambria" pitchFamily="34" charset="0"/>
-                <a:ea typeface="Cambria" pitchFamily="34" charset="-122"/>
-                <a:cs typeface="Cambria" pitchFamily="34" charset="-120"/>
+                  <a:srgbClr val="16181D"/>
+                </a:solidFill>
+                <a:latin typeface="BIZ UDPGothic" pitchFamily="34" charset="0"/>
+                <a:ea typeface="BIZ UDPGothic" pitchFamily="34" charset="-122"/>
+                <a:cs typeface="BIZ UDPGothic" pitchFamily="34" charset="-120"/>
               </a:rPr>
               <a:t>不適切な公費支出そのものが「物理的に実行できない」仕組みこそが、性善説ガバナンスの終わりである</a:t>
             </a:r>
@@ -11285,7 +11285,7 @@
     <p:bg>
       <p:bgPr>
         <a:solidFill>
-          <a:srgbClr val="0A0A0A"/>
+          <a:srgbClr val="F5F6F8"/>
         </a:solidFill>
       </p:bgPr>
     </p:bg>
@@ -11330,11 +11330,11 @@
             <a:r>
               <a:rPr lang="en-US" sz="900" b="1" spc="400" kern="0" dirty="0">
                 <a:solidFill>
-                  <a:srgbClr val="D62828"/>
-                </a:solidFill>
-                <a:latin typeface="Arial" pitchFamily="34" charset="0"/>
-                <a:ea typeface="Arial" pitchFamily="34" charset="-122"/>
-                <a:cs typeface="Arial" pitchFamily="34" charset="-120"/>
+                  <a:srgbClr val="C8161D"/>
+                </a:solidFill>
+                <a:latin typeface="Arial" pitchFamily="34" charset="0"/>
+                <a:ea typeface="BIZ UDPGothic" pitchFamily="34" charset="-122"/>
+                <a:cs typeface="BIZ UDPGothic" pitchFamily="34" charset="-120"/>
               </a:rPr>
               <a:t>POLICY 03</a:t>
             </a:r>
@@ -11369,11 +11369,11 @@
             <a:r>
               <a:rPr lang="en-US" sz="2800" b="1" dirty="0">
                 <a:solidFill>
-                  <a:srgbClr val="F5F5F0"/>
-                </a:solidFill>
-                <a:latin typeface="Cambria" pitchFamily="34" charset="0"/>
-                <a:ea typeface="Cambria" pitchFamily="34" charset="-122"/>
-                <a:cs typeface="Cambria" pitchFamily="34" charset="-120"/>
+                  <a:srgbClr val="16181D"/>
+                </a:solidFill>
+                <a:latin typeface="BIZ UDPGothic" pitchFamily="34" charset="0"/>
+                <a:ea typeface="BIZ UDPGothic" pitchFamily="34" charset="-122"/>
+                <a:cs typeface="BIZ UDPGothic" pitchFamily="34" charset="-120"/>
               </a:rPr>
               <a:t>公費執行データの「リアルタイム・オープンデータ化」</a:t>
             </a:r>
@@ -11396,11 +11396,11 @@
             <a:avLst/>
           </a:prstGeom>
           <a:solidFill>
-            <a:srgbClr val="2E2E2E"/>
+            <a:srgbClr val="DDE0E6"/>
           </a:solidFill>
           <a:ln w="12700">
             <a:solidFill>
-              <a:srgbClr val="2E2E2E"/>
+              <a:srgbClr val="DDE0E6"/>
             </a:solidFill>
             <a:prstDash val="solid"/>
           </a:ln>
@@ -11433,11 +11433,11 @@
             <a:r>
               <a:rPr lang="en-US" sz="1100" dirty="0">
                 <a:solidFill>
-                  <a:srgbClr val="CCCCCC"/>
-                </a:solidFill>
-                <a:latin typeface="Arial" pitchFamily="34" charset="0"/>
-                <a:ea typeface="Arial" pitchFamily="34" charset="-122"/>
-                <a:cs typeface="Arial" pitchFamily="34" charset="-120"/>
+                  <a:srgbClr val="2B2F36"/>
+                </a:solidFill>
+                <a:latin typeface="Arial" pitchFamily="34" charset="0"/>
+                <a:ea typeface="BIZ UDPGothic" pitchFamily="34" charset="-122"/>
+                <a:cs typeface="BIZ UDPGothic" pitchFamily="34" charset="-120"/>
               </a:rPr>
               <a:t>執行された全公費データを、原則として全てリアルタイムでWeb公開する。</a:t>
             </a:r>
@@ -11462,11 +11462,11 @@
             </a:avLst>
           </a:prstGeom>
           <a:solidFill>
-            <a:srgbClr val="141414"/>
+            <a:srgbClr val="FFFFFF"/>
           </a:solidFill>
           <a:ln w="12700">
             <a:solidFill>
-              <a:srgbClr val="2E2E2E"/>
+              <a:srgbClr val="DDE0E6"/>
             </a:solidFill>
             <a:prstDash val="solid"/>
           </a:ln>
@@ -11499,11 +11499,11 @@
             <a:r>
               <a:rPr lang="en-US" sz="1300" b="1" dirty="0">
                 <a:solidFill>
-                  <a:srgbClr val="F5F5F0"/>
-                </a:solidFill>
-                <a:latin typeface="Cambria" pitchFamily="34" charset="0"/>
-                <a:ea typeface="Cambria" pitchFamily="34" charset="-122"/>
-                <a:cs typeface="Cambria" pitchFamily="34" charset="-120"/>
+                  <a:srgbClr val="16181D"/>
+                </a:solidFill>
+                <a:latin typeface="BIZ UDPGothic" pitchFamily="34" charset="0"/>
+                <a:ea typeface="BIZ UDPGothic" pitchFamily="34" charset="-122"/>
+                <a:cs typeface="BIZ UDPGothic" pitchFamily="34" charset="-120"/>
               </a:rPr>
               <a:t>公開対象（原則・全て）</a:t>
             </a:r>
@@ -11542,11 +11542,11 @@
             <a:r>
               <a:rPr lang="en-US" sz="1100" dirty="0">
                 <a:solidFill>
-                  <a:srgbClr val="CCCCCC"/>
-                </a:solidFill>
-                <a:latin typeface="Arial" pitchFamily="34" charset="0"/>
-                <a:ea typeface="Arial" pitchFamily="34" charset="-122"/>
-                <a:cs typeface="Arial" pitchFamily="34" charset="-120"/>
+                  <a:srgbClr val="2B2F36"/>
+                </a:solidFill>
+                <a:latin typeface="Arial" pitchFamily="34" charset="0"/>
+                <a:ea typeface="BIZ UDPGothic" pitchFamily="34" charset="-122"/>
+                <a:cs typeface="BIZ UDPGothic" pitchFamily="34" charset="-120"/>
               </a:rPr>
               <a:t>全省庁・自治体の公費執行データ</a:t>
             </a:r>
@@ -11563,11 +11563,11 @@
             <a:r>
               <a:rPr lang="en-US" sz="1100" dirty="0">
                 <a:solidFill>
-                  <a:srgbClr val="CCCCCC"/>
-                </a:solidFill>
-                <a:latin typeface="Arial" pitchFamily="34" charset="0"/>
-                <a:ea typeface="Arial" pitchFamily="34" charset="-122"/>
-                <a:cs typeface="Arial" pitchFamily="34" charset="-120"/>
+                  <a:srgbClr val="2B2F36"/>
+                </a:solidFill>
+                <a:latin typeface="Arial" pitchFamily="34" charset="0"/>
+                <a:ea typeface="BIZ UDPGothic" pitchFamily="34" charset="-122"/>
+                <a:cs typeface="BIZ UDPGothic" pitchFamily="34" charset="-120"/>
               </a:rPr>
               <a:t>補助金・委託費の使途データ</a:t>
             </a:r>
@@ -11584,11 +11584,11 @@
             <a:r>
               <a:rPr lang="en-US" sz="1100" dirty="0">
                 <a:solidFill>
-                  <a:srgbClr val="CCCCCC"/>
-                </a:solidFill>
-                <a:latin typeface="Arial" pitchFamily="34" charset="0"/>
-                <a:ea typeface="Arial" pitchFamily="34" charset="-122"/>
-                <a:cs typeface="Arial" pitchFamily="34" charset="-120"/>
+                  <a:srgbClr val="2B2F36"/>
+                </a:solidFill>
+                <a:latin typeface="Arial" pitchFamily="34" charset="0"/>
+                <a:ea typeface="BIZ UDPGothic" pitchFamily="34" charset="-122"/>
+                <a:cs typeface="BIZ UDPGothic" pitchFamily="34" charset="-120"/>
               </a:rPr>
               <a:t>入札・契約・支払いの全記録</a:t>
             </a:r>
@@ -11613,11 +11613,11 @@
             </a:avLst>
           </a:prstGeom>
           <a:solidFill>
-            <a:srgbClr val="1A0808"/>
+            <a:srgbClr val="FCEBEB"/>
           </a:solidFill>
           <a:ln w="12700">
             <a:solidFill>
-              <a:srgbClr val="2E2E2E"/>
+              <a:srgbClr val="DDE0E6"/>
             </a:solidFill>
             <a:prstDash val="solid"/>
           </a:ln>
@@ -11650,11 +11650,11 @@
             <a:r>
               <a:rPr lang="en-US" sz="1300" b="1" dirty="0">
                 <a:solidFill>
-                  <a:srgbClr val="D62828"/>
-                </a:solidFill>
-                <a:latin typeface="Cambria" pitchFamily="34" charset="0"/>
-                <a:ea typeface="Cambria" pitchFamily="34" charset="-122"/>
-                <a:cs typeface="Cambria" pitchFamily="34" charset="-120"/>
+                  <a:srgbClr val="C8161D"/>
+                </a:solidFill>
+                <a:latin typeface="BIZ UDPGothic" pitchFamily="34" charset="0"/>
+                <a:ea typeface="BIZ UDPGothic" pitchFamily="34" charset="-122"/>
+                <a:cs typeface="BIZ UDPGothic" pitchFamily="34" charset="-120"/>
               </a:rPr>
               <a:t>例外（法律で厳格に列挙）</a:t>
             </a:r>
@@ -11693,11 +11693,11 @@
             <a:r>
               <a:rPr lang="en-US" sz="1100" dirty="0">
                 <a:solidFill>
-                  <a:srgbClr val="CCCCCC"/>
-                </a:solidFill>
-                <a:latin typeface="Arial" pitchFamily="34" charset="0"/>
-                <a:ea typeface="Arial" pitchFamily="34" charset="-122"/>
-                <a:cs typeface="Arial" pitchFamily="34" charset="-120"/>
+                  <a:srgbClr val="2B2F36"/>
+                </a:solidFill>
+                <a:latin typeface="Arial" pitchFamily="34" charset="0"/>
+                <a:ea typeface="BIZ UDPGothic" pitchFamily="34" charset="-122"/>
+                <a:cs typeface="BIZ UDPGothic" pitchFamily="34" charset="-120"/>
               </a:rPr>
               <a:t>捜査費</a:t>
             </a:r>
@@ -11714,11 +11714,11 @@
             <a:r>
               <a:rPr lang="en-US" sz="1100" dirty="0">
                 <a:solidFill>
-                  <a:srgbClr val="CCCCCC"/>
-                </a:solidFill>
-                <a:latin typeface="Arial" pitchFamily="34" charset="0"/>
-                <a:ea typeface="Arial" pitchFamily="34" charset="-122"/>
-                <a:cs typeface="Arial" pitchFamily="34" charset="-120"/>
+                  <a:srgbClr val="2B2F36"/>
+                </a:solidFill>
+                <a:latin typeface="Arial" pitchFamily="34" charset="0"/>
+                <a:ea typeface="BIZ UDPGothic" pitchFamily="34" charset="-122"/>
+                <a:cs typeface="BIZ UDPGothic" pitchFamily="34" charset="-120"/>
               </a:rPr>
               <a:t>外交機密の一部</a:t>
             </a:r>
@@ -11735,11 +11735,11 @@
             <a:r>
               <a:rPr lang="en-US" sz="1100" dirty="0">
                 <a:solidFill>
-                  <a:srgbClr val="CCCCCC"/>
-                </a:solidFill>
-                <a:latin typeface="Arial" pitchFamily="34" charset="0"/>
-                <a:ea typeface="Arial" pitchFamily="34" charset="-122"/>
-                <a:cs typeface="Arial" pitchFamily="34" charset="-120"/>
+                  <a:srgbClr val="2B2F36"/>
+                </a:solidFill>
+                <a:latin typeface="Arial" pitchFamily="34" charset="0"/>
+                <a:ea typeface="BIZ UDPGothic" pitchFamily="34" charset="-122"/>
+                <a:cs typeface="BIZ UDPGothic" pitchFamily="34" charset="-120"/>
               </a:rPr>
               <a:t>※例外の拡大解釈を許さないよう、例外規定の定義自体も法律で厳格に列挙する</a:t>
             </a:r>
@@ -11764,11 +11764,11 @@
             </a:avLst>
           </a:prstGeom>
           <a:solidFill>
-            <a:srgbClr val="141420"/>
+            <a:srgbClr val="E9EFF8"/>
           </a:solidFill>
           <a:ln w="12700">
             <a:solidFill>
-              <a:srgbClr val="2E2E2E"/>
+              <a:srgbClr val="DDE0E6"/>
             </a:solidFill>
             <a:prstDash val="solid"/>
           </a:ln>
@@ -11801,11 +11801,11 @@
             <a:r>
               <a:rPr lang="en-US" sz="1200" b="1" dirty="0">
                 <a:solidFill>
-                  <a:srgbClr val="4090D0"/>
-                </a:solidFill>
-                <a:latin typeface="Cambria" pitchFamily="34" charset="0"/>
-                <a:ea typeface="Cambria" pitchFamily="34" charset="-122"/>
-                <a:cs typeface="Cambria" pitchFamily="34" charset="-120"/>
+                  <a:srgbClr val="1D4F91"/>
+                </a:solidFill>
+                <a:latin typeface="BIZ UDPGothic" pitchFamily="34" charset="0"/>
+                <a:ea typeface="BIZ UDPGothic" pitchFamily="34" charset="-122"/>
+                <a:cs typeface="BIZ UDPGothic" pitchFamily="34" charset="-120"/>
               </a:rPr>
               <a:t>実現すること</a:t>
             </a:r>
@@ -11840,11 +11840,11 @@
             <a:r>
               <a:rPr lang="en-US" sz="1100" dirty="0">
                 <a:solidFill>
-                  <a:srgbClr val="CCCCCC"/>
-                </a:solidFill>
-                <a:latin typeface="Arial" pitchFamily="34" charset="0"/>
-                <a:ea typeface="Arial" pitchFamily="34" charset="-122"/>
-                <a:cs typeface="Arial" pitchFamily="34" charset="-120"/>
+                  <a:srgbClr val="2B2F36"/>
+                </a:solidFill>
+                <a:latin typeface="Arial" pitchFamily="34" charset="0"/>
+                <a:ea typeface="BIZ UDPGothic" pitchFamily="34" charset="-122"/>
+                <a:cs typeface="BIZ UDPGothic" pitchFamily="34" charset="-120"/>
               </a:rPr>
               <a:t>住民・メディア・AIによる相互監視を可能にする　　公費の異常値をAIが自動検知しアラートを発する</a:t>
             </a:r>
@@ -11866,7 +11866,7 @@
     <p:bg>
       <p:bgPr>
         <a:solidFill>
-          <a:srgbClr val="0A0A0A"/>
+          <a:srgbClr val="F5F6F8"/>
         </a:solidFill>
       </p:bgPr>
     </p:bg>
@@ -11911,11 +11911,11 @@
             <a:r>
               <a:rPr lang="en-US" sz="900" b="1" spc="400" kern="0" dirty="0">
                 <a:solidFill>
-                  <a:srgbClr val="D62828"/>
-                </a:solidFill>
-                <a:latin typeface="Arial" pitchFamily="34" charset="0"/>
-                <a:ea typeface="Arial" pitchFamily="34" charset="-122"/>
-                <a:cs typeface="Arial" pitchFamily="34" charset="-120"/>
+                  <a:srgbClr val="C8161D"/>
+                </a:solidFill>
+                <a:latin typeface="Arial" pitchFamily="34" charset="0"/>
+                <a:ea typeface="BIZ UDPGothic" pitchFamily="34" charset="-122"/>
+                <a:cs typeface="BIZ UDPGothic" pitchFamily="34" charset="-120"/>
               </a:rPr>
               <a:t>POLICY 03 — DESIGN</a:t>
             </a:r>
@@ -11950,11 +11950,11 @@
             <a:r>
               <a:rPr lang="en-US" sz="2400" b="1" dirty="0">
                 <a:solidFill>
-                  <a:srgbClr val="F5F5F0"/>
-                </a:solidFill>
-                <a:latin typeface="Cambria" pitchFamily="34" charset="0"/>
-                <a:ea typeface="Cambria" pitchFamily="34" charset="-122"/>
-                <a:cs typeface="Cambria" pitchFamily="34" charset="-120"/>
+                  <a:srgbClr val="16181D"/>
+                </a:solidFill>
+                <a:latin typeface="BIZ UDPGothic" pitchFamily="34" charset="0"/>
+                <a:ea typeface="BIZ UDPGothic" pitchFamily="34" charset="-122"/>
+                <a:cs typeface="BIZ UDPGothic" pitchFamily="34" charset="-120"/>
               </a:rPr>
               <a:t>内部統制システムと公開システムは「分離設計」が原則</a:t>
             </a:r>
@@ -11977,11 +11977,11 @@
             <a:avLst/>
           </a:prstGeom>
           <a:solidFill>
-            <a:srgbClr val="2E2E2E"/>
+            <a:srgbClr val="DDE0E6"/>
           </a:solidFill>
           <a:ln w="12700">
             <a:solidFill>
-              <a:srgbClr val="2E2E2E"/>
+              <a:srgbClr val="DDE0E6"/>
             </a:solidFill>
             <a:prstDash val="solid"/>
           </a:ln>
@@ -12014,11 +12014,11 @@
             <a:r>
               <a:rPr lang="en-US" sz="1100" dirty="0">
                 <a:solidFill>
-                  <a:srgbClr val="CCCCCC"/>
-                </a:solidFill>
-                <a:latin typeface="Arial" pitchFamily="34" charset="0"/>
-                <a:ea typeface="Arial" pitchFamily="34" charset="-122"/>
-                <a:cs typeface="Arial" pitchFamily="34" charset="-120"/>
+                  <a:srgbClr val="2B2F36"/>
+                </a:solidFill>
+                <a:latin typeface="Arial" pitchFamily="34" charset="0"/>
+                <a:ea typeface="BIZ UDPGothic" pitchFamily="34" charset="-122"/>
+                <a:cs typeface="BIZ UDPGothic" pitchFamily="34" charset="-120"/>
               </a:rPr>
               <a:t>執行管理（内部統制）と情報公開（外部公開）は、セキュリティ要件が根本的に異なる。同一システムで一括処理することは重大なリスクを生む。</a:t>
             </a:r>
@@ -12043,11 +12043,11 @@
             </a:avLst>
           </a:prstGeom>
           <a:solidFill>
-            <a:srgbClr val="08081A"/>
+            <a:srgbClr val="E9EFF8"/>
           </a:solidFill>
           <a:ln w="12700">
             <a:solidFill>
-              <a:srgbClr val="2E2E2E"/>
+              <a:srgbClr val="DDE0E6"/>
             </a:solidFill>
             <a:prstDash val="solid"/>
           </a:ln>
@@ -12080,11 +12080,11 @@
             <a:r>
               <a:rPr lang="en-US" sz="1500" b="1" dirty="0">
                 <a:solidFill>
-                  <a:srgbClr val="4090D0"/>
-                </a:solidFill>
-                <a:latin typeface="Cambria" pitchFamily="34" charset="0"/>
-                <a:ea typeface="Cambria" pitchFamily="34" charset="-122"/>
-                <a:cs typeface="Cambria" pitchFamily="34" charset="-120"/>
+                  <a:srgbClr val="1D4F91"/>
+                </a:solidFill>
+                <a:latin typeface="BIZ UDPGothic" pitchFamily="34" charset="0"/>
+                <a:ea typeface="BIZ UDPGothic" pitchFamily="34" charset="-122"/>
+                <a:cs typeface="BIZ UDPGothic" pitchFamily="34" charset="-120"/>
               </a:rPr>
               <a:t>内部統制</a:t>
             </a:r>
@@ -12097,11 +12097,11 @@
             <a:r>
               <a:rPr lang="en-US" sz="1500" b="1" dirty="0">
                 <a:solidFill>
-                  <a:srgbClr val="4090D0"/>
-                </a:solidFill>
-                <a:latin typeface="Cambria" pitchFamily="34" charset="0"/>
-                <a:ea typeface="Cambria" pitchFamily="34" charset="-122"/>
-                <a:cs typeface="Cambria" pitchFamily="34" charset="-120"/>
+                  <a:srgbClr val="1D4F91"/>
+                </a:solidFill>
+                <a:latin typeface="BIZ UDPGothic" pitchFamily="34" charset="0"/>
+                <a:ea typeface="BIZ UDPGothic" pitchFamily="34" charset="-122"/>
+                <a:cs typeface="BIZ UDPGothic" pitchFamily="34" charset="-120"/>
               </a:rPr>
               <a:t>システム</a:t>
             </a:r>
@@ -12124,11 +12124,11 @@
             <a:avLst/>
           </a:prstGeom>
           <a:solidFill>
-            <a:srgbClr val="2E2E2E"/>
+            <a:srgbClr val="DDE0E6"/>
           </a:solidFill>
           <a:ln w="12700">
             <a:solidFill>
-              <a:srgbClr val="2E2E2E"/>
+              <a:srgbClr val="DDE0E6"/>
             </a:solidFill>
             <a:prstDash val="solid"/>
           </a:ln>
@@ -12161,11 +12161,11 @@
             <a:r>
               <a:rPr lang="en-US" sz="1000" dirty="0">
                 <a:solidFill>
-                  <a:srgbClr val="CCCCCC"/>
-                </a:solidFill>
-                <a:latin typeface="Arial" pitchFamily="34" charset="0"/>
-                <a:ea typeface="Arial" pitchFamily="34" charset="-122"/>
-                <a:cs typeface="Arial" pitchFamily="34" charset="-120"/>
+                  <a:srgbClr val="2B2F36"/>
+                </a:solidFill>
+                <a:latin typeface="Arial" pitchFamily="34" charset="0"/>
+                <a:ea typeface="BIZ UDPGothic" pitchFamily="34" charset="-122"/>
+                <a:cs typeface="BIZ UDPGothic" pitchFamily="34" charset="-120"/>
               </a:rPr>
               <a:t>執行データを</a:t>
             </a:r>
@@ -12178,11 +12178,11 @@
             <a:r>
               <a:rPr lang="en-US" sz="1000" dirty="0">
                 <a:solidFill>
-                  <a:srgbClr val="CCCCCC"/>
-                </a:solidFill>
-                <a:latin typeface="Arial" pitchFamily="34" charset="0"/>
-                <a:ea typeface="Arial" pitchFamily="34" charset="-122"/>
-                <a:cs typeface="Arial" pitchFamily="34" charset="-120"/>
+                  <a:srgbClr val="2B2F36"/>
+                </a:solidFill>
+                <a:latin typeface="Arial" pitchFamily="34" charset="0"/>
+                <a:ea typeface="BIZ UDPGothic" pitchFamily="34" charset="-122"/>
+                <a:cs typeface="BIZ UDPGothic" pitchFamily="34" charset="-120"/>
               </a:rPr>
               <a:t>リアルタイム記録</a:t>
             </a:r>
@@ -12195,11 +12195,11 @@
             <a:r>
               <a:rPr lang="en-US" sz="1000" dirty="0">
                 <a:solidFill>
-                  <a:srgbClr val="CCCCCC"/>
-                </a:solidFill>
-                <a:latin typeface="Arial" pitchFamily="34" charset="0"/>
-                <a:ea typeface="Arial" pitchFamily="34" charset="-122"/>
-                <a:cs typeface="Arial" pitchFamily="34" charset="-120"/>
+                  <a:srgbClr val="2B2F36"/>
+                </a:solidFill>
+                <a:latin typeface="Arial" pitchFamily="34" charset="0"/>
+                <a:ea typeface="BIZ UDPGothic" pitchFamily="34" charset="-122"/>
+                <a:cs typeface="BIZ UDPGothic" pitchFamily="34" charset="-120"/>
               </a:rPr>
               <a:t>高セキュリティ・完全記録</a:t>
             </a:r>
@@ -12234,11 +12234,11 @@
             <a:r>
               <a:rPr lang="en-US" sz="2400" dirty="0">
                 <a:solidFill>
-                  <a:srgbClr val="D62828"/>
-                </a:solidFill>
-                <a:latin typeface="Arial" pitchFamily="34" charset="0"/>
-                <a:ea typeface="Arial" pitchFamily="34" charset="-122"/>
-                <a:cs typeface="Arial" pitchFamily="34" charset="-120"/>
+                  <a:srgbClr val="C8161D"/>
+                </a:solidFill>
+                <a:latin typeface="Arial" pitchFamily="34" charset="0"/>
+                <a:ea typeface="BIZ UDPGothic" pitchFamily="34" charset="-122"/>
+                <a:cs typeface="BIZ UDPGothic" pitchFamily="34" charset="-120"/>
               </a:rPr>
               <a:t>→</a:t>
             </a:r>
@@ -12263,11 +12263,11 @@
             </a:avLst>
           </a:prstGeom>
           <a:solidFill>
-            <a:srgbClr val="141414"/>
+            <a:srgbClr val="FFFFFF"/>
           </a:solidFill>
           <a:ln w="12700">
             <a:solidFill>
-              <a:srgbClr val="2E2E2E"/>
+              <a:srgbClr val="DDE0E6"/>
             </a:solidFill>
             <a:prstDash val="solid"/>
           </a:ln>
@@ -12300,11 +12300,11 @@
             <a:r>
               <a:rPr lang="en-US" sz="1500" b="1" dirty="0">
                 <a:solidFill>
-                  <a:srgbClr val="888888"/>
-                </a:solidFill>
-                <a:latin typeface="Cambria" pitchFamily="34" charset="0"/>
-                <a:ea typeface="Cambria" pitchFamily="34" charset="-122"/>
-                <a:cs typeface="Cambria" pitchFamily="34" charset="-120"/>
+                  <a:srgbClr val="626875"/>
+                </a:solidFill>
+                <a:latin typeface="BIZ UDPGothic" pitchFamily="34" charset="0"/>
+                <a:ea typeface="BIZ UDPGothic" pitchFamily="34" charset="-122"/>
+                <a:cs typeface="BIZ UDPGothic" pitchFamily="34" charset="-120"/>
               </a:rPr>
               <a:t>マスキング・</a:t>
             </a:r>
@@ -12317,11 +12317,11 @@
             <a:r>
               <a:rPr lang="en-US" sz="1500" b="1" dirty="0">
                 <a:solidFill>
-                  <a:srgbClr val="888888"/>
-                </a:solidFill>
-                <a:latin typeface="Cambria" pitchFamily="34" charset="0"/>
-                <a:ea typeface="Cambria" pitchFamily="34" charset="-122"/>
-                <a:cs typeface="Cambria" pitchFamily="34" charset="-120"/>
+                  <a:srgbClr val="626875"/>
+                </a:solidFill>
+                <a:latin typeface="BIZ UDPGothic" pitchFamily="34" charset="0"/>
+                <a:ea typeface="BIZ UDPGothic" pitchFamily="34" charset="-122"/>
+                <a:cs typeface="BIZ UDPGothic" pitchFamily="34" charset="-120"/>
               </a:rPr>
               <a:t>匿名化処理</a:t>
             </a:r>
@@ -12344,11 +12344,11 @@
             <a:avLst/>
           </a:prstGeom>
           <a:solidFill>
-            <a:srgbClr val="2E2E2E"/>
+            <a:srgbClr val="DDE0E6"/>
           </a:solidFill>
           <a:ln w="12700">
             <a:solidFill>
-              <a:srgbClr val="2E2E2E"/>
+              <a:srgbClr val="DDE0E6"/>
             </a:solidFill>
             <a:prstDash val="solid"/>
           </a:ln>
@@ -12381,11 +12381,11 @@
             <a:r>
               <a:rPr lang="en-US" sz="1000" dirty="0">
                 <a:solidFill>
-                  <a:srgbClr val="CCCCCC"/>
-                </a:solidFill>
-                <a:latin typeface="Arial" pitchFamily="34" charset="0"/>
-                <a:ea typeface="Arial" pitchFamily="34" charset="-122"/>
-                <a:cs typeface="Arial" pitchFamily="34" charset="-120"/>
+                  <a:srgbClr val="2B2F36"/>
+                </a:solidFill>
+                <a:latin typeface="Arial" pitchFamily="34" charset="0"/>
+                <a:ea typeface="BIZ UDPGothic" pitchFamily="34" charset="-122"/>
+                <a:cs typeface="BIZ UDPGothic" pitchFamily="34" charset="-120"/>
               </a:rPr>
               <a:t>個人情報除去</a:t>
             </a:r>
@@ -12398,11 +12398,11 @@
             <a:r>
               <a:rPr lang="en-US" sz="1000" dirty="0">
                 <a:solidFill>
-                  <a:srgbClr val="CCCCCC"/>
-                </a:solidFill>
-                <a:latin typeface="Arial" pitchFamily="34" charset="0"/>
-                <a:ea typeface="Arial" pitchFamily="34" charset="-122"/>
-                <a:cs typeface="Arial" pitchFamily="34" charset="-120"/>
+                  <a:srgbClr val="2B2F36"/>
+                </a:solidFill>
+                <a:latin typeface="Arial" pitchFamily="34" charset="0"/>
+                <a:ea typeface="BIZ UDPGothic" pitchFamily="34" charset="-122"/>
+                <a:cs typeface="BIZ UDPGothic" pitchFamily="34" charset="-120"/>
               </a:rPr>
               <a:t>プライバシー保護</a:t>
             </a:r>
@@ -12415,11 +12415,11 @@
             <a:r>
               <a:rPr lang="en-US" sz="1000" dirty="0">
                 <a:solidFill>
-                  <a:srgbClr val="CCCCCC"/>
-                </a:solidFill>
-                <a:latin typeface="Arial" pitchFamily="34" charset="0"/>
-                <a:ea typeface="Arial" pitchFamily="34" charset="-122"/>
-                <a:cs typeface="Arial" pitchFamily="34" charset="-120"/>
+                  <a:srgbClr val="2B2F36"/>
+                </a:solidFill>
+                <a:latin typeface="Arial" pitchFamily="34" charset="0"/>
+                <a:ea typeface="BIZ UDPGothic" pitchFamily="34" charset="-122"/>
+                <a:cs typeface="BIZ UDPGothic" pitchFamily="34" charset="-120"/>
               </a:rPr>
               <a:t>例外データの除外</a:t>
             </a:r>
@@ -12454,11 +12454,11 @@
             <a:r>
               <a:rPr lang="en-US" sz="2400" dirty="0">
                 <a:solidFill>
-                  <a:srgbClr val="D62828"/>
-                </a:solidFill>
-                <a:latin typeface="Arial" pitchFamily="34" charset="0"/>
-                <a:ea typeface="Arial" pitchFamily="34" charset="-122"/>
-                <a:cs typeface="Arial" pitchFamily="34" charset="-120"/>
+                  <a:srgbClr val="C8161D"/>
+                </a:solidFill>
+                <a:latin typeface="Arial" pitchFamily="34" charset="0"/>
+                <a:ea typeface="BIZ UDPGothic" pitchFamily="34" charset="-122"/>
+                <a:cs typeface="BIZ UDPGothic" pitchFamily="34" charset="-120"/>
               </a:rPr>
               <a:t>→</a:t>
             </a:r>
@@ -12483,11 +12483,11 @@
             </a:avLst>
           </a:prstGeom>
           <a:solidFill>
-            <a:srgbClr val="081808"/>
+            <a:srgbClr val="E9EFF8"/>
           </a:solidFill>
           <a:ln w="12700">
             <a:solidFill>
-              <a:srgbClr val="2E2E2E"/>
+              <a:srgbClr val="DDE0E6"/>
             </a:solidFill>
             <a:prstDash val="solid"/>
           </a:ln>
@@ -12520,11 +12520,11 @@
             <a:r>
               <a:rPr lang="en-US" sz="1500" b="1" dirty="0">
                 <a:solidFill>
-                  <a:srgbClr val="4CAF50"/>
-                </a:solidFill>
-                <a:latin typeface="Cambria" pitchFamily="34" charset="0"/>
-                <a:ea typeface="Cambria" pitchFamily="34" charset="-122"/>
-                <a:cs typeface="Cambria" pitchFamily="34" charset="-120"/>
+                  <a:srgbClr val="1D4F91"/>
+                </a:solidFill>
+                <a:latin typeface="BIZ UDPGothic" pitchFamily="34" charset="0"/>
+                <a:ea typeface="BIZ UDPGothic" pitchFamily="34" charset="-122"/>
+                <a:cs typeface="BIZ UDPGothic" pitchFamily="34" charset="-120"/>
               </a:rPr>
               <a:t>公開</a:t>
             </a:r>
@@ -12537,11 +12537,11 @@
             <a:r>
               <a:rPr lang="en-US" sz="1500" b="1" dirty="0">
                 <a:solidFill>
-                  <a:srgbClr val="4CAF50"/>
-                </a:solidFill>
-                <a:latin typeface="Cambria" pitchFamily="34" charset="0"/>
-                <a:ea typeface="Cambria" pitchFamily="34" charset="-122"/>
-                <a:cs typeface="Cambria" pitchFamily="34" charset="-120"/>
+                  <a:srgbClr val="1D4F91"/>
+                </a:solidFill>
+                <a:latin typeface="BIZ UDPGothic" pitchFamily="34" charset="0"/>
+                <a:ea typeface="BIZ UDPGothic" pitchFamily="34" charset="-122"/>
+                <a:cs typeface="BIZ UDPGothic" pitchFamily="34" charset="-120"/>
               </a:rPr>
               <a:t>システム</a:t>
             </a:r>
@@ -12564,11 +12564,11 @@
             <a:avLst/>
           </a:prstGeom>
           <a:solidFill>
-            <a:srgbClr val="2E2E2E"/>
+            <a:srgbClr val="DDE0E6"/>
           </a:solidFill>
           <a:ln w="12700">
             <a:solidFill>
-              <a:srgbClr val="2E2E2E"/>
+              <a:srgbClr val="DDE0E6"/>
             </a:solidFill>
             <a:prstDash val="solid"/>
           </a:ln>
@@ -12601,11 +12601,11 @@
             <a:r>
               <a:rPr lang="en-US" sz="1000" dirty="0">
                 <a:solidFill>
-                  <a:srgbClr val="CCCCCC"/>
-                </a:solidFill>
-                <a:latin typeface="Arial" pitchFamily="34" charset="0"/>
-                <a:ea typeface="Arial" pitchFamily="34" charset="-122"/>
-                <a:cs typeface="Arial" pitchFamily="34" charset="-120"/>
+                  <a:srgbClr val="2B2F36"/>
+                </a:solidFill>
+                <a:latin typeface="Arial" pitchFamily="34" charset="0"/>
+                <a:ea typeface="BIZ UDPGothic" pitchFamily="34" charset="-122"/>
+                <a:cs typeface="BIZ UDPGothic" pitchFamily="34" charset="-120"/>
               </a:rPr>
               <a:t>国民向けWeb公開</a:t>
             </a:r>
@@ -12618,11 +12618,11 @@
             <a:r>
               <a:rPr lang="en-US" sz="1000" dirty="0">
                 <a:solidFill>
-                  <a:srgbClr val="CCCCCC"/>
-                </a:solidFill>
-                <a:latin typeface="Arial" pitchFamily="34" charset="0"/>
-                <a:ea typeface="Arial" pitchFamily="34" charset="-122"/>
-                <a:cs typeface="Arial" pitchFamily="34" charset="-120"/>
+                  <a:srgbClr val="2B2F36"/>
+                </a:solidFill>
+                <a:latin typeface="Arial" pitchFamily="34" charset="0"/>
+                <a:ea typeface="BIZ UDPGothic" pitchFamily="34" charset="-122"/>
+                <a:cs typeface="BIZ UDPGothic" pitchFamily="34" charset="-120"/>
               </a:rPr>
               <a:t>匿名化済みデータのみ</a:t>
             </a:r>
@@ -12635,11 +12635,11 @@
             <a:r>
               <a:rPr lang="en-US" sz="1000" dirty="0">
                 <a:solidFill>
-                  <a:srgbClr val="CCCCCC"/>
-                </a:solidFill>
-                <a:latin typeface="Arial" pitchFamily="34" charset="0"/>
-                <a:ea typeface="Arial" pitchFamily="34" charset="-122"/>
-                <a:cs typeface="Arial" pitchFamily="34" charset="-120"/>
+                  <a:srgbClr val="2B2F36"/>
+                </a:solidFill>
+                <a:latin typeface="Arial" pitchFamily="34" charset="0"/>
+                <a:ea typeface="BIZ UDPGothic" pitchFamily="34" charset="-122"/>
+                <a:cs typeface="BIZ UDPGothic" pitchFamily="34" charset="-120"/>
               </a:rPr>
               <a:t>AI監視・検索可能</a:t>
             </a:r>
@@ -12664,11 +12664,11 @@
             </a:avLst>
           </a:prstGeom>
           <a:solidFill>
-            <a:srgbClr val="1A1A1A"/>
+            <a:srgbClr val="FFFFFF"/>
           </a:solidFill>
           <a:ln w="12700">
             <a:solidFill>
-              <a:srgbClr val="2E2E2E"/>
+              <a:srgbClr val="DDE0E6"/>
             </a:solidFill>
             <a:prstDash val="solid"/>
           </a:ln>
@@ -12701,11 +12701,11 @@
             <a:r>
               <a:rPr lang="en-US" sz="1000" dirty="0">
                 <a:solidFill>
-                  <a:srgbClr val="CCCCCC"/>
-                </a:solidFill>
-                <a:latin typeface="Arial" pitchFamily="34" charset="0"/>
-                <a:ea typeface="Arial" pitchFamily="34" charset="-122"/>
-                <a:cs typeface="Arial" pitchFamily="34" charset="-120"/>
+                  <a:srgbClr val="2B2F36"/>
+                </a:solidFill>
+                <a:latin typeface="Arial" pitchFamily="34" charset="0"/>
+                <a:ea typeface="BIZ UDPGothic" pitchFamily="34" charset="-122"/>
+                <a:cs typeface="BIZ UDPGothic" pitchFamily="34" charset="-120"/>
               </a:rPr>
               <a:t>公開側に流れるのはマスキング・匿名化処理済みのデータのみ。内部の生データへのアクセスは厳格な権限管理のもとで監査目的に限定する。</a:t>
             </a:r>
@@ -12727,7 +12727,7 @@
     <p:bg>
       <p:bgPr>
         <a:solidFill>
-          <a:srgbClr val="0A0A0A"/>
+          <a:srgbClr val="F5F6F8"/>
         </a:solidFill>
       </p:bgPr>
     </p:bg>
@@ -12772,11 +12772,11 @@
             <a:r>
               <a:rPr lang="en-US" sz="900" b="1" spc="400" kern="0" dirty="0">
                 <a:solidFill>
-                  <a:srgbClr val="D62828"/>
-                </a:solidFill>
-                <a:latin typeface="Arial" pitchFamily="34" charset="0"/>
-                <a:ea typeface="Arial" pitchFamily="34" charset="-122"/>
-                <a:cs typeface="Arial" pitchFamily="34" charset="-120"/>
+                  <a:srgbClr val="C8161D"/>
+                </a:solidFill>
+                <a:latin typeface="Arial" pitchFamily="34" charset="0"/>
+                <a:ea typeface="BIZ UDPGothic" pitchFamily="34" charset="-122"/>
+                <a:cs typeface="BIZ UDPGothic" pitchFamily="34" charset="-120"/>
               </a:rPr>
               <a:t>POLICY 04</a:t>
             </a:r>
@@ -12811,11 +12811,11 @@
             <a:r>
               <a:rPr lang="en-US" sz="2800" b="1" dirty="0">
                 <a:solidFill>
-                  <a:srgbClr val="F5F5F0"/>
-                </a:solidFill>
-                <a:latin typeface="Cambria" pitchFamily="34" charset="0"/>
-                <a:ea typeface="Cambria" pitchFamily="34" charset="-122"/>
-                <a:cs typeface="Cambria" pitchFamily="34" charset="-120"/>
+                  <a:srgbClr val="16181D"/>
+                </a:solidFill>
+                <a:latin typeface="BIZ UDPGothic" pitchFamily="34" charset="0"/>
+                <a:ea typeface="BIZ UDPGothic" pitchFamily="34" charset="-122"/>
+                <a:cs typeface="BIZ UDPGothic" pitchFamily="34" charset="-120"/>
               </a:rPr>
               <a:t>補助金・委託費の「エンドツーエンド（E2E）」追跡</a:t>
             </a:r>
@@ -12838,11 +12838,11 @@
             <a:avLst/>
           </a:prstGeom>
           <a:solidFill>
-            <a:srgbClr val="2E2E2E"/>
+            <a:srgbClr val="DDE0E6"/>
           </a:solidFill>
           <a:ln w="12700">
             <a:solidFill>
-              <a:srgbClr val="2E2E2E"/>
+              <a:srgbClr val="DDE0E6"/>
             </a:solidFill>
             <a:prstDash val="solid"/>
           </a:ln>
@@ -12875,11 +12875,11 @@
             <a:r>
               <a:rPr lang="en-US" sz="1100" dirty="0">
                 <a:solidFill>
-                  <a:srgbClr val="CCCCCC"/>
-                </a:solidFill>
-                <a:latin typeface="Arial" pitchFamily="34" charset="0"/>
-                <a:ea typeface="Arial" pitchFamily="34" charset="-122"/>
-                <a:cs typeface="Arial" pitchFamily="34" charset="-120"/>
+                  <a:srgbClr val="2B2F36"/>
+                </a:solidFill>
+                <a:latin typeface="Arial" pitchFamily="34" charset="0"/>
+                <a:ea typeface="BIZ UDPGothic" pitchFamily="34" charset="-122"/>
+                <a:cs typeface="BIZ UDPGothic" pitchFamily="34" charset="-120"/>
               </a:rPr>
               <a:t>補助金・委託費も同じ共通システム上での管理・執行を「支給の絶対条件」とする。</a:t>
             </a:r>
@@ -12904,11 +12904,11 @@
             </a:avLst>
           </a:prstGeom>
           <a:solidFill>
-            <a:srgbClr val="08081A"/>
+            <a:srgbClr val="E9EFF8"/>
           </a:solidFill>
           <a:ln w="12700">
             <a:solidFill>
-              <a:srgbClr val="2E2E2E"/>
+              <a:srgbClr val="DDE0E6"/>
             </a:solidFill>
             <a:prstDash val="solid"/>
           </a:ln>
@@ -12941,11 +12941,11 @@
             <a:r>
               <a:rPr lang="en-US" sz="1200" dirty="0">
                 <a:solidFill>
-                  <a:srgbClr val="F5F5F0"/>
-                </a:solidFill>
-                <a:latin typeface="Arial" pitchFamily="34" charset="0"/>
-                <a:ea typeface="Arial" pitchFamily="34" charset="-122"/>
-                <a:cs typeface="Arial" pitchFamily="34" charset="-120"/>
+                  <a:srgbClr val="16181D"/>
+                </a:solidFill>
+                <a:latin typeface="Arial" pitchFamily="34" charset="0"/>
+                <a:ea typeface="BIZ UDPGothic" pitchFamily="34" charset="-122"/>
+                <a:cs typeface="BIZ UDPGothic" pitchFamily="34" charset="-120"/>
               </a:rPr>
               <a:t>国・自治体</a:t>
             </a:r>
@@ -12980,11 +12980,11 @@
             <a:r>
               <a:rPr lang="en-US" sz="2000" dirty="0">
                 <a:solidFill>
-                  <a:srgbClr val="D62828"/>
-                </a:solidFill>
-                <a:latin typeface="Arial" pitchFamily="34" charset="0"/>
-                <a:ea typeface="Arial" pitchFamily="34" charset="-122"/>
-                <a:cs typeface="Arial" pitchFamily="34" charset="-120"/>
+                  <a:srgbClr val="C8161D"/>
+                </a:solidFill>
+                <a:latin typeface="Arial" pitchFamily="34" charset="0"/>
+                <a:ea typeface="BIZ UDPGothic" pitchFamily="34" charset="-122"/>
+                <a:cs typeface="BIZ UDPGothic" pitchFamily="34" charset="-120"/>
               </a:rPr>
               <a:t>→</a:t>
             </a:r>
@@ -13009,11 +13009,11 @@
             </a:avLst>
           </a:prstGeom>
           <a:solidFill>
-            <a:srgbClr val="141414"/>
+            <a:srgbClr val="FFFFFF"/>
           </a:solidFill>
           <a:ln w="12700">
             <a:solidFill>
-              <a:srgbClr val="2E2E2E"/>
+              <a:srgbClr val="DDE0E6"/>
             </a:solidFill>
             <a:prstDash val="solid"/>
           </a:ln>
@@ -13046,11 +13046,11 @@
             <a:r>
               <a:rPr lang="en-US" sz="1200" dirty="0">
                 <a:solidFill>
-                  <a:srgbClr val="F5F5F0"/>
-                </a:solidFill>
-                <a:latin typeface="Arial" pitchFamily="34" charset="0"/>
-                <a:ea typeface="Arial" pitchFamily="34" charset="-122"/>
-                <a:cs typeface="Arial" pitchFamily="34" charset="-120"/>
+                  <a:srgbClr val="16181D"/>
+                </a:solidFill>
+                <a:latin typeface="Arial" pitchFamily="34" charset="0"/>
+                <a:ea typeface="BIZ UDPGothic" pitchFamily="34" charset="-122"/>
+                <a:cs typeface="BIZ UDPGothic" pitchFamily="34" charset="-120"/>
               </a:rPr>
               <a:t>民間企業</a:t>
             </a:r>
@@ -13063,11 +13063,11 @@
             <a:r>
               <a:rPr lang="en-US" sz="1200" dirty="0">
                 <a:solidFill>
-                  <a:srgbClr val="F5F5F0"/>
-                </a:solidFill>
-                <a:latin typeface="Arial" pitchFamily="34" charset="0"/>
-                <a:ea typeface="Arial" pitchFamily="34" charset="-122"/>
-                <a:cs typeface="Arial" pitchFamily="34" charset="-120"/>
+                  <a:srgbClr val="16181D"/>
+                </a:solidFill>
+                <a:latin typeface="Arial" pitchFamily="34" charset="0"/>
+                <a:ea typeface="BIZ UDPGothic" pitchFamily="34" charset="-122"/>
+                <a:cs typeface="BIZ UDPGothic" pitchFamily="34" charset="-120"/>
               </a:rPr>
               <a:t>NPO・外郭団体</a:t>
             </a:r>
@@ -13102,11 +13102,11 @@
             <a:r>
               <a:rPr lang="en-US" sz="2000" dirty="0">
                 <a:solidFill>
-                  <a:srgbClr val="D62828"/>
-                </a:solidFill>
-                <a:latin typeface="Arial" pitchFamily="34" charset="0"/>
-                <a:ea typeface="Arial" pitchFamily="34" charset="-122"/>
-                <a:cs typeface="Arial" pitchFamily="34" charset="-120"/>
+                  <a:srgbClr val="C8161D"/>
+                </a:solidFill>
+                <a:latin typeface="Arial" pitchFamily="34" charset="0"/>
+                <a:ea typeface="BIZ UDPGothic" pitchFamily="34" charset="-122"/>
+                <a:cs typeface="BIZ UDPGothic" pitchFamily="34" charset="-120"/>
               </a:rPr>
               <a:t>→</a:t>
             </a:r>
@@ -13131,11 +13131,11 @@
             </a:avLst>
           </a:prstGeom>
           <a:solidFill>
-            <a:srgbClr val="141420"/>
+            <a:srgbClr val="E9EFF8"/>
           </a:solidFill>
           <a:ln w="12700">
             <a:solidFill>
-              <a:srgbClr val="2E2E2E"/>
+              <a:srgbClr val="DDE0E6"/>
             </a:solidFill>
             <a:prstDash val="solid"/>
           </a:ln>
@@ -13168,11 +13168,11 @@
             <a:r>
               <a:rPr lang="en-US" sz="1200" dirty="0">
                 <a:solidFill>
-                  <a:srgbClr val="F5F5F0"/>
-                </a:solidFill>
-                <a:latin typeface="Arial" pitchFamily="34" charset="0"/>
-                <a:ea typeface="Arial" pitchFamily="34" charset="-122"/>
-                <a:cs typeface="Arial" pitchFamily="34" charset="-120"/>
+                  <a:srgbClr val="16181D"/>
+                </a:solidFill>
+                <a:latin typeface="Arial" pitchFamily="34" charset="0"/>
+                <a:ea typeface="BIZ UDPGothic" pitchFamily="34" charset="-122"/>
+                <a:cs typeface="BIZ UDPGothic" pitchFamily="34" charset="-120"/>
               </a:rPr>
               <a:t>共通システム上</a:t>
             </a:r>
@@ -13185,11 +13185,11 @@
             <a:r>
               <a:rPr lang="en-US" sz="1200" dirty="0">
                 <a:solidFill>
-                  <a:srgbClr val="F5F5F0"/>
-                </a:solidFill>
-                <a:latin typeface="Arial" pitchFamily="34" charset="0"/>
-                <a:ea typeface="Arial" pitchFamily="34" charset="-122"/>
-                <a:cs typeface="Arial" pitchFamily="34" charset="-120"/>
+                  <a:srgbClr val="16181D"/>
+                </a:solidFill>
+                <a:latin typeface="Arial" pitchFamily="34" charset="0"/>
+                <a:ea typeface="BIZ UDPGothic" pitchFamily="34" charset="-122"/>
+                <a:cs typeface="BIZ UDPGothic" pitchFamily="34" charset="-120"/>
               </a:rPr>
               <a:t>で使途を管理</a:t>
             </a:r>
@@ -13224,11 +13224,11 @@
             <a:r>
               <a:rPr lang="en-US" sz="2000" dirty="0">
                 <a:solidFill>
-                  <a:srgbClr val="D62828"/>
-                </a:solidFill>
-                <a:latin typeface="Arial" pitchFamily="34" charset="0"/>
-                <a:ea typeface="Arial" pitchFamily="34" charset="-122"/>
-                <a:cs typeface="Arial" pitchFamily="34" charset="-120"/>
+                  <a:srgbClr val="C8161D"/>
+                </a:solidFill>
+                <a:latin typeface="Arial" pitchFamily="34" charset="0"/>
+                <a:ea typeface="BIZ UDPGothic" pitchFamily="34" charset="-122"/>
+                <a:cs typeface="BIZ UDPGothic" pitchFamily="34" charset="-120"/>
               </a:rPr>
               <a:t>→</a:t>
             </a:r>
@@ -13253,11 +13253,11 @@
             </a:avLst>
           </a:prstGeom>
           <a:solidFill>
-            <a:srgbClr val="081808"/>
+            <a:srgbClr val="E9EFF8"/>
           </a:solidFill>
           <a:ln w="12700">
             <a:solidFill>
-              <a:srgbClr val="2E2E2E"/>
+              <a:srgbClr val="DDE0E6"/>
             </a:solidFill>
             <a:prstDash val="solid"/>
           </a:ln>
@@ -13290,11 +13290,11 @@
             <a:r>
               <a:rPr lang="en-US" sz="1200" dirty="0">
                 <a:solidFill>
-                  <a:srgbClr val="F5F5F0"/>
-                </a:solidFill>
-                <a:latin typeface="Arial" pitchFamily="34" charset="0"/>
-                <a:ea typeface="Arial" pitchFamily="34" charset="-122"/>
-                <a:cs typeface="Arial" pitchFamily="34" charset="-120"/>
+                  <a:srgbClr val="16181D"/>
+                </a:solidFill>
+                <a:latin typeface="Arial" pitchFamily="34" charset="0"/>
+                <a:ea typeface="BIZ UDPGothic" pitchFamily="34" charset="-122"/>
+                <a:cs typeface="BIZ UDPGothic" pitchFamily="34" charset="-120"/>
               </a:rPr>
               <a:t>目的外支出・</a:t>
             </a:r>
@@ -13307,11 +13307,11 @@
             <a:r>
               <a:rPr lang="en-US" sz="1200" dirty="0">
                 <a:solidFill>
-                  <a:srgbClr val="F5F5F0"/>
-                </a:solidFill>
-                <a:latin typeface="Arial" pitchFamily="34" charset="0"/>
-                <a:ea typeface="Arial" pitchFamily="34" charset="-122"/>
-                <a:cs typeface="Arial" pitchFamily="34" charset="-120"/>
+                  <a:srgbClr val="16181D"/>
+                </a:solidFill>
+                <a:latin typeface="Arial" pitchFamily="34" charset="0"/>
+                <a:ea typeface="BIZ UDPGothic" pitchFamily="34" charset="-122"/>
+                <a:cs typeface="BIZ UDPGothic" pitchFamily="34" charset="-120"/>
               </a:rPr>
               <a:t>中抜きを</a:t>
             </a:r>
@@ -13324,11 +13324,11 @@
             <a:r>
               <a:rPr lang="en-US" sz="1200" dirty="0">
                 <a:solidFill>
-                  <a:srgbClr val="F5F5F0"/>
-                </a:solidFill>
-                <a:latin typeface="Arial" pitchFamily="34" charset="0"/>
-                <a:ea typeface="Arial" pitchFamily="34" charset="-122"/>
-                <a:cs typeface="Arial" pitchFamily="34" charset="-120"/>
+                  <a:srgbClr val="16181D"/>
+                </a:solidFill>
+                <a:latin typeface="Arial" pitchFamily="34" charset="0"/>
+                <a:ea typeface="BIZ UDPGothic" pitchFamily="34" charset="-122"/>
+                <a:cs typeface="BIZ UDPGothic" pitchFamily="34" charset="-120"/>
               </a:rPr>
               <a:t>完全追跡</a:t>
             </a:r>
@@ -13353,11 +13353,11 @@
             </a:avLst>
           </a:prstGeom>
           <a:solidFill>
-            <a:srgbClr val="1A1A1A"/>
+            <a:srgbClr val="FFFFFF"/>
           </a:solidFill>
           <a:ln w="12700">
             <a:solidFill>
-              <a:srgbClr val="2E2E2E"/>
+              <a:srgbClr val="DDE0E6"/>
             </a:solidFill>
             <a:prstDash val="solid"/>
           </a:ln>
@@ -13390,11 +13390,11 @@
             <a:r>
               <a:rPr lang="en-US" sz="1200" b="1" dirty="0">
                 <a:solidFill>
-                  <a:srgbClr val="D62828"/>
-                </a:solidFill>
-                <a:latin typeface="Cambria" pitchFamily="34" charset="0"/>
-                <a:ea typeface="Cambria" pitchFamily="34" charset="-122"/>
-                <a:cs typeface="Cambria" pitchFamily="34" charset="-120"/>
+                  <a:srgbClr val="C8161D"/>
+                </a:solidFill>
+                <a:latin typeface="BIZ UDPGothic" pitchFamily="34" charset="0"/>
+                <a:ea typeface="BIZ UDPGothic" pitchFamily="34" charset="-122"/>
+                <a:cs typeface="BIZ UDPGothic" pitchFamily="34" charset="-120"/>
               </a:rPr>
               <a:t>中間搾取の根絶</a:t>
             </a:r>
@@ -13429,11 +13429,11 @@
             <a:r>
               <a:rPr lang="en-US" sz="1100" dirty="0">
                 <a:solidFill>
-                  <a:srgbClr val="CCCCCC"/>
-                </a:solidFill>
-                <a:latin typeface="Arial" pitchFamily="34" charset="0"/>
-                <a:ea typeface="Arial" pitchFamily="34" charset="-122"/>
-                <a:cs typeface="Arial" pitchFamily="34" charset="-120"/>
+                  <a:srgbClr val="2B2F36"/>
+                </a:solidFill>
+                <a:latin typeface="Arial" pitchFamily="34" charset="0"/>
+                <a:ea typeface="BIZ UDPGothic" pitchFamily="34" charset="-122"/>
+                <a:cs typeface="BIZ UDPGothic" pitchFamily="34" charset="-120"/>
               </a:rPr>
               <a:t>いわゆる「中抜き」を完全にトラッキング可能にする。補助金が誰のポケットに入っているかが一目瞭然になる</a:t>
             </a:r>
@@ -13458,11 +13458,11 @@
             </a:avLst>
           </a:prstGeom>
           <a:solidFill>
-            <a:srgbClr val="1A1A1A"/>
+            <a:srgbClr val="FFFFFF"/>
           </a:solidFill>
           <a:ln w="12700">
             <a:solidFill>
-              <a:srgbClr val="2E2E2E"/>
+              <a:srgbClr val="DDE0E6"/>
             </a:solidFill>
             <a:prstDash val="solid"/>
           </a:ln>
@@ -13495,11 +13495,11 @@
             <a:r>
               <a:rPr lang="en-US" sz="1200" b="1" dirty="0">
                 <a:solidFill>
-                  <a:srgbClr val="D62828"/>
-                </a:solidFill>
-                <a:latin typeface="Cambria" pitchFamily="34" charset="0"/>
-                <a:ea typeface="Cambria" pitchFamily="34" charset="-122"/>
-                <a:cs typeface="Cambria" pitchFamily="34" charset="-120"/>
+                  <a:srgbClr val="C8161D"/>
+                </a:solidFill>
+                <a:latin typeface="BIZ UDPGothic" pitchFamily="34" charset="0"/>
+                <a:ea typeface="BIZ UDPGothic" pitchFamily="34" charset="-122"/>
+                <a:cs typeface="BIZ UDPGothic" pitchFamily="34" charset="-120"/>
               </a:rPr>
               <a:t>目的外支出の防止</a:t>
             </a:r>
@@ -13534,11 +13534,11 @@
             <a:r>
               <a:rPr lang="en-US" sz="1100" dirty="0">
                 <a:solidFill>
-                  <a:srgbClr val="CCCCCC"/>
-                </a:solidFill>
-                <a:latin typeface="Arial" pitchFamily="34" charset="0"/>
-                <a:ea typeface="Arial" pitchFamily="34" charset="-122"/>
-                <a:cs typeface="Arial" pitchFamily="34" charset="-120"/>
+                  <a:srgbClr val="2B2F36"/>
+                </a:solidFill>
+                <a:latin typeface="Arial" pitchFamily="34" charset="0"/>
+                <a:ea typeface="BIZ UDPGothic" pitchFamily="34" charset="-122"/>
+                <a:cs typeface="BIZ UDPGothic" pitchFamily="34" charset="-120"/>
               </a:rPr>
               <a:t>補助金の使途が契約目的から外れた場合、システムが即時アラートを発し、支払いをブロックする</a:t>
             </a:r>
@@ -13563,11 +13563,11 @@
             </a:avLst>
           </a:prstGeom>
           <a:solidFill>
-            <a:srgbClr val="1A1A1A"/>
+            <a:srgbClr val="FFFFFF"/>
           </a:solidFill>
           <a:ln w="12700">
             <a:solidFill>
-              <a:srgbClr val="2E2E2E"/>
+              <a:srgbClr val="DDE0E6"/>
             </a:solidFill>
             <a:prstDash val="solid"/>
           </a:ln>
@@ -13600,11 +13600,11 @@
             <a:r>
               <a:rPr lang="en-US" sz="1200" b="1" dirty="0">
                 <a:solidFill>
-                  <a:srgbClr val="D62828"/>
-                </a:solidFill>
-                <a:latin typeface="Cambria" pitchFamily="34" charset="0"/>
-                <a:ea typeface="Cambria" pitchFamily="34" charset="-122"/>
-                <a:cs typeface="Cambria" pitchFamily="34" charset="-120"/>
+                  <a:srgbClr val="C8161D"/>
+                </a:solidFill>
+                <a:latin typeface="BIZ UDPGothic" pitchFamily="34" charset="0"/>
+                <a:ea typeface="BIZ UDPGothic" pitchFamily="34" charset="-122"/>
+                <a:cs typeface="BIZ UDPGothic" pitchFamily="34" charset="-120"/>
               </a:rPr>
               <a:t>利権構造の根絶</a:t>
             </a:r>
@@ -13639,11 +13639,11 @@
             <a:r>
               <a:rPr lang="en-US" sz="1100" dirty="0">
                 <a:solidFill>
-                  <a:srgbClr val="CCCCCC"/>
-                </a:solidFill>
-                <a:latin typeface="Arial" pitchFamily="34" charset="0"/>
-                <a:ea typeface="Arial" pitchFamily="34" charset="-122"/>
-                <a:cs typeface="Arial" pitchFamily="34" charset="-120"/>
+                  <a:srgbClr val="2B2F36"/>
+                </a:solidFill>
+                <a:latin typeface="Arial" pitchFamily="34" charset="0"/>
+                <a:ea typeface="BIZ UDPGothic" pitchFamily="34" charset="-122"/>
+                <a:cs typeface="BIZ UDPGothic" pitchFamily="34" charset="-120"/>
               </a:rPr>
               <a:t>税金を原資とした外郭団体・NPOへの不透明な資金流入を構造的に不可能にする</a:t>
             </a:r>
